--- a/docs/leadership/MICROSOFT_RUST_INVESTMENT_DECK.pptx
+++ b/docs/leadership/MICROSOFT_RUST_INVESTMENT_DECK.pptx
@@ -140,7 +140,7 @@
           <p:cNvPr id="2" name="Title 1">
             <a:extLst>
               <a:ext uri="{FF2B5EF4-FFF2-40B4-BE49-F238E27FC236}">
-                <a16:creationId xmlns:a16="http://schemas.microsoft.com/office/drawing/2014/main" id="{EA641141-158D-AF90-F061-A5796534A9BA}"/>
+                <a16:creationId xmlns:a16="http://schemas.microsoft.com/office/drawing/2014/main" id="{9994BF1D-5388-FB74-6F30-3921261206AF}"/>
               </a:ext>
             </a:extLst>
           </p:cNvPr>
@@ -177,7 +177,7 @@
           <p:cNvPr id="3" name="Subtitle 2">
             <a:extLst>
               <a:ext uri="{FF2B5EF4-FFF2-40B4-BE49-F238E27FC236}">
-                <a16:creationId xmlns:a16="http://schemas.microsoft.com/office/drawing/2014/main" id="{DB29B0F3-B06C-359C-2834-F9AE7BF1F494}"/>
+                <a16:creationId xmlns:a16="http://schemas.microsoft.com/office/drawing/2014/main" id="{5F61A21A-6F7E-CDDC-AB7B-B605258AC312}"/>
               </a:ext>
             </a:extLst>
           </p:cNvPr>
@@ -247,7 +247,7 @@
           <p:cNvPr id="4" name="Date Placeholder 3">
             <a:extLst>
               <a:ext uri="{FF2B5EF4-FFF2-40B4-BE49-F238E27FC236}">
-                <a16:creationId xmlns:a16="http://schemas.microsoft.com/office/drawing/2014/main" id="{DAE0EF79-8834-CEBA-F995-2375BA34B16C}"/>
+                <a16:creationId xmlns:a16="http://schemas.microsoft.com/office/drawing/2014/main" id="{2D14E37C-37FE-FF7D-667E-517DC0A8D8C0}"/>
               </a:ext>
             </a:extLst>
           </p:cNvPr>
@@ -263,9 +263,9 @@
           <a:bodyPr/>
           <a:lstStyle/>
           <a:p>
-            <a:fld id="{499CE911-6C8C-4E61-9158-5B0A8CB9CAA8}" type="datetimeFigureOut">
+            <a:fld id="{33959005-B26C-4F66-8525-6755711030AC}" type="datetimeFigureOut">
               <a:rPr lang="en-US" smtClean="0"/>
-              <a:t>8/11/2026</a:t>
+              <a:t>8/19/2026</a:t>
             </a:fld>
             <a:endParaRPr lang="en-US"/>
           </a:p>
@@ -276,7 +276,7 @@
           <p:cNvPr id="5" name="Footer Placeholder 4">
             <a:extLst>
               <a:ext uri="{FF2B5EF4-FFF2-40B4-BE49-F238E27FC236}">
-                <a16:creationId xmlns:a16="http://schemas.microsoft.com/office/drawing/2014/main" id="{32BB13D7-3E74-A3CA-8E14-44019DE3421C}"/>
+                <a16:creationId xmlns:a16="http://schemas.microsoft.com/office/drawing/2014/main" id="{2B2A7E0A-B2C2-79C9-0872-23583E763C6B}"/>
               </a:ext>
             </a:extLst>
           </p:cNvPr>
@@ -301,7 +301,7 @@
           <p:cNvPr id="6" name="Slide Number Placeholder 5">
             <a:extLst>
               <a:ext uri="{FF2B5EF4-FFF2-40B4-BE49-F238E27FC236}">
-                <a16:creationId xmlns:a16="http://schemas.microsoft.com/office/drawing/2014/main" id="{188276D8-C7E4-131A-EAD4-0BFDB1203D1A}"/>
+                <a16:creationId xmlns:a16="http://schemas.microsoft.com/office/drawing/2014/main" id="{E8987516-C392-0FE5-E4AA-10D67550F6E9}"/>
               </a:ext>
             </a:extLst>
           </p:cNvPr>
@@ -317,7 +317,7 @@
           <a:bodyPr/>
           <a:lstStyle/>
           <a:p>
-            <a:fld id="{A0C31EC1-F1FE-4E00-9CE8-AAD3DB7357C9}" type="slidenum">
+            <a:fld id="{877D9784-4EBE-4E69-A4A0-9CB0C6271F0B}" type="slidenum">
               <a:rPr lang="en-US" smtClean="0"/>
               <a:t>‹#›</a:t>
             </a:fld>
@@ -328,7 +328,7 @@
     </p:spTree>
     <p:extLst>
       <p:ext uri="{BB962C8B-B14F-4D97-AF65-F5344CB8AC3E}">
-        <p14:creationId xmlns:p14="http://schemas.microsoft.com/office/powerpoint/2010/main" val="3050540061"/>
+        <p14:creationId xmlns:p14="http://schemas.microsoft.com/office/powerpoint/2010/main" val="2587093594"/>
       </p:ext>
     </p:extLst>
   </p:cSld>
@@ -360,7 +360,7 @@
           <p:cNvPr id="2" name="Title 1">
             <a:extLst>
               <a:ext uri="{FF2B5EF4-FFF2-40B4-BE49-F238E27FC236}">
-                <a16:creationId xmlns:a16="http://schemas.microsoft.com/office/drawing/2014/main" id="{4886FAEE-FB9A-DF15-45A8-A4F8A3BBF093}"/>
+                <a16:creationId xmlns:a16="http://schemas.microsoft.com/office/drawing/2014/main" id="{77507FBA-98A2-3E52-B1A8-6A7E264933E8}"/>
               </a:ext>
             </a:extLst>
           </p:cNvPr>
@@ -388,7 +388,7 @@
           <p:cNvPr id="3" name="Vertical Text Placeholder 2">
             <a:extLst>
               <a:ext uri="{FF2B5EF4-FFF2-40B4-BE49-F238E27FC236}">
-                <a16:creationId xmlns:a16="http://schemas.microsoft.com/office/drawing/2014/main" id="{A1ED8655-805B-9A55-4B85-BD25854AAF0B}"/>
+                <a16:creationId xmlns:a16="http://schemas.microsoft.com/office/drawing/2014/main" id="{C6CE615B-F59E-21FE-9CFB-5C2325182DE2}"/>
               </a:ext>
             </a:extLst>
           </p:cNvPr>
@@ -445,7 +445,7 @@
           <p:cNvPr id="4" name="Date Placeholder 3">
             <a:extLst>
               <a:ext uri="{FF2B5EF4-FFF2-40B4-BE49-F238E27FC236}">
-                <a16:creationId xmlns:a16="http://schemas.microsoft.com/office/drawing/2014/main" id="{BC2D1F60-67EA-09C5-7203-309DDA9723AC}"/>
+                <a16:creationId xmlns:a16="http://schemas.microsoft.com/office/drawing/2014/main" id="{F48B6732-A129-5DFA-F97A-EBD76B84E7AA}"/>
               </a:ext>
             </a:extLst>
           </p:cNvPr>
@@ -461,9 +461,9 @@
           <a:bodyPr/>
           <a:lstStyle/>
           <a:p>
-            <a:fld id="{499CE911-6C8C-4E61-9158-5B0A8CB9CAA8}" type="datetimeFigureOut">
+            <a:fld id="{33959005-B26C-4F66-8525-6755711030AC}" type="datetimeFigureOut">
               <a:rPr lang="en-US" smtClean="0"/>
-              <a:t>8/11/2026</a:t>
+              <a:t>8/19/2026</a:t>
             </a:fld>
             <a:endParaRPr lang="en-US"/>
           </a:p>
@@ -474,7 +474,7 @@
           <p:cNvPr id="5" name="Footer Placeholder 4">
             <a:extLst>
               <a:ext uri="{FF2B5EF4-FFF2-40B4-BE49-F238E27FC236}">
-                <a16:creationId xmlns:a16="http://schemas.microsoft.com/office/drawing/2014/main" id="{269099EF-7FB6-E49B-E90D-121EEAC10DF0}"/>
+                <a16:creationId xmlns:a16="http://schemas.microsoft.com/office/drawing/2014/main" id="{3580CAB2-FDA6-B34B-24E6-7A0FE6A3AA1E}"/>
               </a:ext>
             </a:extLst>
           </p:cNvPr>
@@ -499,7 +499,7 @@
           <p:cNvPr id="6" name="Slide Number Placeholder 5">
             <a:extLst>
               <a:ext uri="{FF2B5EF4-FFF2-40B4-BE49-F238E27FC236}">
-                <a16:creationId xmlns:a16="http://schemas.microsoft.com/office/drawing/2014/main" id="{16FC6FF5-15CD-2610-E0EB-F745FB54F980}"/>
+                <a16:creationId xmlns:a16="http://schemas.microsoft.com/office/drawing/2014/main" id="{8FDDB554-19CF-00F2-CF27-8A2396CDB357}"/>
               </a:ext>
             </a:extLst>
           </p:cNvPr>
@@ -515,7 +515,7 @@
           <a:bodyPr/>
           <a:lstStyle/>
           <a:p>
-            <a:fld id="{A0C31EC1-F1FE-4E00-9CE8-AAD3DB7357C9}" type="slidenum">
+            <a:fld id="{877D9784-4EBE-4E69-A4A0-9CB0C6271F0B}" type="slidenum">
               <a:rPr lang="en-US" smtClean="0"/>
               <a:t>‹#›</a:t>
             </a:fld>
@@ -526,7 +526,7 @@
     </p:spTree>
     <p:extLst>
       <p:ext uri="{BB962C8B-B14F-4D97-AF65-F5344CB8AC3E}">
-        <p14:creationId xmlns:p14="http://schemas.microsoft.com/office/powerpoint/2010/main" val="3223396421"/>
+        <p14:creationId xmlns:p14="http://schemas.microsoft.com/office/powerpoint/2010/main" val="1414840168"/>
       </p:ext>
     </p:extLst>
   </p:cSld>
@@ -558,7 +558,7 @@
           <p:cNvPr id="2" name="Vertical Title 1">
             <a:extLst>
               <a:ext uri="{FF2B5EF4-FFF2-40B4-BE49-F238E27FC236}">
-                <a16:creationId xmlns:a16="http://schemas.microsoft.com/office/drawing/2014/main" id="{8B78D44F-26FE-2FA9-1E41-A035B2CA42F3}"/>
+                <a16:creationId xmlns:a16="http://schemas.microsoft.com/office/drawing/2014/main" id="{8F82619D-9C1D-3729-4315-25EA65CB0D62}"/>
               </a:ext>
             </a:extLst>
           </p:cNvPr>
@@ -591,7 +591,7 @@
           <p:cNvPr id="3" name="Vertical Text Placeholder 2">
             <a:extLst>
               <a:ext uri="{FF2B5EF4-FFF2-40B4-BE49-F238E27FC236}">
-                <a16:creationId xmlns:a16="http://schemas.microsoft.com/office/drawing/2014/main" id="{CB2B0A18-4DDD-68C8-E726-59818D998BE5}"/>
+                <a16:creationId xmlns:a16="http://schemas.microsoft.com/office/drawing/2014/main" id="{028AEBB4-E247-59BE-9358-ECFF25594014}"/>
               </a:ext>
             </a:extLst>
           </p:cNvPr>
@@ -653,7 +653,7 @@
           <p:cNvPr id="4" name="Date Placeholder 3">
             <a:extLst>
               <a:ext uri="{FF2B5EF4-FFF2-40B4-BE49-F238E27FC236}">
-                <a16:creationId xmlns:a16="http://schemas.microsoft.com/office/drawing/2014/main" id="{2F57278D-4825-A054-575D-5156D96E89A1}"/>
+                <a16:creationId xmlns:a16="http://schemas.microsoft.com/office/drawing/2014/main" id="{97CC676E-A570-A137-CE38-D01D898869A3}"/>
               </a:ext>
             </a:extLst>
           </p:cNvPr>
@@ -669,9 +669,9 @@
           <a:bodyPr/>
           <a:lstStyle/>
           <a:p>
-            <a:fld id="{499CE911-6C8C-4E61-9158-5B0A8CB9CAA8}" type="datetimeFigureOut">
+            <a:fld id="{33959005-B26C-4F66-8525-6755711030AC}" type="datetimeFigureOut">
               <a:rPr lang="en-US" smtClean="0"/>
-              <a:t>8/11/2026</a:t>
+              <a:t>8/19/2026</a:t>
             </a:fld>
             <a:endParaRPr lang="en-US"/>
           </a:p>
@@ -682,7 +682,7 @@
           <p:cNvPr id="5" name="Footer Placeholder 4">
             <a:extLst>
               <a:ext uri="{FF2B5EF4-FFF2-40B4-BE49-F238E27FC236}">
-                <a16:creationId xmlns:a16="http://schemas.microsoft.com/office/drawing/2014/main" id="{BBA86384-C385-E96A-FF7D-D3F0E7483F02}"/>
+                <a16:creationId xmlns:a16="http://schemas.microsoft.com/office/drawing/2014/main" id="{1970EE54-2B92-CD78-8B2A-3272CD11FA8A}"/>
               </a:ext>
             </a:extLst>
           </p:cNvPr>
@@ -707,7 +707,7 @@
           <p:cNvPr id="6" name="Slide Number Placeholder 5">
             <a:extLst>
               <a:ext uri="{FF2B5EF4-FFF2-40B4-BE49-F238E27FC236}">
-                <a16:creationId xmlns:a16="http://schemas.microsoft.com/office/drawing/2014/main" id="{60711D07-9CC7-3E75-391A-2DCE3AEE573B}"/>
+                <a16:creationId xmlns:a16="http://schemas.microsoft.com/office/drawing/2014/main" id="{ECAA9119-1212-AEAA-891D-A79AC496EBB5}"/>
               </a:ext>
             </a:extLst>
           </p:cNvPr>
@@ -723,7 +723,7 @@
           <a:bodyPr/>
           <a:lstStyle/>
           <a:p>
-            <a:fld id="{A0C31EC1-F1FE-4E00-9CE8-AAD3DB7357C9}" type="slidenum">
+            <a:fld id="{877D9784-4EBE-4E69-A4A0-9CB0C6271F0B}" type="slidenum">
               <a:rPr lang="en-US" smtClean="0"/>
               <a:t>‹#›</a:t>
             </a:fld>
@@ -734,7 +734,7 @@
     </p:spTree>
     <p:extLst>
       <p:ext uri="{BB962C8B-B14F-4D97-AF65-F5344CB8AC3E}">
-        <p14:creationId xmlns:p14="http://schemas.microsoft.com/office/powerpoint/2010/main" val="4108953130"/>
+        <p14:creationId xmlns:p14="http://schemas.microsoft.com/office/powerpoint/2010/main" val="3316132120"/>
       </p:ext>
     </p:extLst>
   </p:cSld>
@@ -766,7 +766,7 @@
           <p:cNvPr id="2" name="Title 1">
             <a:extLst>
               <a:ext uri="{FF2B5EF4-FFF2-40B4-BE49-F238E27FC236}">
-                <a16:creationId xmlns:a16="http://schemas.microsoft.com/office/drawing/2014/main" id="{7E507E4E-F325-1C3C-0492-A4B85BC88145}"/>
+                <a16:creationId xmlns:a16="http://schemas.microsoft.com/office/drawing/2014/main" id="{2011CE4D-3065-899C-2BE2-06C9C810021B}"/>
               </a:ext>
             </a:extLst>
           </p:cNvPr>
@@ -794,7 +794,7 @@
           <p:cNvPr id="3" name="Content Placeholder 2">
             <a:extLst>
               <a:ext uri="{FF2B5EF4-FFF2-40B4-BE49-F238E27FC236}">
-                <a16:creationId xmlns:a16="http://schemas.microsoft.com/office/drawing/2014/main" id="{F6809AB3-6ECF-7B4F-9870-17F1DC261F9A}"/>
+                <a16:creationId xmlns:a16="http://schemas.microsoft.com/office/drawing/2014/main" id="{F5413661-E3C1-3727-C08E-E66F0F58774C}"/>
               </a:ext>
             </a:extLst>
           </p:cNvPr>
@@ -851,7 +851,7 @@
           <p:cNvPr id="4" name="Date Placeholder 3">
             <a:extLst>
               <a:ext uri="{FF2B5EF4-FFF2-40B4-BE49-F238E27FC236}">
-                <a16:creationId xmlns:a16="http://schemas.microsoft.com/office/drawing/2014/main" id="{3F6987DF-21CD-7786-5CDB-4C0649426887}"/>
+                <a16:creationId xmlns:a16="http://schemas.microsoft.com/office/drawing/2014/main" id="{65D29190-37F4-900F-DCBC-8D04D552569E}"/>
               </a:ext>
             </a:extLst>
           </p:cNvPr>
@@ -867,9 +867,9 @@
           <a:bodyPr/>
           <a:lstStyle/>
           <a:p>
-            <a:fld id="{499CE911-6C8C-4E61-9158-5B0A8CB9CAA8}" type="datetimeFigureOut">
+            <a:fld id="{33959005-B26C-4F66-8525-6755711030AC}" type="datetimeFigureOut">
               <a:rPr lang="en-US" smtClean="0"/>
-              <a:t>8/11/2026</a:t>
+              <a:t>8/19/2026</a:t>
             </a:fld>
             <a:endParaRPr lang="en-US"/>
           </a:p>
@@ -880,7 +880,7 @@
           <p:cNvPr id="5" name="Footer Placeholder 4">
             <a:extLst>
               <a:ext uri="{FF2B5EF4-FFF2-40B4-BE49-F238E27FC236}">
-                <a16:creationId xmlns:a16="http://schemas.microsoft.com/office/drawing/2014/main" id="{973F4B1D-8D72-65BF-B36F-469470AB8F35}"/>
+                <a16:creationId xmlns:a16="http://schemas.microsoft.com/office/drawing/2014/main" id="{5B512AFE-C667-47CD-2A9F-82E04EE05FB9}"/>
               </a:ext>
             </a:extLst>
           </p:cNvPr>
@@ -905,7 +905,7 @@
           <p:cNvPr id="6" name="Slide Number Placeholder 5">
             <a:extLst>
               <a:ext uri="{FF2B5EF4-FFF2-40B4-BE49-F238E27FC236}">
-                <a16:creationId xmlns:a16="http://schemas.microsoft.com/office/drawing/2014/main" id="{68E018B2-CBF7-30E5-8962-4F575DF8B83E}"/>
+                <a16:creationId xmlns:a16="http://schemas.microsoft.com/office/drawing/2014/main" id="{F85753AC-5B8F-B355-866C-ECD4EDBBD861}"/>
               </a:ext>
             </a:extLst>
           </p:cNvPr>
@@ -921,7 +921,7 @@
           <a:bodyPr/>
           <a:lstStyle/>
           <a:p>
-            <a:fld id="{A0C31EC1-F1FE-4E00-9CE8-AAD3DB7357C9}" type="slidenum">
+            <a:fld id="{877D9784-4EBE-4E69-A4A0-9CB0C6271F0B}" type="slidenum">
               <a:rPr lang="en-US" smtClean="0"/>
               <a:t>‹#›</a:t>
             </a:fld>
@@ -932,7 +932,7 @@
     </p:spTree>
     <p:extLst>
       <p:ext uri="{BB962C8B-B14F-4D97-AF65-F5344CB8AC3E}">
-        <p14:creationId xmlns:p14="http://schemas.microsoft.com/office/powerpoint/2010/main" val="2609163125"/>
+        <p14:creationId xmlns:p14="http://schemas.microsoft.com/office/powerpoint/2010/main" val="3552403539"/>
       </p:ext>
     </p:extLst>
   </p:cSld>
@@ -964,7 +964,7 @@
           <p:cNvPr id="2" name="Title 1">
             <a:extLst>
               <a:ext uri="{FF2B5EF4-FFF2-40B4-BE49-F238E27FC236}">
-                <a16:creationId xmlns:a16="http://schemas.microsoft.com/office/drawing/2014/main" id="{4F240829-D6B6-637D-90BD-BB97C2FAC7A1}"/>
+                <a16:creationId xmlns:a16="http://schemas.microsoft.com/office/drawing/2014/main" id="{6D966CFB-4B2A-1E21-C724-F5DACCA4D01B}"/>
               </a:ext>
             </a:extLst>
           </p:cNvPr>
@@ -1001,7 +1001,7 @@
           <p:cNvPr id="3" name="Text Placeholder 2">
             <a:extLst>
               <a:ext uri="{FF2B5EF4-FFF2-40B4-BE49-F238E27FC236}">
-                <a16:creationId xmlns:a16="http://schemas.microsoft.com/office/drawing/2014/main" id="{30D291C7-9D5F-6D19-3F4C-B05AFB730C16}"/>
+                <a16:creationId xmlns:a16="http://schemas.microsoft.com/office/drawing/2014/main" id="{E5AA3D84-8A49-B0A5-38F6-91072D10F1E2}"/>
               </a:ext>
             </a:extLst>
           </p:cNvPr>
@@ -1126,7 +1126,7 @@
           <p:cNvPr id="4" name="Date Placeholder 3">
             <a:extLst>
               <a:ext uri="{FF2B5EF4-FFF2-40B4-BE49-F238E27FC236}">
-                <a16:creationId xmlns:a16="http://schemas.microsoft.com/office/drawing/2014/main" id="{9073390B-2A81-DA65-D479-B977F1D22D8C}"/>
+                <a16:creationId xmlns:a16="http://schemas.microsoft.com/office/drawing/2014/main" id="{602E8954-79D8-0534-6265-D8F90E06A714}"/>
               </a:ext>
             </a:extLst>
           </p:cNvPr>
@@ -1142,9 +1142,9 @@
           <a:bodyPr/>
           <a:lstStyle/>
           <a:p>
-            <a:fld id="{499CE911-6C8C-4E61-9158-5B0A8CB9CAA8}" type="datetimeFigureOut">
+            <a:fld id="{33959005-B26C-4F66-8525-6755711030AC}" type="datetimeFigureOut">
               <a:rPr lang="en-US" smtClean="0"/>
-              <a:t>8/11/2026</a:t>
+              <a:t>8/19/2026</a:t>
             </a:fld>
             <a:endParaRPr lang="en-US"/>
           </a:p>
@@ -1155,7 +1155,7 @@
           <p:cNvPr id="5" name="Footer Placeholder 4">
             <a:extLst>
               <a:ext uri="{FF2B5EF4-FFF2-40B4-BE49-F238E27FC236}">
-                <a16:creationId xmlns:a16="http://schemas.microsoft.com/office/drawing/2014/main" id="{8CA1E38E-2C39-C9F3-AD9D-72C7D13318E2}"/>
+                <a16:creationId xmlns:a16="http://schemas.microsoft.com/office/drawing/2014/main" id="{FC232549-B2F8-9C25-D08A-18118DE8D8B0}"/>
               </a:ext>
             </a:extLst>
           </p:cNvPr>
@@ -1180,7 +1180,7 @@
           <p:cNvPr id="6" name="Slide Number Placeholder 5">
             <a:extLst>
               <a:ext uri="{FF2B5EF4-FFF2-40B4-BE49-F238E27FC236}">
-                <a16:creationId xmlns:a16="http://schemas.microsoft.com/office/drawing/2014/main" id="{D0C53DF3-32B4-539B-8D28-14EA3ABCC6F0}"/>
+                <a16:creationId xmlns:a16="http://schemas.microsoft.com/office/drawing/2014/main" id="{D5F1016D-D143-AF64-D852-C3938C858B33}"/>
               </a:ext>
             </a:extLst>
           </p:cNvPr>
@@ -1196,7 +1196,7 @@
           <a:bodyPr/>
           <a:lstStyle/>
           <a:p>
-            <a:fld id="{A0C31EC1-F1FE-4E00-9CE8-AAD3DB7357C9}" type="slidenum">
+            <a:fld id="{877D9784-4EBE-4E69-A4A0-9CB0C6271F0B}" type="slidenum">
               <a:rPr lang="en-US" smtClean="0"/>
               <a:t>‹#›</a:t>
             </a:fld>
@@ -1207,7 +1207,7 @@
     </p:spTree>
     <p:extLst>
       <p:ext uri="{BB962C8B-B14F-4D97-AF65-F5344CB8AC3E}">
-        <p14:creationId xmlns:p14="http://schemas.microsoft.com/office/powerpoint/2010/main" val="2784386148"/>
+        <p14:creationId xmlns:p14="http://schemas.microsoft.com/office/powerpoint/2010/main" val="3862813258"/>
       </p:ext>
     </p:extLst>
   </p:cSld>
@@ -1239,7 +1239,7 @@
           <p:cNvPr id="2" name="Title 1">
             <a:extLst>
               <a:ext uri="{FF2B5EF4-FFF2-40B4-BE49-F238E27FC236}">
-                <a16:creationId xmlns:a16="http://schemas.microsoft.com/office/drawing/2014/main" id="{3225FEC1-EB05-AAA7-FEB4-88950425F84C}"/>
+                <a16:creationId xmlns:a16="http://schemas.microsoft.com/office/drawing/2014/main" id="{6CD4E0C1-F3C4-4BE8-60B1-A06EA492DECA}"/>
               </a:ext>
             </a:extLst>
           </p:cNvPr>
@@ -1267,7 +1267,7 @@
           <p:cNvPr id="3" name="Content Placeholder 2">
             <a:extLst>
               <a:ext uri="{FF2B5EF4-FFF2-40B4-BE49-F238E27FC236}">
-                <a16:creationId xmlns:a16="http://schemas.microsoft.com/office/drawing/2014/main" id="{EB5EB7F7-8D6C-C7F7-0F87-B32660C61080}"/>
+                <a16:creationId xmlns:a16="http://schemas.microsoft.com/office/drawing/2014/main" id="{2B6AB636-9B48-1D60-7205-D80AD6B4AE0F}"/>
               </a:ext>
             </a:extLst>
           </p:cNvPr>
@@ -1329,7 +1329,7 @@
           <p:cNvPr id="4" name="Content Placeholder 3">
             <a:extLst>
               <a:ext uri="{FF2B5EF4-FFF2-40B4-BE49-F238E27FC236}">
-                <a16:creationId xmlns:a16="http://schemas.microsoft.com/office/drawing/2014/main" id="{362E05ED-7F50-EF9B-08E6-B84A93D434A0}"/>
+                <a16:creationId xmlns:a16="http://schemas.microsoft.com/office/drawing/2014/main" id="{842D426E-728E-4093-EB84-293882421EE2}"/>
               </a:ext>
             </a:extLst>
           </p:cNvPr>
@@ -1391,7 +1391,7 @@
           <p:cNvPr id="5" name="Date Placeholder 4">
             <a:extLst>
               <a:ext uri="{FF2B5EF4-FFF2-40B4-BE49-F238E27FC236}">
-                <a16:creationId xmlns:a16="http://schemas.microsoft.com/office/drawing/2014/main" id="{4CAA72A5-8649-0629-E257-01DA84534020}"/>
+                <a16:creationId xmlns:a16="http://schemas.microsoft.com/office/drawing/2014/main" id="{977CFB8E-69C8-2FF5-AF3C-172F5A2DEC74}"/>
               </a:ext>
             </a:extLst>
           </p:cNvPr>
@@ -1407,9 +1407,9 @@
           <a:bodyPr/>
           <a:lstStyle/>
           <a:p>
-            <a:fld id="{499CE911-6C8C-4E61-9158-5B0A8CB9CAA8}" type="datetimeFigureOut">
+            <a:fld id="{33959005-B26C-4F66-8525-6755711030AC}" type="datetimeFigureOut">
               <a:rPr lang="en-US" smtClean="0"/>
-              <a:t>8/11/2026</a:t>
+              <a:t>8/19/2026</a:t>
             </a:fld>
             <a:endParaRPr lang="en-US"/>
           </a:p>
@@ -1420,7 +1420,7 @@
           <p:cNvPr id="6" name="Footer Placeholder 5">
             <a:extLst>
               <a:ext uri="{FF2B5EF4-FFF2-40B4-BE49-F238E27FC236}">
-                <a16:creationId xmlns:a16="http://schemas.microsoft.com/office/drawing/2014/main" id="{305C74E5-2622-BB54-BE82-E892D2DEFD93}"/>
+                <a16:creationId xmlns:a16="http://schemas.microsoft.com/office/drawing/2014/main" id="{74807B01-6349-1428-39D7-0D99D8FAF369}"/>
               </a:ext>
             </a:extLst>
           </p:cNvPr>
@@ -1445,7 +1445,7 @@
           <p:cNvPr id="7" name="Slide Number Placeholder 6">
             <a:extLst>
               <a:ext uri="{FF2B5EF4-FFF2-40B4-BE49-F238E27FC236}">
-                <a16:creationId xmlns:a16="http://schemas.microsoft.com/office/drawing/2014/main" id="{DE9BFAD9-788E-7BA1-BB4E-497CD737D69D}"/>
+                <a16:creationId xmlns:a16="http://schemas.microsoft.com/office/drawing/2014/main" id="{C97706E6-A390-5B7A-65B5-D69AC864E339}"/>
               </a:ext>
             </a:extLst>
           </p:cNvPr>
@@ -1461,7 +1461,7 @@
           <a:bodyPr/>
           <a:lstStyle/>
           <a:p>
-            <a:fld id="{A0C31EC1-F1FE-4E00-9CE8-AAD3DB7357C9}" type="slidenum">
+            <a:fld id="{877D9784-4EBE-4E69-A4A0-9CB0C6271F0B}" type="slidenum">
               <a:rPr lang="en-US" smtClean="0"/>
               <a:t>‹#›</a:t>
             </a:fld>
@@ -1472,7 +1472,7 @@
     </p:spTree>
     <p:extLst>
       <p:ext uri="{BB962C8B-B14F-4D97-AF65-F5344CB8AC3E}">
-        <p14:creationId xmlns:p14="http://schemas.microsoft.com/office/powerpoint/2010/main" val="516794346"/>
+        <p14:creationId xmlns:p14="http://schemas.microsoft.com/office/powerpoint/2010/main" val="895699447"/>
       </p:ext>
     </p:extLst>
   </p:cSld>
@@ -1504,7 +1504,7 @@
           <p:cNvPr id="2" name="Title 1">
             <a:extLst>
               <a:ext uri="{FF2B5EF4-FFF2-40B4-BE49-F238E27FC236}">
-                <a16:creationId xmlns:a16="http://schemas.microsoft.com/office/drawing/2014/main" id="{DA557E1A-6075-FFD4-A141-ED6D340F55C0}"/>
+                <a16:creationId xmlns:a16="http://schemas.microsoft.com/office/drawing/2014/main" id="{24CAFA56-9056-1593-DF4B-587DCD9A1A2A}"/>
               </a:ext>
             </a:extLst>
           </p:cNvPr>
@@ -1537,7 +1537,7 @@
           <p:cNvPr id="3" name="Text Placeholder 2">
             <a:extLst>
               <a:ext uri="{FF2B5EF4-FFF2-40B4-BE49-F238E27FC236}">
-                <a16:creationId xmlns:a16="http://schemas.microsoft.com/office/drawing/2014/main" id="{5C1A5898-570C-A025-A868-9988E5AAE9BA}"/>
+                <a16:creationId xmlns:a16="http://schemas.microsoft.com/office/drawing/2014/main" id="{F493E48C-490A-318E-8248-6C7F6237BF94}"/>
               </a:ext>
             </a:extLst>
           </p:cNvPr>
@@ -1608,7 +1608,7 @@
           <p:cNvPr id="4" name="Content Placeholder 3">
             <a:extLst>
               <a:ext uri="{FF2B5EF4-FFF2-40B4-BE49-F238E27FC236}">
-                <a16:creationId xmlns:a16="http://schemas.microsoft.com/office/drawing/2014/main" id="{0388F4BF-D32E-23A8-E029-22EE5A22D234}"/>
+                <a16:creationId xmlns:a16="http://schemas.microsoft.com/office/drawing/2014/main" id="{1B0157A6-4CA0-0F5D-4AEE-C685920928FA}"/>
               </a:ext>
             </a:extLst>
           </p:cNvPr>
@@ -1670,7 +1670,7 @@
           <p:cNvPr id="5" name="Text Placeholder 4">
             <a:extLst>
               <a:ext uri="{FF2B5EF4-FFF2-40B4-BE49-F238E27FC236}">
-                <a16:creationId xmlns:a16="http://schemas.microsoft.com/office/drawing/2014/main" id="{E7034E0D-C319-46A5-9E0A-C6D34A3A1949}"/>
+                <a16:creationId xmlns:a16="http://schemas.microsoft.com/office/drawing/2014/main" id="{203AFAC2-504D-E773-2213-4B210D1DB57D}"/>
               </a:ext>
             </a:extLst>
           </p:cNvPr>
@@ -1741,7 +1741,7 @@
           <p:cNvPr id="6" name="Content Placeholder 5">
             <a:extLst>
               <a:ext uri="{FF2B5EF4-FFF2-40B4-BE49-F238E27FC236}">
-                <a16:creationId xmlns:a16="http://schemas.microsoft.com/office/drawing/2014/main" id="{35342BD7-06C4-5294-4542-93F3A6E676E2}"/>
+                <a16:creationId xmlns:a16="http://schemas.microsoft.com/office/drawing/2014/main" id="{8438E3E6-D271-6096-F61A-53FB24716949}"/>
               </a:ext>
             </a:extLst>
           </p:cNvPr>
@@ -1803,7 +1803,7 @@
           <p:cNvPr id="7" name="Date Placeholder 6">
             <a:extLst>
               <a:ext uri="{FF2B5EF4-FFF2-40B4-BE49-F238E27FC236}">
-                <a16:creationId xmlns:a16="http://schemas.microsoft.com/office/drawing/2014/main" id="{76373ECB-8489-C1B3-EA3F-C31423333B0D}"/>
+                <a16:creationId xmlns:a16="http://schemas.microsoft.com/office/drawing/2014/main" id="{AEDB853F-1CF1-E2AD-63A0-0B1444BDC516}"/>
               </a:ext>
             </a:extLst>
           </p:cNvPr>
@@ -1819,9 +1819,9 @@
           <a:bodyPr/>
           <a:lstStyle/>
           <a:p>
-            <a:fld id="{499CE911-6C8C-4E61-9158-5B0A8CB9CAA8}" type="datetimeFigureOut">
+            <a:fld id="{33959005-B26C-4F66-8525-6755711030AC}" type="datetimeFigureOut">
               <a:rPr lang="en-US" smtClean="0"/>
-              <a:t>8/11/2026</a:t>
+              <a:t>8/19/2026</a:t>
             </a:fld>
             <a:endParaRPr lang="en-US"/>
           </a:p>
@@ -1832,7 +1832,7 @@
           <p:cNvPr id="8" name="Footer Placeholder 7">
             <a:extLst>
               <a:ext uri="{FF2B5EF4-FFF2-40B4-BE49-F238E27FC236}">
-                <a16:creationId xmlns:a16="http://schemas.microsoft.com/office/drawing/2014/main" id="{9BE390AC-B890-4F12-5D8B-FDBFB0CAF0F5}"/>
+                <a16:creationId xmlns:a16="http://schemas.microsoft.com/office/drawing/2014/main" id="{6D4AAB27-EDC7-33C3-FC19-31DFB5CCD7D8}"/>
               </a:ext>
             </a:extLst>
           </p:cNvPr>
@@ -1857,7 +1857,7 @@
           <p:cNvPr id="9" name="Slide Number Placeholder 8">
             <a:extLst>
               <a:ext uri="{FF2B5EF4-FFF2-40B4-BE49-F238E27FC236}">
-                <a16:creationId xmlns:a16="http://schemas.microsoft.com/office/drawing/2014/main" id="{DB7C2111-D478-90D6-DAFB-CFE1963924D6}"/>
+                <a16:creationId xmlns:a16="http://schemas.microsoft.com/office/drawing/2014/main" id="{2F2B6103-C9FD-175A-D947-4678A7AF21B1}"/>
               </a:ext>
             </a:extLst>
           </p:cNvPr>
@@ -1873,7 +1873,7 @@
           <a:bodyPr/>
           <a:lstStyle/>
           <a:p>
-            <a:fld id="{A0C31EC1-F1FE-4E00-9CE8-AAD3DB7357C9}" type="slidenum">
+            <a:fld id="{877D9784-4EBE-4E69-A4A0-9CB0C6271F0B}" type="slidenum">
               <a:rPr lang="en-US" smtClean="0"/>
               <a:t>‹#›</a:t>
             </a:fld>
@@ -1884,7 +1884,7 @@
     </p:spTree>
     <p:extLst>
       <p:ext uri="{BB962C8B-B14F-4D97-AF65-F5344CB8AC3E}">
-        <p14:creationId xmlns:p14="http://schemas.microsoft.com/office/powerpoint/2010/main" val="2584826762"/>
+        <p14:creationId xmlns:p14="http://schemas.microsoft.com/office/powerpoint/2010/main" val="1757074486"/>
       </p:ext>
     </p:extLst>
   </p:cSld>
@@ -1916,7 +1916,7 @@
           <p:cNvPr id="2" name="Title 1">
             <a:extLst>
               <a:ext uri="{FF2B5EF4-FFF2-40B4-BE49-F238E27FC236}">
-                <a16:creationId xmlns:a16="http://schemas.microsoft.com/office/drawing/2014/main" id="{5F199B3A-96ED-B732-3840-BE2FE6797364}"/>
+                <a16:creationId xmlns:a16="http://schemas.microsoft.com/office/drawing/2014/main" id="{6D65A5CE-B1C3-95E3-BF31-F153FF8D3512}"/>
               </a:ext>
             </a:extLst>
           </p:cNvPr>
@@ -1944,7 +1944,7 @@
           <p:cNvPr id="3" name="Date Placeholder 2">
             <a:extLst>
               <a:ext uri="{FF2B5EF4-FFF2-40B4-BE49-F238E27FC236}">
-                <a16:creationId xmlns:a16="http://schemas.microsoft.com/office/drawing/2014/main" id="{86A46FAA-0F4C-F47C-D697-A6DA100C17C6}"/>
+                <a16:creationId xmlns:a16="http://schemas.microsoft.com/office/drawing/2014/main" id="{6986EEB4-6B1F-6DE7-0781-94CE7ED91413}"/>
               </a:ext>
             </a:extLst>
           </p:cNvPr>
@@ -1960,9 +1960,9 @@
           <a:bodyPr/>
           <a:lstStyle/>
           <a:p>
-            <a:fld id="{499CE911-6C8C-4E61-9158-5B0A8CB9CAA8}" type="datetimeFigureOut">
+            <a:fld id="{33959005-B26C-4F66-8525-6755711030AC}" type="datetimeFigureOut">
               <a:rPr lang="en-US" smtClean="0"/>
-              <a:t>8/11/2026</a:t>
+              <a:t>8/19/2026</a:t>
             </a:fld>
             <a:endParaRPr lang="en-US"/>
           </a:p>
@@ -1973,7 +1973,7 @@
           <p:cNvPr id="4" name="Footer Placeholder 3">
             <a:extLst>
               <a:ext uri="{FF2B5EF4-FFF2-40B4-BE49-F238E27FC236}">
-                <a16:creationId xmlns:a16="http://schemas.microsoft.com/office/drawing/2014/main" id="{66374C28-56DF-A15A-6120-3A5D0D6FD872}"/>
+                <a16:creationId xmlns:a16="http://schemas.microsoft.com/office/drawing/2014/main" id="{7156AE62-1C8F-6C08-C423-62AFE21E7612}"/>
               </a:ext>
             </a:extLst>
           </p:cNvPr>
@@ -1998,7 +1998,7 @@
           <p:cNvPr id="5" name="Slide Number Placeholder 4">
             <a:extLst>
               <a:ext uri="{FF2B5EF4-FFF2-40B4-BE49-F238E27FC236}">
-                <a16:creationId xmlns:a16="http://schemas.microsoft.com/office/drawing/2014/main" id="{F860BA91-B470-B74E-BDC4-3B13248DD457}"/>
+                <a16:creationId xmlns:a16="http://schemas.microsoft.com/office/drawing/2014/main" id="{1F214686-634C-0862-53C7-B59D902781AB}"/>
               </a:ext>
             </a:extLst>
           </p:cNvPr>
@@ -2014,7 +2014,7 @@
           <a:bodyPr/>
           <a:lstStyle/>
           <a:p>
-            <a:fld id="{A0C31EC1-F1FE-4E00-9CE8-AAD3DB7357C9}" type="slidenum">
+            <a:fld id="{877D9784-4EBE-4E69-A4A0-9CB0C6271F0B}" type="slidenum">
               <a:rPr lang="en-US" smtClean="0"/>
               <a:t>‹#›</a:t>
             </a:fld>
@@ -2025,7 +2025,7 @@
     </p:spTree>
     <p:extLst>
       <p:ext uri="{BB962C8B-B14F-4D97-AF65-F5344CB8AC3E}">
-        <p14:creationId xmlns:p14="http://schemas.microsoft.com/office/powerpoint/2010/main" val="4022608472"/>
+        <p14:creationId xmlns:p14="http://schemas.microsoft.com/office/powerpoint/2010/main" val="1497765542"/>
       </p:ext>
     </p:extLst>
   </p:cSld>
@@ -2057,7 +2057,7 @@
           <p:cNvPr id="2" name="Date Placeholder 1">
             <a:extLst>
               <a:ext uri="{FF2B5EF4-FFF2-40B4-BE49-F238E27FC236}">
-                <a16:creationId xmlns:a16="http://schemas.microsoft.com/office/drawing/2014/main" id="{FDD848B8-CD62-1547-B2AD-78550CE293C1}"/>
+                <a16:creationId xmlns:a16="http://schemas.microsoft.com/office/drawing/2014/main" id="{90EFD5EA-3C25-19DA-1119-A7AA154DEA29}"/>
               </a:ext>
             </a:extLst>
           </p:cNvPr>
@@ -2073,9 +2073,9 @@
           <a:bodyPr/>
           <a:lstStyle/>
           <a:p>
-            <a:fld id="{499CE911-6C8C-4E61-9158-5B0A8CB9CAA8}" type="datetimeFigureOut">
+            <a:fld id="{33959005-B26C-4F66-8525-6755711030AC}" type="datetimeFigureOut">
               <a:rPr lang="en-US" smtClean="0"/>
-              <a:t>8/11/2026</a:t>
+              <a:t>8/19/2026</a:t>
             </a:fld>
             <a:endParaRPr lang="en-US"/>
           </a:p>
@@ -2086,7 +2086,7 @@
           <p:cNvPr id="3" name="Footer Placeholder 2">
             <a:extLst>
               <a:ext uri="{FF2B5EF4-FFF2-40B4-BE49-F238E27FC236}">
-                <a16:creationId xmlns:a16="http://schemas.microsoft.com/office/drawing/2014/main" id="{79CF3255-3A6A-DFD3-59A9-E49986CBAC1E}"/>
+                <a16:creationId xmlns:a16="http://schemas.microsoft.com/office/drawing/2014/main" id="{4DAB7DBE-BFE1-2DAF-1348-A568E7351341}"/>
               </a:ext>
             </a:extLst>
           </p:cNvPr>
@@ -2111,7 +2111,7 @@
           <p:cNvPr id="4" name="Slide Number Placeholder 3">
             <a:extLst>
               <a:ext uri="{FF2B5EF4-FFF2-40B4-BE49-F238E27FC236}">
-                <a16:creationId xmlns:a16="http://schemas.microsoft.com/office/drawing/2014/main" id="{5AA4AD97-0207-D87F-A73B-F1AA416761A2}"/>
+                <a16:creationId xmlns:a16="http://schemas.microsoft.com/office/drawing/2014/main" id="{A1E733B0-977D-9635-B6B8-920CE37A6227}"/>
               </a:ext>
             </a:extLst>
           </p:cNvPr>
@@ -2127,7 +2127,7 @@
           <a:bodyPr/>
           <a:lstStyle/>
           <a:p>
-            <a:fld id="{A0C31EC1-F1FE-4E00-9CE8-AAD3DB7357C9}" type="slidenum">
+            <a:fld id="{877D9784-4EBE-4E69-A4A0-9CB0C6271F0B}" type="slidenum">
               <a:rPr lang="en-US" smtClean="0"/>
               <a:t>‹#›</a:t>
             </a:fld>
@@ -2138,7 +2138,7 @@
     </p:spTree>
     <p:extLst>
       <p:ext uri="{BB962C8B-B14F-4D97-AF65-F5344CB8AC3E}">
-        <p14:creationId xmlns:p14="http://schemas.microsoft.com/office/powerpoint/2010/main" val="789037599"/>
+        <p14:creationId xmlns:p14="http://schemas.microsoft.com/office/powerpoint/2010/main" val="907021651"/>
       </p:ext>
     </p:extLst>
   </p:cSld>
@@ -2170,7 +2170,7 @@
           <p:cNvPr id="2" name="Title 1">
             <a:extLst>
               <a:ext uri="{FF2B5EF4-FFF2-40B4-BE49-F238E27FC236}">
-                <a16:creationId xmlns:a16="http://schemas.microsoft.com/office/drawing/2014/main" id="{7F2B656C-740D-9256-DFE0-B1FD11D3A096}"/>
+                <a16:creationId xmlns:a16="http://schemas.microsoft.com/office/drawing/2014/main" id="{EDA0D5F4-220C-3D15-B00A-B7606510F917}"/>
               </a:ext>
             </a:extLst>
           </p:cNvPr>
@@ -2207,7 +2207,7 @@
           <p:cNvPr id="3" name="Content Placeholder 2">
             <a:extLst>
               <a:ext uri="{FF2B5EF4-FFF2-40B4-BE49-F238E27FC236}">
-                <a16:creationId xmlns:a16="http://schemas.microsoft.com/office/drawing/2014/main" id="{D2BE5223-B628-E207-4E8C-D568E4F767B8}"/>
+                <a16:creationId xmlns:a16="http://schemas.microsoft.com/office/drawing/2014/main" id="{B6D9363C-63C4-798F-163A-B9DB135205AD}"/>
               </a:ext>
             </a:extLst>
           </p:cNvPr>
@@ -2297,7 +2297,7 @@
           <p:cNvPr id="4" name="Text Placeholder 3">
             <a:extLst>
               <a:ext uri="{FF2B5EF4-FFF2-40B4-BE49-F238E27FC236}">
-                <a16:creationId xmlns:a16="http://schemas.microsoft.com/office/drawing/2014/main" id="{54A0A329-E1B8-92ED-4C60-FE605438453A}"/>
+                <a16:creationId xmlns:a16="http://schemas.microsoft.com/office/drawing/2014/main" id="{2FE54E12-D25A-C16D-CE00-4AECE589B8A8}"/>
               </a:ext>
             </a:extLst>
           </p:cNvPr>
@@ -2368,7 +2368,7 @@
           <p:cNvPr id="5" name="Date Placeholder 4">
             <a:extLst>
               <a:ext uri="{FF2B5EF4-FFF2-40B4-BE49-F238E27FC236}">
-                <a16:creationId xmlns:a16="http://schemas.microsoft.com/office/drawing/2014/main" id="{CCB85D3F-2573-22B3-1A67-E6648444BBC7}"/>
+                <a16:creationId xmlns:a16="http://schemas.microsoft.com/office/drawing/2014/main" id="{F629EA75-A07F-260C-F3F3-5DE141A970B4}"/>
               </a:ext>
             </a:extLst>
           </p:cNvPr>
@@ -2384,9 +2384,9 @@
           <a:bodyPr/>
           <a:lstStyle/>
           <a:p>
-            <a:fld id="{499CE911-6C8C-4E61-9158-5B0A8CB9CAA8}" type="datetimeFigureOut">
+            <a:fld id="{33959005-B26C-4F66-8525-6755711030AC}" type="datetimeFigureOut">
               <a:rPr lang="en-US" smtClean="0"/>
-              <a:t>8/11/2026</a:t>
+              <a:t>8/19/2026</a:t>
             </a:fld>
             <a:endParaRPr lang="en-US"/>
           </a:p>
@@ -2397,7 +2397,7 @@
           <p:cNvPr id="6" name="Footer Placeholder 5">
             <a:extLst>
               <a:ext uri="{FF2B5EF4-FFF2-40B4-BE49-F238E27FC236}">
-                <a16:creationId xmlns:a16="http://schemas.microsoft.com/office/drawing/2014/main" id="{F4780CB6-A071-C292-23FE-255F425E37C5}"/>
+                <a16:creationId xmlns:a16="http://schemas.microsoft.com/office/drawing/2014/main" id="{5DF50589-B611-EFDD-4758-F56263A39511}"/>
               </a:ext>
             </a:extLst>
           </p:cNvPr>
@@ -2422,7 +2422,7 @@
           <p:cNvPr id="7" name="Slide Number Placeholder 6">
             <a:extLst>
               <a:ext uri="{FF2B5EF4-FFF2-40B4-BE49-F238E27FC236}">
-                <a16:creationId xmlns:a16="http://schemas.microsoft.com/office/drawing/2014/main" id="{CF437AD2-83DF-C7D0-5766-6E37ABA52F32}"/>
+                <a16:creationId xmlns:a16="http://schemas.microsoft.com/office/drawing/2014/main" id="{C902412D-7F0B-329D-2CE6-DB261ED8CBEE}"/>
               </a:ext>
             </a:extLst>
           </p:cNvPr>
@@ -2438,7 +2438,7 @@
           <a:bodyPr/>
           <a:lstStyle/>
           <a:p>
-            <a:fld id="{A0C31EC1-F1FE-4E00-9CE8-AAD3DB7357C9}" type="slidenum">
+            <a:fld id="{877D9784-4EBE-4E69-A4A0-9CB0C6271F0B}" type="slidenum">
               <a:rPr lang="en-US" smtClean="0"/>
               <a:t>‹#›</a:t>
             </a:fld>
@@ -2449,7 +2449,7 @@
     </p:spTree>
     <p:extLst>
       <p:ext uri="{BB962C8B-B14F-4D97-AF65-F5344CB8AC3E}">
-        <p14:creationId xmlns:p14="http://schemas.microsoft.com/office/powerpoint/2010/main" val="2332124408"/>
+        <p14:creationId xmlns:p14="http://schemas.microsoft.com/office/powerpoint/2010/main" val="1218507352"/>
       </p:ext>
     </p:extLst>
   </p:cSld>
@@ -2481,7 +2481,7 @@
           <p:cNvPr id="2" name="Title 1">
             <a:extLst>
               <a:ext uri="{FF2B5EF4-FFF2-40B4-BE49-F238E27FC236}">
-                <a16:creationId xmlns:a16="http://schemas.microsoft.com/office/drawing/2014/main" id="{5C9B01F0-DAF8-3F51-31E4-81007905467F}"/>
+                <a16:creationId xmlns:a16="http://schemas.microsoft.com/office/drawing/2014/main" id="{58D641DF-C152-8C68-6E2F-FA4B67BFAA26}"/>
               </a:ext>
             </a:extLst>
           </p:cNvPr>
@@ -2518,7 +2518,7 @@
           <p:cNvPr id="3" name="Picture Placeholder 2">
             <a:extLst>
               <a:ext uri="{FF2B5EF4-FFF2-40B4-BE49-F238E27FC236}">
-                <a16:creationId xmlns:a16="http://schemas.microsoft.com/office/drawing/2014/main" id="{94277F16-7B0A-B369-23F8-ECB84517FF01}"/>
+                <a16:creationId xmlns:a16="http://schemas.microsoft.com/office/drawing/2014/main" id="{0A2AC9C6-D076-D535-66AE-1FDD64B1E058}"/>
               </a:ext>
             </a:extLst>
           </p:cNvPr>
@@ -2585,7 +2585,7 @@
           <p:cNvPr id="4" name="Text Placeholder 3">
             <a:extLst>
               <a:ext uri="{FF2B5EF4-FFF2-40B4-BE49-F238E27FC236}">
-                <a16:creationId xmlns:a16="http://schemas.microsoft.com/office/drawing/2014/main" id="{8D5E3DF4-71BD-E672-3A2F-1C53338C8221}"/>
+                <a16:creationId xmlns:a16="http://schemas.microsoft.com/office/drawing/2014/main" id="{EDEE2466-46A1-E322-6645-C56E08117565}"/>
               </a:ext>
             </a:extLst>
           </p:cNvPr>
@@ -2656,7 +2656,7 @@
           <p:cNvPr id="5" name="Date Placeholder 4">
             <a:extLst>
               <a:ext uri="{FF2B5EF4-FFF2-40B4-BE49-F238E27FC236}">
-                <a16:creationId xmlns:a16="http://schemas.microsoft.com/office/drawing/2014/main" id="{3C877447-009C-B75C-2D0A-6FEF3B1803DE}"/>
+                <a16:creationId xmlns:a16="http://schemas.microsoft.com/office/drawing/2014/main" id="{C4185AFB-6CFB-E466-E88E-9A4593BE6A47}"/>
               </a:ext>
             </a:extLst>
           </p:cNvPr>
@@ -2672,9 +2672,9 @@
           <a:bodyPr/>
           <a:lstStyle/>
           <a:p>
-            <a:fld id="{499CE911-6C8C-4E61-9158-5B0A8CB9CAA8}" type="datetimeFigureOut">
+            <a:fld id="{33959005-B26C-4F66-8525-6755711030AC}" type="datetimeFigureOut">
               <a:rPr lang="en-US" smtClean="0"/>
-              <a:t>8/11/2026</a:t>
+              <a:t>8/19/2026</a:t>
             </a:fld>
             <a:endParaRPr lang="en-US"/>
           </a:p>
@@ -2685,7 +2685,7 @@
           <p:cNvPr id="6" name="Footer Placeholder 5">
             <a:extLst>
               <a:ext uri="{FF2B5EF4-FFF2-40B4-BE49-F238E27FC236}">
-                <a16:creationId xmlns:a16="http://schemas.microsoft.com/office/drawing/2014/main" id="{C3A2384A-A467-1476-D85C-FABC6939D117}"/>
+                <a16:creationId xmlns:a16="http://schemas.microsoft.com/office/drawing/2014/main" id="{275A24A1-C7CB-0012-CF6C-75F14E9A6CCF}"/>
               </a:ext>
             </a:extLst>
           </p:cNvPr>
@@ -2710,7 +2710,7 @@
           <p:cNvPr id="7" name="Slide Number Placeholder 6">
             <a:extLst>
               <a:ext uri="{FF2B5EF4-FFF2-40B4-BE49-F238E27FC236}">
-                <a16:creationId xmlns:a16="http://schemas.microsoft.com/office/drawing/2014/main" id="{6C5CCEEC-9F8D-BF50-AE0F-3AA5368B613A}"/>
+                <a16:creationId xmlns:a16="http://schemas.microsoft.com/office/drawing/2014/main" id="{BDF62B7F-7E0A-3F1D-A3AC-DB16B41BBEB1}"/>
               </a:ext>
             </a:extLst>
           </p:cNvPr>
@@ -2726,7 +2726,7 @@
           <a:bodyPr/>
           <a:lstStyle/>
           <a:p>
-            <a:fld id="{A0C31EC1-F1FE-4E00-9CE8-AAD3DB7357C9}" type="slidenum">
+            <a:fld id="{877D9784-4EBE-4E69-A4A0-9CB0C6271F0B}" type="slidenum">
               <a:rPr lang="en-US" smtClean="0"/>
               <a:t>‹#›</a:t>
             </a:fld>
@@ -2737,7 +2737,7 @@
     </p:spTree>
     <p:extLst>
       <p:ext uri="{BB962C8B-B14F-4D97-AF65-F5344CB8AC3E}">
-        <p14:creationId xmlns:p14="http://schemas.microsoft.com/office/powerpoint/2010/main" val="3182171230"/>
+        <p14:creationId xmlns:p14="http://schemas.microsoft.com/office/powerpoint/2010/main" val="587403155"/>
       </p:ext>
     </p:extLst>
   </p:cSld>
@@ -2774,7 +2774,7 @@
           <p:cNvPr id="2" name="Title Placeholder 1">
             <a:extLst>
               <a:ext uri="{FF2B5EF4-FFF2-40B4-BE49-F238E27FC236}">
-                <a16:creationId xmlns:a16="http://schemas.microsoft.com/office/drawing/2014/main" id="{EBDBD8E3-19F7-AF96-221D-6BA35A18F3E8}"/>
+                <a16:creationId xmlns:a16="http://schemas.microsoft.com/office/drawing/2014/main" id="{3D54AC99-60FE-7AF2-35FD-60A48F26F17E}"/>
               </a:ext>
             </a:extLst>
           </p:cNvPr>
@@ -2812,7 +2812,7 @@
           <p:cNvPr id="3" name="Text Placeholder 2">
             <a:extLst>
               <a:ext uri="{FF2B5EF4-FFF2-40B4-BE49-F238E27FC236}">
-                <a16:creationId xmlns:a16="http://schemas.microsoft.com/office/drawing/2014/main" id="{4F065BF3-17D4-8625-27A5-3D9AE222CF6C}"/>
+                <a16:creationId xmlns:a16="http://schemas.microsoft.com/office/drawing/2014/main" id="{8CB17BF9-D898-CEBB-C21A-C8679A19D197}"/>
               </a:ext>
             </a:extLst>
           </p:cNvPr>
@@ -2879,7 +2879,7 @@
           <p:cNvPr id="4" name="Date Placeholder 3">
             <a:extLst>
               <a:ext uri="{FF2B5EF4-FFF2-40B4-BE49-F238E27FC236}">
-                <a16:creationId xmlns:a16="http://schemas.microsoft.com/office/drawing/2014/main" id="{E117557C-67B0-0172-EB96-2C2E06053770}"/>
+                <a16:creationId xmlns:a16="http://schemas.microsoft.com/office/drawing/2014/main" id="{00C23057-7E20-2E12-8A27-0B6CC325F7B4}"/>
               </a:ext>
             </a:extLst>
           </p:cNvPr>
@@ -2913,9 +2913,9 @@
             </a:lvl1pPr>
           </a:lstStyle>
           <a:p>
-            <a:fld id="{499CE911-6C8C-4E61-9158-5B0A8CB9CAA8}" type="datetimeFigureOut">
+            <a:fld id="{33959005-B26C-4F66-8525-6755711030AC}" type="datetimeFigureOut">
               <a:rPr lang="en-US" smtClean="0"/>
-              <a:t>8/11/2026</a:t>
+              <a:t>8/19/2026</a:t>
             </a:fld>
             <a:endParaRPr lang="en-US"/>
           </a:p>
@@ -2926,7 +2926,7 @@
           <p:cNvPr id="5" name="Footer Placeholder 4">
             <a:extLst>
               <a:ext uri="{FF2B5EF4-FFF2-40B4-BE49-F238E27FC236}">
-                <a16:creationId xmlns:a16="http://schemas.microsoft.com/office/drawing/2014/main" id="{DA05DF5A-989F-8C98-3F9B-1188C87F04B8}"/>
+                <a16:creationId xmlns:a16="http://schemas.microsoft.com/office/drawing/2014/main" id="{0C3705AB-F51E-0AFF-8597-7E999D943734}"/>
               </a:ext>
             </a:extLst>
           </p:cNvPr>
@@ -2969,7 +2969,7 @@
           <p:cNvPr id="6" name="Slide Number Placeholder 5">
             <a:extLst>
               <a:ext uri="{FF2B5EF4-FFF2-40B4-BE49-F238E27FC236}">
-                <a16:creationId xmlns:a16="http://schemas.microsoft.com/office/drawing/2014/main" id="{69A6BCB1-5F04-7E5D-2008-18CC41E7DABE}"/>
+                <a16:creationId xmlns:a16="http://schemas.microsoft.com/office/drawing/2014/main" id="{E635B3F8-02F2-1E26-D326-5CDC2E5C7521}"/>
               </a:ext>
             </a:extLst>
           </p:cNvPr>
@@ -3003,7 +3003,7 @@
             </a:lvl1pPr>
           </a:lstStyle>
           <a:p>
-            <a:fld id="{A0C31EC1-F1FE-4E00-9CE8-AAD3DB7357C9}" type="slidenum">
+            <a:fld id="{877D9784-4EBE-4E69-A4A0-9CB0C6271F0B}" type="slidenum">
               <a:rPr lang="en-US" smtClean="0"/>
               <a:t>‹#›</a:t>
             </a:fld>
@@ -3014,7 +3014,7 @@
     </p:spTree>
     <p:extLst>
       <p:ext uri="{BB962C8B-B14F-4D97-AF65-F5344CB8AC3E}">
-        <p14:creationId xmlns:p14="http://schemas.microsoft.com/office/powerpoint/2010/main" val="1228515488"/>
+        <p14:creationId xmlns:p14="http://schemas.microsoft.com/office/powerpoint/2010/main" val="3603390750"/>
       </p:ext>
     </p:extLst>
   </p:cSld>
@@ -3337,7 +3337,7 @@
           <p:cNvPr id="2" name="Rectangle 1">
             <a:extLst>
               <a:ext uri="{FF2B5EF4-FFF2-40B4-BE49-F238E27FC236}">
-                <a16:creationId xmlns:a16="http://schemas.microsoft.com/office/drawing/2014/main" id="{115AA17A-5ADB-6881-E938-4A7CFB18117D}"/>
+                <a16:creationId xmlns:a16="http://schemas.microsoft.com/office/drawing/2014/main" id="{E2E3C812-D6A6-3AA1-909A-B5A470909209}"/>
               </a:ext>
             </a:extLst>
           </p:cNvPr>
@@ -3397,7 +3397,7 @@
           <p:cNvPr id="3" name="Oval 2">
             <a:extLst>
               <a:ext uri="{FF2B5EF4-FFF2-40B4-BE49-F238E27FC236}">
-                <a16:creationId xmlns:a16="http://schemas.microsoft.com/office/drawing/2014/main" id="{46A6D9CC-3B50-1B7D-46C8-0CF58C64EB13}"/>
+                <a16:creationId xmlns:a16="http://schemas.microsoft.com/office/drawing/2014/main" id="{9029C471-5EEF-3182-F32E-78AD50910323}"/>
               </a:ext>
             </a:extLst>
           </p:cNvPr>
@@ -3458,7 +3458,7 @@
           <p:cNvPr id="4" name="Oval 3">
             <a:extLst>
               <a:ext uri="{FF2B5EF4-FFF2-40B4-BE49-F238E27FC236}">
-                <a16:creationId xmlns:a16="http://schemas.microsoft.com/office/drawing/2014/main" id="{2E8FB1D5-8E1B-8C41-6C2D-3AE5586E6925}"/>
+                <a16:creationId xmlns:a16="http://schemas.microsoft.com/office/drawing/2014/main" id="{45AE7200-7385-1B3D-1E76-E235A2F58726}"/>
               </a:ext>
             </a:extLst>
           </p:cNvPr>
@@ -3519,7 +3519,7 @@
           <p:cNvPr id="5" name="Oval 4">
             <a:extLst>
               <a:ext uri="{FF2B5EF4-FFF2-40B4-BE49-F238E27FC236}">
-                <a16:creationId xmlns:a16="http://schemas.microsoft.com/office/drawing/2014/main" id="{ACDFD89B-60BC-D229-57F5-BAABD278F6DA}"/>
+                <a16:creationId xmlns:a16="http://schemas.microsoft.com/office/drawing/2014/main" id="{A71802D7-17D6-476C-416E-136E1007A378}"/>
               </a:ext>
             </a:extLst>
           </p:cNvPr>
@@ -3580,7 +3580,7 @@
           <p:cNvPr id="6" name="TextBox 5">
             <a:extLst>
               <a:ext uri="{FF2B5EF4-FFF2-40B4-BE49-F238E27FC236}">
-                <a16:creationId xmlns:a16="http://schemas.microsoft.com/office/drawing/2014/main" id="{69DF89C2-5ECB-7758-8B16-EE966D9FC126}"/>
+                <a16:creationId xmlns:a16="http://schemas.microsoft.com/office/drawing/2014/main" id="{E937B9A5-8339-0E75-22ED-11613E30E3F0}"/>
               </a:ext>
             </a:extLst>
           </p:cNvPr>
@@ -3620,7 +3620,7 @@
           <p:cNvPr id="7" name="TextBox 6">
             <a:extLst>
               <a:ext uri="{FF2B5EF4-FFF2-40B4-BE49-F238E27FC236}">
-                <a16:creationId xmlns:a16="http://schemas.microsoft.com/office/drawing/2014/main" id="{2753B828-B8E5-9D4D-E6F3-F551365F54CE}"/>
+                <a16:creationId xmlns:a16="http://schemas.microsoft.com/office/drawing/2014/main" id="{D411D57D-8F42-CC06-5D5E-E9B064DD0EDE}"/>
               </a:ext>
             </a:extLst>
           </p:cNvPr>
@@ -3660,7 +3660,7 @@
           <p:cNvPr id="8" name="TextBox 7">
             <a:extLst>
               <a:ext uri="{FF2B5EF4-FFF2-40B4-BE49-F238E27FC236}">
-                <a16:creationId xmlns:a16="http://schemas.microsoft.com/office/drawing/2014/main" id="{018DD0A0-1DAD-8FDC-AC35-63A993C9CCBB}"/>
+                <a16:creationId xmlns:a16="http://schemas.microsoft.com/office/drawing/2014/main" id="{58742AB4-6D60-67B8-2245-8B6EDC38B843}"/>
               </a:ext>
             </a:extLst>
           </p:cNvPr>
@@ -3700,7 +3700,7 @@
           <p:cNvPr id="9" name="Rectangle: Rounded Corners 8">
             <a:extLst>
               <a:ext uri="{FF2B5EF4-FFF2-40B4-BE49-F238E27FC236}">
-                <a16:creationId xmlns:a16="http://schemas.microsoft.com/office/drawing/2014/main" id="{85DD2D7A-083E-8458-910A-494755832AA7}"/>
+                <a16:creationId xmlns:a16="http://schemas.microsoft.com/office/drawing/2014/main" id="{D98FBA8C-DC5C-02B1-2835-3B410514745C}"/>
               </a:ext>
             </a:extLst>
           </p:cNvPr>
@@ -3760,7 +3760,7 @@
           <p:cNvPr id="10" name="TextBox 9">
             <a:extLst>
               <a:ext uri="{FF2B5EF4-FFF2-40B4-BE49-F238E27FC236}">
-                <a16:creationId xmlns:a16="http://schemas.microsoft.com/office/drawing/2014/main" id="{61051DD2-9FE2-B5C1-E19C-C218DB343A07}"/>
+                <a16:creationId xmlns:a16="http://schemas.microsoft.com/office/drawing/2014/main" id="{7D4C61AD-441B-9CA1-47B4-CDD50F7281EC}"/>
               </a:ext>
             </a:extLst>
           </p:cNvPr>
@@ -3790,7 +3790,7 @@
                 </a:solidFill>
                 <a:latin typeface="Aptos" panose="020B0004020202020204" pitchFamily="34" charset="0"/>
               </a:rPr>
-              <a:t>Leadership discussion draft | 11 Aug 2026</a:t>
+              <a:t>Leadership discussion draft | 19 Aug 2026</a:t>
             </a:r>
           </a:p>
         </p:txBody>
@@ -3800,7 +3800,7 @@
           <p:cNvPr id="11" name="TextBox 10">
             <a:extLst>
               <a:ext uri="{FF2B5EF4-FFF2-40B4-BE49-F238E27FC236}">
-                <a16:creationId xmlns:a16="http://schemas.microsoft.com/office/drawing/2014/main" id="{86158BB1-00FC-57E1-DFC4-D5631784000F}"/>
+                <a16:creationId xmlns:a16="http://schemas.microsoft.com/office/drawing/2014/main" id="{83C6AFB2-B764-AB8C-9FB1-115144A47DD1}"/>
               </a:ext>
             </a:extLst>
           </p:cNvPr>
@@ -3838,7 +3838,7 @@
     </p:spTree>
     <p:extLst>
       <p:ext uri="{BB962C8B-B14F-4D97-AF65-F5344CB8AC3E}">
-        <p14:creationId xmlns:p14="http://schemas.microsoft.com/office/powerpoint/2010/main" val="4226399456"/>
+        <p14:creationId xmlns:p14="http://schemas.microsoft.com/office/powerpoint/2010/main" val="3587928578"/>
       </p:ext>
     </p:extLst>
   </p:cSld>
@@ -3870,7 +3870,7 @@
           <p:cNvPr id="2" name="TextBox 1">
             <a:extLst>
               <a:ext uri="{FF2B5EF4-FFF2-40B4-BE49-F238E27FC236}">
-                <a16:creationId xmlns:a16="http://schemas.microsoft.com/office/drawing/2014/main" id="{E2462840-FA94-5CAC-3552-99BEE0551567}"/>
+                <a16:creationId xmlns:a16="http://schemas.microsoft.com/office/drawing/2014/main" id="{87D81B0D-41F8-59CF-A243-E3BCC0953B94}"/>
               </a:ext>
             </a:extLst>
           </p:cNvPr>
@@ -3900,7 +3900,7 @@
                 </a:solidFill>
                 <a:latin typeface="Aptos" panose="020B0004020202020204" pitchFamily="34" charset="0"/>
               </a:rPr>
-              <a:t>FERRIS PILOT</a:t>
+              <a:t>PROOF TO PILOT</a:t>
             </a:r>
           </a:p>
         </p:txBody>
@@ -3910,7 +3910,7 @@
           <p:cNvPr id="3" name="TextBox 2">
             <a:extLst>
               <a:ext uri="{FF2B5EF4-FFF2-40B4-BE49-F238E27FC236}">
-                <a16:creationId xmlns:a16="http://schemas.microsoft.com/office/drawing/2014/main" id="{88B7BA57-B207-36C6-2E8E-35DC42AB897E}"/>
+                <a16:creationId xmlns:a16="http://schemas.microsoft.com/office/drawing/2014/main" id="{101901F8-4054-748A-CF85-412C09111514}"/>
               </a:ext>
             </a:extLst>
           </p:cNvPr>
@@ -3940,7 +3940,7 @@
                 </a:solidFill>
                 <a:latin typeface="Aptos Display" panose="020B0004020202020204" pitchFamily="34" charset="0"/>
               </a:rPr>
-              <a:t>Prove the strategy on one real, removable application slice</a:t>
+              <a:t>The foundation is real; the application proof is next</a:t>
             </a:r>
           </a:p>
         </p:txBody>
@@ -3950,7 +3950,7 @@
           <p:cNvPr id="4" name="Rectangle: Rounded Corners 3">
             <a:extLst>
               <a:ext uri="{FF2B5EF4-FFF2-40B4-BE49-F238E27FC236}">
-                <a16:creationId xmlns:a16="http://schemas.microsoft.com/office/drawing/2014/main" id="{3E18BD8C-629A-FC62-C4A5-9C349EAA5BCC}"/>
+                <a16:creationId xmlns:a16="http://schemas.microsoft.com/office/drawing/2014/main" id="{BAE77EE4-EC39-2974-5A32-C2E6CFACCC81}"/>
               </a:ext>
             </a:extLst>
           </p:cNvPr>
@@ -4008,7 +4008,7 @@
           <p:cNvPr id="5" name="Oval 4">
             <a:extLst>
               <a:ext uri="{FF2B5EF4-FFF2-40B4-BE49-F238E27FC236}">
-                <a16:creationId xmlns:a16="http://schemas.microsoft.com/office/drawing/2014/main" id="{AF19460A-3B6B-5DF5-228F-36088F0C2586}"/>
+                <a16:creationId xmlns:a16="http://schemas.microsoft.com/office/drawing/2014/main" id="{BE3CE910-B5C3-6F88-F836-38BACB262FA6}"/>
               </a:ext>
             </a:extLst>
           </p:cNvPr>
@@ -4069,17 +4069,17 @@
           <p:cNvPr id="6" name="TextBox 5">
             <a:extLst>
               <a:ext uri="{FF2B5EF4-FFF2-40B4-BE49-F238E27FC236}">
-                <a16:creationId xmlns:a16="http://schemas.microsoft.com/office/drawing/2014/main" id="{E2ED4AA8-EF30-285D-0EB1-4E12762C8845}"/>
-              </a:ext>
-            </a:extLst>
-          </p:cNvPr>
-          <p:cNvSpPr txBox="1"/>
-          <p:nvPr/>
-        </p:nvSpPr>
-        <p:spPr>
-          <a:xfrm>
-            <a:off x="939800" y="1930400"/>
-            <a:ext cx="279400" cy="276999"/>
+                <a16:creationId xmlns:a16="http://schemas.microsoft.com/office/drawing/2014/main" id="{A9E90675-9AF3-DE7E-DC3C-F2AF8D9208BF}"/>
+              </a:ext>
+            </a:extLst>
+          </p:cNvPr>
+          <p:cNvSpPr txBox="1"/>
+          <p:nvPr/>
+        </p:nvSpPr>
+        <p:spPr>
+          <a:xfrm>
+            <a:off x="914400" y="1930400"/>
+            <a:ext cx="330200" cy="276999"/>
           </a:xfrm>
           <a:prstGeom prst="rect">
             <a:avLst/>
@@ -4094,32 +4094,72 @@
           <a:p>
             <a:pPr algn="ctr"/>
             <a:r>
+              <a:rPr lang="en-US" sz="800" b="1">
+                <a:solidFill>
+                  <a:srgbClr val="10212D"/>
+                </a:solidFill>
+                <a:latin typeface="Aptos Display" panose="020B0004020202020204" pitchFamily="34" charset="0"/>
+              </a:rPr>
+              <a:t>OK</a:t>
+            </a:r>
+          </a:p>
+        </p:txBody>
+      </p:sp>
+      <p:sp>
+        <p:nvSpPr>
+          <p:cNvPr id="7" name="TextBox 6">
+            <a:extLst>
+              <a:ext uri="{FF2B5EF4-FFF2-40B4-BE49-F238E27FC236}">
+                <a16:creationId xmlns:a16="http://schemas.microsoft.com/office/drawing/2014/main" id="{CAA9FDC5-A468-6303-84F9-5DCFF78038C1}"/>
+              </a:ext>
+            </a:extLst>
+          </p:cNvPr>
+          <p:cNvSpPr txBox="1"/>
+          <p:nvPr/>
+        </p:nvSpPr>
+        <p:spPr>
+          <a:xfrm>
+            <a:off x="1447800" y="1778000"/>
+            <a:ext cx="2413000" cy="276999"/>
+          </a:xfrm>
+          <a:prstGeom prst="rect">
+            <a:avLst/>
+          </a:prstGeom>
+          <a:noFill/>
+        </p:spPr>
+        <p:txBody>
+          <a:bodyPr vert="horz" wrap="square" lIns="0" tIns="0" rIns="0" bIns="0" rtlCol="0">
+            <a:noAutofit/>
+          </a:bodyPr>
+          <a:lstStyle/>
+          <a:p>
+            <a:r>
               <a:rPr lang="en-US" sz="900" b="1">
                 <a:solidFill>
-                  <a:srgbClr val="10212D"/>
-                </a:solidFill>
-                <a:latin typeface="Aptos Display" panose="020B0004020202020204" pitchFamily="34" charset="0"/>
-              </a:rPr>
-              <a:t>OK</a:t>
-            </a:r>
-          </a:p>
-        </p:txBody>
-      </p:sp>
-      <p:sp>
-        <p:nvSpPr>
-          <p:cNvPr id="7" name="TextBox 6">
-            <a:extLst>
-              <a:ext uri="{FF2B5EF4-FFF2-40B4-BE49-F238E27FC236}">
-                <a16:creationId xmlns:a16="http://schemas.microsoft.com/office/drawing/2014/main" id="{13FA4467-CFD1-68E9-21D4-53E8DC7C2159}"/>
-              </a:ext>
-            </a:extLst>
-          </p:cNvPr>
-          <p:cNvSpPr txBox="1"/>
-          <p:nvPr/>
-        </p:nvSpPr>
-        <p:spPr>
-          <a:xfrm>
-            <a:off x="1447800" y="1905000"/>
+                  <a:srgbClr val="CE4A2B"/>
+                </a:solidFill>
+                <a:latin typeface="Aptos" panose="020B0004020202020204" pitchFamily="34" charset="0"/>
+              </a:rPr>
+              <a:t>PROVEN</a:t>
+            </a:r>
+          </a:p>
+        </p:txBody>
+      </p:sp>
+      <p:sp>
+        <p:nvSpPr>
+          <p:cNvPr id="8" name="TextBox 7">
+            <a:extLst>
+              <a:ext uri="{FF2B5EF4-FFF2-40B4-BE49-F238E27FC236}">
+                <a16:creationId xmlns:a16="http://schemas.microsoft.com/office/drawing/2014/main" id="{2A63BE8F-AA97-6BE5-2B92-85675EB29CB8}"/>
+              </a:ext>
+            </a:extLst>
+          </p:cNvPr>
+          <p:cNvSpPr txBox="1"/>
+          <p:nvPr/>
+        </p:nvSpPr>
+        <p:spPr>
+          <a:xfrm>
+            <a:off x="1447800" y="2019300"/>
             <a:ext cx="2413000" cy="276999"/>
           </a:xfrm>
           <a:prstGeom prst="rect">
@@ -4134,23 +4174,23 @@
           <a:lstStyle/>
           <a:p>
             <a:r>
-              <a:rPr lang="en-US" sz="1300" b="1">
+              <a:rPr lang="en-US" sz="1250" b="1">
                 <a:solidFill>
                   <a:srgbClr val="1F2329"/>
                 </a:solidFill>
                 <a:latin typeface="Aptos" panose="020B0004020202020204" pitchFamily="34" charset="0"/>
               </a:rPr>
-              <a:t>2+ Cargo workspaces</a:t>
-            </a:r>
-          </a:p>
-        </p:txBody>
-      </p:sp>
-      <p:sp>
-        <p:nvSpPr>
-          <p:cNvPr id="8" name="Rectangle: Rounded Corners 7">
-            <a:extLst>
-              <a:ext uri="{FF2B5EF4-FFF2-40B4-BE49-F238E27FC236}">
-                <a16:creationId xmlns:a16="http://schemas.microsoft.com/office/drawing/2014/main" id="{AE420848-1EE8-BBA9-39E4-B1D305295C07}"/>
+              <a:t>Cargo-native discovery</a:t>
+            </a:r>
+          </a:p>
+        </p:txBody>
+      </p:sp>
+      <p:sp>
+        <p:nvSpPr>
+          <p:cNvPr id="9" name="Rectangle: Rounded Corners 8">
+            <a:extLst>
+              <a:ext uri="{FF2B5EF4-FFF2-40B4-BE49-F238E27FC236}">
+                <a16:creationId xmlns:a16="http://schemas.microsoft.com/office/drawing/2014/main" id="{DBEA666A-3A78-7025-0BA6-741EF99E9652}"/>
               </a:ext>
             </a:extLst>
           </p:cNvPr>
@@ -4205,10 +4245,10 @@
       </p:sp>
       <p:sp>
         <p:nvSpPr>
-          <p:cNvPr id="9" name="Oval 8">
-            <a:extLst>
-              <a:ext uri="{FF2B5EF4-FFF2-40B4-BE49-F238E27FC236}">
-                <a16:creationId xmlns:a16="http://schemas.microsoft.com/office/drawing/2014/main" id="{12C20323-28B8-7133-8817-E41775654BDA}"/>
+          <p:cNvPr id="10" name="Oval 9">
+            <a:extLst>
+              <a:ext uri="{FF2B5EF4-FFF2-40B4-BE49-F238E27FC236}">
+                <a16:creationId xmlns:a16="http://schemas.microsoft.com/office/drawing/2014/main" id="{62E140C1-E629-4DD9-31B8-839AB249C7E6}"/>
               </a:ext>
             </a:extLst>
           </p:cNvPr>
@@ -4266,20 +4306,20 @@
       </p:sp>
       <p:sp>
         <p:nvSpPr>
-          <p:cNvPr id="10" name="TextBox 9">
-            <a:extLst>
-              <a:ext uri="{FF2B5EF4-FFF2-40B4-BE49-F238E27FC236}">
-                <a16:creationId xmlns:a16="http://schemas.microsoft.com/office/drawing/2014/main" id="{B5C5BA7A-CFE4-1CDC-74BE-A35B9F958D17}"/>
-              </a:ext>
-            </a:extLst>
-          </p:cNvPr>
-          <p:cNvSpPr txBox="1"/>
-          <p:nvPr/>
-        </p:nvSpPr>
-        <p:spPr>
-          <a:xfrm>
-            <a:off x="4699000" y="1930400"/>
-            <a:ext cx="279400" cy="276999"/>
+          <p:cNvPr id="11" name="TextBox 10">
+            <a:extLst>
+              <a:ext uri="{FF2B5EF4-FFF2-40B4-BE49-F238E27FC236}">
+                <a16:creationId xmlns:a16="http://schemas.microsoft.com/office/drawing/2014/main" id="{984BA787-FA93-7075-68F9-D2F28A74C814}"/>
+              </a:ext>
+            </a:extLst>
+          </p:cNvPr>
+          <p:cNvSpPr txBox="1"/>
+          <p:nvPr/>
+        </p:nvSpPr>
+        <p:spPr>
+          <a:xfrm>
+            <a:off x="4673600" y="1930400"/>
+            <a:ext cx="330200" cy="276999"/>
           </a:xfrm>
           <a:prstGeom prst="rect">
             <a:avLst/>
@@ -4294,32 +4334,72 @@
           <a:p>
             <a:pPr algn="ctr"/>
             <a:r>
+              <a:rPr lang="en-US" sz="800" b="1">
+                <a:solidFill>
+                  <a:srgbClr val="10212D"/>
+                </a:solidFill>
+                <a:latin typeface="Aptos Display" panose="020B0004020202020204" pitchFamily="34" charset="0"/>
+              </a:rPr>
+              <a:t>OK</a:t>
+            </a:r>
+          </a:p>
+        </p:txBody>
+      </p:sp>
+      <p:sp>
+        <p:nvSpPr>
+          <p:cNvPr id="12" name="TextBox 11">
+            <a:extLst>
+              <a:ext uri="{FF2B5EF4-FFF2-40B4-BE49-F238E27FC236}">
+                <a16:creationId xmlns:a16="http://schemas.microsoft.com/office/drawing/2014/main" id="{D6594ED0-3A63-BC11-FA0D-A931E382832E}"/>
+              </a:ext>
+            </a:extLst>
+          </p:cNvPr>
+          <p:cNvSpPr txBox="1"/>
+          <p:nvPr/>
+        </p:nvSpPr>
+        <p:spPr>
+          <a:xfrm>
+            <a:off x="5207000" y="1778000"/>
+            <a:ext cx="2413000" cy="276999"/>
+          </a:xfrm>
+          <a:prstGeom prst="rect">
+            <a:avLst/>
+          </a:prstGeom>
+          <a:noFill/>
+        </p:spPr>
+        <p:txBody>
+          <a:bodyPr vert="horz" wrap="square" lIns="0" tIns="0" rIns="0" bIns="0" rtlCol="0">
+            <a:noAutofit/>
+          </a:bodyPr>
+          <a:lstStyle/>
+          <a:p>
+            <a:r>
               <a:rPr lang="en-US" sz="900" b="1">
                 <a:solidFill>
-                  <a:srgbClr val="10212D"/>
-                </a:solidFill>
-                <a:latin typeface="Aptos Display" panose="020B0004020202020204" pitchFamily="34" charset="0"/>
-              </a:rPr>
-              <a:t>OK</a:t>
-            </a:r>
-          </a:p>
-        </p:txBody>
-      </p:sp>
-      <p:sp>
-        <p:nvSpPr>
-          <p:cNvPr id="11" name="TextBox 10">
-            <a:extLst>
-              <a:ext uri="{FF2B5EF4-FFF2-40B4-BE49-F238E27FC236}">
-                <a16:creationId xmlns:a16="http://schemas.microsoft.com/office/drawing/2014/main" id="{C4940BED-7B1F-4FE8-55E2-99E5906CDB6E}"/>
-              </a:ext>
-            </a:extLst>
-          </p:cNvPr>
-          <p:cNvSpPr txBox="1"/>
-          <p:nvPr/>
-        </p:nvSpPr>
-        <p:spPr>
-          <a:xfrm>
-            <a:off x="5207000" y="1905000"/>
+                  <a:srgbClr val="CE4A2B"/>
+                </a:solidFill>
+                <a:latin typeface="Aptos" panose="020B0004020202020204" pitchFamily="34" charset="0"/>
+              </a:rPr>
+              <a:t>PROVEN</a:t>
+            </a:r>
+          </a:p>
+        </p:txBody>
+      </p:sp>
+      <p:sp>
+        <p:nvSpPr>
+          <p:cNvPr id="13" name="TextBox 12">
+            <a:extLst>
+              <a:ext uri="{FF2B5EF4-FFF2-40B4-BE49-F238E27FC236}">
+                <a16:creationId xmlns:a16="http://schemas.microsoft.com/office/drawing/2014/main" id="{00D03F02-1263-E69A-894C-CC144B225AB6}"/>
+              </a:ext>
+            </a:extLst>
+          </p:cNvPr>
+          <p:cNvSpPr txBox="1"/>
+          <p:nvPr/>
+        </p:nvSpPr>
+        <p:spPr>
+          <a:xfrm>
+            <a:off x="5207000" y="2019300"/>
             <a:ext cx="2413000" cy="276999"/>
           </a:xfrm>
           <a:prstGeom prst="rect">
@@ -4334,23 +4414,23 @@
           <a:lstStyle/>
           <a:p>
             <a:r>
-              <a:rPr lang="en-US" sz="1300" b="1">
+              <a:rPr lang="en-US" sz="1250" b="1">
                 <a:solidFill>
                   <a:srgbClr val="1F2329"/>
                 </a:solidFill>
                 <a:latin typeface="Aptos" panose="020B0004020202020204" pitchFamily="34" charset="0"/>
               </a:rPr>
-              <a:t>C/C++ or native boundary</a:t>
-            </a:r>
-          </a:p>
-        </p:txBody>
-      </p:sp>
-      <p:sp>
-        <p:nvSpPr>
-          <p:cNvPr id="12" name="Rectangle: Rounded Corners 11">
-            <a:extLst>
-              <a:ext uri="{FF2B5EF4-FFF2-40B4-BE49-F238E27FC236}">
-                <a16:creationId xmlns:a16="http://schemas.microsoft.com/office/drawing/2014/main" id="{2521722E-B6CA-65B4-52D4-D411F79C37B9}"/>
+              <a:t>Conservative validation scope</a:t>
+            </a:r>
+          </a:p>
+        </p:txBody>
+      </p:sp>
+      <p:sp>
+        <p:nvSpPr>
+          <p:cNvPr id="14" name="Rectangle: Rounded Corners 13">
+            <a:extLst>
+              <a:ext uri="{FF2B5EF4-FFF2-40B4-BE49-F238E27FC236}">
+                <a16:creationId xmlns:a16="http://schemas.microsoft.com/office/drawing/2014/main" id="{8C1FAC30-C0A3-507F-4F3E-19D3A6961CDF}"/>
               </a:ext>
             </a:extLst>
           </p:cNvPr>
@@ -4405,10 +4485,10 @@
       </p:sp>
       <p:sp>
         <p:nvSpPr>
-          <p:cNvPr id="13" name="Oval 12">
-            <a:extLst>
-              <a:ext uri="{FF2B5EF4-FFF2-40B4-BE49-F238E27FC236}">
-                <a16:creationId xmlns:a16="http://schemas.microsoft.com/office/drawing/2014/main" id="{F7563B22-E746-A69E-1776-575A2A599E37}"/>
+          <p:cNvPr id="15" name="Oval 14">
+            <a:extLst>
+              <a:ext uri="{FF2B5EF4-FFF2-40B4-BE49-F238E27FC236}">
+                <a16:creationId xmlns:a16="http://schemas.microsoft.com/office/drawing/2014/main" id="{412A569A-3001-21A6-0F1D-86104C65D3F2}"/>
               </a:ext>
             </a:extLst>
           </p:cNvPr>
@@ -4466,20 +4546,20 @@
       </p:sp>
       <p:sp>
         <p:nvSpPr>
-          <p:cNvPr id="14" name="TextBox 13">
-            <a:extLst>
-              <a:ext uri="{FF2B5EF4-FFF2-40B4-BE49-F238E27FC236}">
-                <a16:creationId xmlns:a16="http://schemas.microsoft.com/office/drawing/2014/main" id="{0F77028B-2411-9595-19E7-0F7D8C53AB31}"/>
-              </a:ext>
-            </a:extLst>
-          </p:cNvPr>
-          <p:cNvSpPr txBox="1"/>
-          <p:nvPr/>
-        </p:nvSpPr>
-        <p:spPr>
-          <a:xfrm>
-            <a:off x="8458200" y="1930400"/>
-            <a:ext cx="279400" cy="276999"/>
+          <p:cNvPr id="16" name="TextBox 15">
+            <a:extLst>
+              <a:ext uri="{FF2B5EF4-FFF2-40B4-BE49-F238E27FC236}">
+                <a16:creationId xmlns:a16="http://schemas.microsoft.com/office/drawing/2014/main" id="{D602774E-F0F7-0C3F-DB2C-79070E6E7046}"/>
+              </a:ext>
+            </a:extLst>
+          </p:cNvPr>
+          <p:cNvSpPr txBox="1"/>
+          <p:nvPr/>
+        </p:nvSpPr>
+        <p:spPr>
+          <a:xfrm>
+            <a:off x="8432800" y="1930400"/>
+            <a:ext cx="330200" cy="276999"/>
           </a:xfrm>
           <a:prstGeom prst="rect">
             <a:avLst/>
@@ -4494,32 +4574,72 @@
           <a:p>
             <a:pPr algn="ctr"/>
             <a:r>
+              <a:rPr lang="en-US" sz="800" b="1">
+                <a:solidFill>
+                  <a:srgbClr val="10212D"/>
+                </a:solidFill>
+                <a:latin typeface="Aptos Display" panose="020B0004020202020204" pitchFamily="34" charset="0"/>
+              </a:rPr>
+              <a:t>OK</a:t>
+            </a:r>
+          </a:p>
+        </p:txBody>
+      </p:sp>
+      <p:sp>
+        <p:nvSpPr>
+          <p:cNvPr id="17" name="TextBox 16">
+            <a:extLst>
+              <a:ext uri="{FF2B5EF4-FFF2-40B4-BE49-F238E27FC236}">
+                <a16:creationId xmlns:a16="http://schemas.microsoft.com/office/drawing/2014/main" id="{88FA58F1-B300-E03D-BA43-6A3B5FAE8924}"/>
+              </a:ext>
+            </a:extLst>
+          </p:cNvPr>
+          <p:cNvSpPr txBox="1"/>
+          <p:nvPr/>
+        </p:nvSpPr>
+        <p:spPr>
+          <a:xfrm>
+            <a:off x="8966200" y="1778000"/>
+            <a:ext cx="2413000" cy="276999"/>
+          </a:xfrm>
+          <a:prstGeom prst="rect">
+            <a:avLst/>
+          </a:prstGeom>
+          <a:noFill/>
+        </p:spPr>
+        <p:txBody>
+          <a:bodyPr vert="horz" wrap="square" lIns="0" tIns="0" rIns="0" bIns="0" rtlCol="0">
+            <a:noAutofit/>
+          </a:bodyPr>
+          <a:lstStyle/>
+          <a:p>
+            <a:r>
               <a:rPr lang="en-US" sz="900" b="1">
                 <a:solidFill>
-                  <a:srgbClr val="10212D"/>
-                </a:solidFill>
-                <a:latin typeface="Aptos Display" panose="020B0004020202020204" pitchFamily="34" charset="0"/>
-              </a:rPr>
-              <a:t>OK</a:t>
-            </a:r>
-          </a:p>
-        </p:txBody>
-      </p:sp>
-      <p:sp>
-        <p:nvSpPr>
-          <p:cNvPr id="15" name="TextBox 14">
-            <a:extLst>
-              <a:ext uri="{FF2B5EF4-FFF2-40B4-BE49-F238E27FC236}">
-                <a16:creationId xmlns:a16="http://schemas.microsoft.com/office/drawing/2014/main" id="{529B18DA-F2EB-4AFB-6F8D-363EC6843747}"/>
-              </a:ext>
-            </a:extLst>
-          </p:cNvPr>
-          <p:cNvSpPr txBox="1"/>
-          <p:nvPr/>
-        </p:nvSpPr>
-        <p:spPr>
-          <a:xfrm>
-            <a:off x="8966200" y="1905000"/>
+                  <a:srgbClr val="CE4A2B"/>
+                </a:solidFill>
+                <a:latin typeface="Aptos" panose="020B0004020202020204" pitchFamily="34" charset="0"/>
+              </a:rPr>
+              <a:t>PROVEN</a:t>
+            </a:r>
+          </a:p>
+        </p:txBody>
+      </p:sp>
+      <p:sp>
+        <p:nvSpPr>
+          <p:cNvPr id="18" name="TextBox 17">
+            <a:extLst>
+              <a:ext uri="{FF2B5EF4-FFF2-40B4-BE49-F238E27FC236}">
+                <a16:creationId xmlns:a16="http://schemas.microsoft.com/office/drawing/2014/main" id="{3A4B6A4F-6F20-515D-0D57-11C4439B21BF}"/>
+              </a:ext>
+            </a:extLst>
+          </p:cNvPr>
+          <p:cNvSpPr txBox="1"/>
+          <p:nvPr/>
+        </p:nvSpPr>
+        <p:spPr>
+          <a:xfrm>
+            <a:off x="8966200" y="2019300"/>
             <a:ext cx="2413000" cy="276999"/>
           </a:xfrm>
           <a:prstGeom prst="rect">
@@ -4534,23 +4654,23 @@
           <a:lstStyle/>
           <a:p>
             <a:r>
-              <a:rPr lang="en-US" sz="1300" b="1">
+              <a:rPr lang="en-US" sz="1250" b="1">
                 <a:solidFill>
                   <a:srgbClr val="1F2329"/>
                 </a:solidFill>
                 <a:latin typeface="Aptos" panose="020B0004020202020204" pitchFamily="34" charset="0"/>
               </a:rPr>
-              <a:t>Service or WIT contract</a:t>
-            </a:r>
-          </a:p>
-        </p:txBody>
-      </p:sp>
-      <p:sp>
-        <p:nvSpPr>
-          <p:cNvPr id="16" name="Rectangle: Rounded Corners 15">
-            <a:extLst>
-              <a:ext uri="{FF2B5EF4-FFF2-40B4-BE49-F238E27FC236}">
-                <a16:creationId xmlns:a16="http://schemas.microsoft.com/office/drawing/2014/main" id="{70ABB734-569F-AABE-7E3E-E6A2F704D56E}"/>
+              <a:t>2-16 workspace federation</a:t>
+            </a:r>
+          </a:p>
+        </p:txBody>
+      </p:sp>
+      <p:sp>
+        <p:nvSpPr>
+          <p:cNvPr id="19" name="Rectangle: Rounded Corners 18">
+            <a:extLst>
+              <a:ext uri="{FF2B5EF4-FFF2-40B4-BE49-F238E27FC236}">
+                <a16:creationId xmlns:a16="http://schemas.microsoft.com/office/drawing/2014/main" id="{E18A7B4C-0C79-DC77-6FD2-A3FBFE3B038A}"/>
               </a:ext>
             </a:extLst>
           </p:cNvPr>
@@ -4605,10 +4725,10 @@
       </p:sp>
       <p:sp>
         <p:nvSpPr>
-          <p:cNvPr id="17" name="Oval 16">
-            <a:extLst>
-              <a:ext uri="{FF2B5EF4-FFF2-40B4-BE49-F238E27FC236}">
-                <a16:creationId xmlns:a16="http://schemas.microsoft.com/office/drawing/2014/main" id="{B798A656-48BA-1465-F714-31D7D4A52A61}"/>
+          <p:cNvPr id="20" name="Oval 19">
+            <a:extLst>
+              <a:ext uri="{FF2B5EF4-FFF2-40B4-BE49-F238E27FC236}">
+                <a16:creationId xmlns:a16="http://schemas.microsoft.com/office/drawing/2014/main" id="{0405EF9B-A749-243C-FFB7-122B30726914}"/>
               </a:ext>
             </a:extLst>
           </p:cNvPr>
@@ -4666,20 +4786,20 @@
       </p:sp>
       <p:sp>
         <p:nvSpPr>
-          <p:cNvPr id="18" name="TextBox 17">
-            <a:extLst>
-              <a:ext uri="{FF2B5EF4-FFF2-40B4-BE49-F238E27FC236}">
-                <a16:creationId xmlns:a16="http://schemas.microsoft.com/office/drawing/2014/main" id="{2EA32144-E879-0997-8FEB-68F9D7558F63}"/>
-              </a:ext>
-            </a:extLst>
-          </p:cNvPr>
-          <p:cNvSpPr txBox="1"/>
-          <p:nvPr/>
-        </p:nvSpPr>
-        <p:spPr>
-          <a:xfrm>
-            <a:off x="939800" y="3048000"/>
-            <a:ext cx="279400" cy="276999"/>
+          <p:cNvPr id="21" name="TextBox 20">
+            <a:extLst>
+              <a:ext uri="{FF2B5EF4-FFF2-40B4-BE49-F238E27FC236}">
+                <a16:creationId xmlns:a16="http://schemas.microsoft.com/office/drawing/2014/main" id="{3B50F7E5-18B9-0CF9-4EF4-E3E6321B96D2}"/>
+              </a:ext>
+            </a:extLst>
+          </p:cNvPr>
+          <p:cNvSpPr txBox="1"/>
+          <p:nvPr/>
+        </p:nvSpPr>
+        <p:spPr>
+          <a:xfrm>
+            <a:off x="914400" y="3048000"/>
+            <a:ext cx="330200" cy="276999"/>
           </a:xfrm>
           <a:prstGeom prst="rect">
             <a:avLst/>
@@ -4694,32 +4814,72 @@
           <a:p>
             <a:pPr algn="ctr"/>
             <a:r>
+              <a:rPr lang="en-US" sz="800" b="1">
+                <a:solidFill>
+                  <a:srgbClr val="10212D"/>
+                </a:solidFill>
+                <a:latin typeface="Aptos Display" panose="020B0004020202020204" pitchFamily="34" charset="0"/>
+              </a:rPr>
+              <a:t>OK</a:t>
+            </a:r>
+          </a:p>
+        </p:txBody>
+      </p:sp>
+      <p:sp>
+        <p:nvSpPr>
+          <p:cNvPr id="22" name="TextBox 21">
+            <a:extLst>
+              <a:ext uri="{FF2B5EF4-FFF2-40B4-BE49-F238E27FC236}">
+                <a16:creationId xmlns:a16="http://schemas.microsoft.com/office/drawing/2014/main" id="{A707ADC3-1653-481E-CF53-8B1239ACAB02}"/>
+              </a:ext>
+            </a:extLst>
+          </p:cNvPr>
+          <p:cNvSpPr txBox="1"/>
+          <p:nvPr/>
+        </p:nvSpPr>
+        <p:spPr>
+          <a:xfrm>
+            <a:off x="1447800" y="2895600"/>
+            <a:ext cx="2413000" cy="276999"/>
+          </a:xfrm>
+          <a:prstGeom prst="rect">
+            <a:avLst/>
+          </a:prstGeom>
+          <a:noFill/>
+        </p:spPr>
+        <p:txBody>
+          <a:bodyPr vert="horz" wrap="square" lIns="0" tIns="0" rIns="0" bIns="0" rtlCol="0">
+            <a:noAutofit/>
+          </a:bodyPr>
+          <a:lstStyle/>
+          <a:p>
+            <a:r>
               <a:rPr lang="en-US" sz="900" b="1">
                 <a:solidFill>
-                  <a:srgbClr val="10212D"/>
-                </a:solidFill>
-                <a:latin typeface="Aptos Display" panose="020B0004020202020204" pitchFamily="34" charset="0"/>
-              </a:rPr>
-              <a:t>OK</a:t>
-            </a:r>
-          </a:p>
-        </p:txBody>
-      </p:sp>
-      <p:sp>
-        <p:nvSpPr>
-          <p:cNvPr id="19" name="TextBox 18">
-            <a:extLst>
-              <a:ext uri="{FF2B5EF4-FFF2-40B4-BE49-F238E27FC236}">
-                <a16:creationId xmlns:a16="http://schemas.microsoft.com/office/drawing/2014/main" id="{E0620738-6F21-89BB-9621-4E3422D396A2}"/>
-              </a:ext>
-            </a:extLst>
-          </p:cNvPr>
-          <p:cNvSpPr txBox="1"/>
-          <p:nvPr/>
-        </p:nvSpPr>
-        <p:spPr>
-          <a:xfrm>
-            <a:off x="1447800" y="3022600"/>
+                  <a:srgbClr val="CE4A2B"/>
+                </a:solidFill>
+                <a:latin typeface="Aptos" panose="020B0004020202020204" pitchFamily="34" charset="0"/>
+              </a:rPr>
+              <a:t>PROVEN</a:t>
+            </a:r>
+          </a:p>
+        </p:txBody>
+      </p:sp>
+      <p:sp>
+        <p:nvSpPr>
+          <p:cNvPr id="23" name="TextBox 22">
+            <a:extLst>
+              <a:ext uri="{FF2B5EF4-FFF2-40B4-BE49-F238E27FC236}">
+                <a16:creationId xmlns:a16="http://schemas.microsoft.com/office/drawing/2014/main" id="{17491E1C-6D29-8C2A-6FDE-D1A1AD3B2A49}"/>
+              </a:ext>
+            </a:extLst>
+          </p:cNvPr>
+          <p:cNvSpPr txBox="1"/>
+          <p:nvPr/>
+        </p:nvSpPr>
+        <p:spPr>
+          <a:xfrm>
+            <a:off x="1447800" y="3136900"/>
             <a:ext cx="2413000" cy="276999"/>
           </a:xfrm>
           <a:prstGeom prst="rect">
@@ -4734,23 +4894,23 @@
           <a:lstStyle/>
           <a:p>
             <a:r>
-              <a:rPr lang="en-US" sz="1300" b="1">
+              <a:rPr lang="en-US" sz="1250" b="1">
                 <a:solidFill>
                   <a:srgbClr val="1F2329"/>
                 </a:solidFill>
                 <a:latin typeface="Aptos" panose="020B0004020202020204" pitchFamily="34" charset="0"/>
               </a:rPr>
-              <a:t>Windows + Linux</a:t>
-            </a:r>
-          </a:p>
-        </p:txBody>
-      </p:sp>
-      <p:sp>
-        <p:nvSpPr>
-          <p:cNvPr id="20" name="Rectangle: Rounded Corners 19">
-            <a:extLst>
-              <a:ext uri="{FF2B5EF4-FFF2-40B4-BE49-F238E27FC236}">
-                <a16:creationId xmlns:a16="http://schemas.microsoft.com/office/drawing/2014/main" id="{278D0175-AC13-9D05-B021-D358CFB3A68A}"/>
+              <a:t>Two consumer-owned pins</a:t>
+            </a:r>
+          </a:p>
+        </p:txBody>
+      </p:sp>
+      <p:sp>
+        <p:nvSpPr>
+          <p:cNvPr id="24" name="Rectangle: Rounded Corners 23">
+            <a:extLst>
+              <a:ext uri="{FF2B5EF4-FFF2-40B4-BE49-F238E27FC236}">
+                <a16:creationId xmlns:a16="http://schemas.microsoft.com/office/drawing/2014/main" id="{23EDAEC4-C6E4-9361-1D42-7560EE7ED0E0}"/>
               </a:ext>
             </a:extLst>
           </p:cNvPr>
@@ -4805,10 +4965,10 @@
       </p:sp>
       <p:sp>
         <p:nvSpPr>
-          <p:cNvPr id="21" name="Oval 20">
-            <a:extLst>
-              <a:ext uri="{FF2B5EF4-FFF2-40B4-BE49-F238E27FC236}">
-                <a16:creationId xmlns:a16="http://schemas.microsoft.com/office/drawing/2014/main" id="{16E13CE5-4502-598A-C434-EB94597DE2BD}"/>
+          <p:cNvPr id="25" name="Oval 24">
+            <a:extLst>
+              <a:ext uri="{FF2B5EF4-FFF2-40B4-BE49-F238E27FC236}">
+                <a16:creationId xmlns:a16="http://schemas.microsoft.com/office/drawing/2014/main" id="{C13ECF4F-9C99-86FD-BA77-71C09A9E2C4C}"/>
               </a:ext>
             </a:extLst>
           </p:cNvPr>
@@ -4824,7 +4984,7 @@
             <a:avLst/>
           </a:prstGeom>
           <a:solidFill>
-            <a:srgbClr val="52B8C8"/>
+            <a:srgbClr val="D95F31"/>
           </a:solidFill>
           <a:ln w="19050" cap="flat" cmpd="sng" algn="ctr">
             <a:solidFill>
@@ -4866,20 +5026,20 @@
       </p:sp>
       <p:sp>
         <p:nvSpPr>
-          <p:cNvPr id="22" name="TextBox 21">
-            <a:extLst>
-              <a:ext uri="{FF2B5EF4-FFF2-40B4-BE49-F238E27FC236}">
-                <a16:creationId xmlns:a16="http://schemas.microsoft.com/office/drawing/2014/main" id="{50294B40-ADCC-EDC8-2147-C3CDF7AFB7FF}"/>
-              </a:ext>
-            </a:extLst>
-          </p:cNvPr>
-          <p:cNvSpPr txBox="1"/>
-          <p:nvPr/>
-        </p:nvSpPr>
-        <p:spPr>
-          <a:xfrm>
-            <a:off x="4699000" y="3048000"/>
-            <a:ext cx="279400" cy="276999"/>
+          <p:cNvPr id="26" name="TextBox 25">
+            <a:extLst>
+              <a:ext uri="{FF2B5EF4-FFF2-40B4-BE49-F238E27FC236}">
+                <a16:creationId xmlns:a16="http://schemas.microsoft.com/office/drawing/2014/main" id="{2B75EDA8-04F7-ABC0-517F-53C0C96EBD98}"/>
+              </a:ext>
+            </a:extLst>
+          </p:cNvPr>
+          <p:cNvSpPr txBox="1"/>
+          <p:nvPr/>
+        </p:nvSpPr>
+        <p:spPr>
+          <a:xfrm>
+            <a:off x="4673600" y="3048000"/>
+            <a:ext cx="330200" cy="276999"/>
           </a:xfrm>
           <a:prstGeom prst="rect">
             <a:avLst/>
@@ -4894,32 +5054,72 @@
           <a:p>
             <a:pPr algn="ctr"/>
             <a:r>
+              <a:rPr lang="en-US" sz="800" b="1">
+                <a:solidFill>
+                  <a:srgbClr val="10212D"/>
+                </a:solidFill>
+                <a:latin typeface="Aptos Display" panose="020B0004020202020204" pitchFamily="34" charset="0"/>
+              </a:rPr>
+              <a:t>NXT</a:t>
+            </a:r>
+          </a:p>
+        </p:txBody>
+      </p:sp>
+      <p:sp>
+        <p:nvSpPr>
+          <p:cNvPr id="27" name="TextBox 26">
+            <a:extLst>
+              <a:ext uri="{FF2B5EF4-FFF2-40B4-BE49-F238E27FC236}">
+                <a16:creationId xmlns:a16="http://schemas.microsoft.com/office/drawing/2014/main" id="{C5E0AAB4-D57B-F96F-C9E2-A6281BB03DAD}"/>
+              </a:ext>
+            </a:extLst>
+          </p:cNvPr>
+          <p:cNvSpPr txBox="1"/>
+          <p:nvPr/>
+        </p:nvSpPr>
+        <p:spPr>
+          <a:xfrm>
+            <a:off x="5207000" y="2895600"/>
+            <a:ext cx="2413000" cy="276999"/>
+          </a:xfrm>
+          <a:prstGeom prst="rect">
+            <a:avLst/>
+          </a:prstGeom>
+          <a:noFill/>
+        </p:spPr>
+        <p:txBody>
+          <a:bodyPr vert="horz" wrap="square" lIns="0" tIns="0" rIns="0" bIns="0" rtlCol="0">
+            <a:noAutofit/>
+          </a:bodyPr>
+          <a:lstStyle/>
+          <a:p>
+            <a:r>
               <a:rPr lang="en-US" sz="900" b="1">
                 <a:solidFill>
-                  <a:srgbClr val="10212D"/>
-                </a:solidFill>
-                <a:latin typeface="Aptos Display" panose="020B0004020202020204" pitchFamily="34" charset="0"/>
-              </a:rPr>
-              <a:t>OK</a:t>
-            </a:r>
-          </a:p>
-        </p:txBody>
-      </p:sp>
-      <p:sp>
-        <p:nvSpPr>
-          <p:cNvPr id="23" name="TextBox 22">
-            <a:extLst>
-              <a:ext uri="{FF2B5EF4-FFF2-40B4-BE49-F238E27FC236}">
-                <a16:creationId xmlns:a16="http://schemas.microsoft.com/office/drawing/2014/main" id="{0B799F3E-5793-C71A-BBF6-4712620BB95F}"/>
-              </a:ext>
-            </a:extLst>
-          </p:cNvPr>
-          <p:cNvSpPr txBox="1"/>
-          <p:nvPr/>
-        </p:nvSpPr>
-        <p:spPr>
-          <a:xfrm>
-            <a:off x="5207000" y="3022600"/>
+                  <a:srgbClr val="CE4A2B"/>
+                </a:solidFill>
+                <a:latin typeface="Aptos" panose="020B0004020202020204" pitchFamily="34" charset="0"/>
+              </a:rPr>
+              <a:t>NEXT</a:t>
+            </a:r>
+          </a:p>
+        </p:txBody>
+      </p:sp>
+      <p:sp>
+        <p:nvSpPr>
+          <p:cNvPr id="28" name="TextBox 27">
+            <a:extLst>
+              <a:ext uri="{FF2B5EF4-FFF2-40B4-BE49-F238E27FC236}">
+                <a16:creationId xmlns:a16="http://schemas.microsoft.com/office/drawing/2014/main" id="{06CD7C4B-151E-FB8D-CF8E-FFEBDDDF7E80}"/>
+              </a:ext>
+            </a:extLst>
+          </p:cNvPr>
+          <p:cNvSpPr txBox="1"/>
+          <p:nvPr/>
+        </p:nvSpPr>
+        <p:spPr>
+          <a:xfrm>
+            <a:off x="5207000" y="3136900"/>
             <a:ext cx="2413000" cy="276999"/>
           </a:xfrm>
           <a:prstGeom prst="rect">
@@ -4934,23 +5134,23 @@
           <a:lstStyle/>
           <a:p>
             <a:r>
-              <a:rPr lang="en-US" sz="1300" b="1">
+              <a:rPr lang="en-US" sz="1250" b="1">
                 <a:solidFill>
                   <a:srgbClr val="1F2329"/>
                 </a:solidFill>
                 <a:latin typeface="Aptos" panose="020B0004020202020204" pitchFamily="34" charset="0"/>
               </a:rPr>
-              <a:t>GitHub PR + CI</a:t>
-            </a:r>
-          </a:p>
-        </p:txBody>
-      </p:sp>
-      <p:sp>
-        <p:nvSpPr>
-          <p:cNvPr id="24" name="Rectangle: Rounded Corners 23">
-            <a:extLst>
-              <a:ext uri="{FF2B5EF4-FFF2-40B4-BE49-F238E27FC236}">
-                <a16:creationId xmlns:a16="http://schemas.microsoft.com/office/drawing/2014/main" id="{7E9C477D-A2DB-563D-A875-342ECFFB18A8}"/>
+              <a:t>Native or service boundary</a:t>
+            </a:r>
+          </a:p>
+        </p:txBody>
+      </p:sp>
+      <p:sp>
+        <p:nvSpPr>
+          <p:cNvPr id="29" name="Rectangle: Rounded Corners 28">
+            <a:extLst>
+              <a:ext uri="{FF2B5EF4-FFF2-40B4-BE49-F238E27FC236}">
+                <a16:creationId xmlns:a16="http://schemas.microsoft.com/office/drawing/2014/main" id="{ED0F747A-1599-CF09-C808-720276C5D6D1}"/>
               </a:ext>
             </a:extLst>
           </p:cNvPr>
@@ -5005,10 +5205,10 @@
       </p:sp>
       <p:sp>
         <p:nvSpPr>
-          <p:cNvPr id="25" name="Oval 24">
-            <a:extLst>
-              <a:ext uri="{FF2B5EF4-FFF2-40B4-BE49-F238E27FC236}">
-                <a16:creationId xmlns:a16="http://schemas.microsoft.com/office/drawing/2014/main" id="{1A224A69-0D91-B5F0-1CC9-7A3B9DEE5D32}"/>
+          <p:cNvPr id="30" name="Oval 29">
+            <a:extLst>
+              <a:ext uri="{FF2B5EF4-FFF2-40B4-BE49-F238E27FC236}">
+                <a16:creationId xmlns:a16="http://schemas.microsoft.com/office/drawing/2014/main" id="{1B308855-B676-BBE6-5868-0E09A17ED302}"/>
               </a:ext>
             </a:extLst>
           </p:cNvPr>
@@ -5024,7 +5224,7 @@
             <a:avLst/>
           </a:prstGeom>
           <a:solidFill>
-            <a:srgbClr val="52B8C8"/>
+            <a:srgbClr val="D95F31"/>
           </a:solidFill>
           <a:ln w="19050" cap="flat" cmpd="sng" algn="ctr">
             <a:solidFill>
@@ -5066,20 +5266,20 @@
       </p:sp>
       <p:sp>
         <p:nvSpPr>
-          <p:cNvPr id="26" name="TextBox 25">
-            <a:extLst>
-              <a:ext uri="{FF2B5EF4-FFF2-40B4-BE49-F238E27FC236}">
-                <a16:creationId xmlns:a16="http://schemas.microsoft.com/office/drawing/2014/main" id="{87A89525-C1BB-D0C3-80E8-D095CD493CBF}"/>
-              </a:ext>
-            </a:extLst>
-          </p:cNvPr>
-          <p:cNvSpPr txBox="1"/>
-          <p:nvPr/>
-        </p:nvSpPr>
-        <p:spPr>
-          <a:xfrm>
-            <a:off x="8458200" y="3048000"/>
-            <a:ext cx="279400" cy="276999"/>
+          <p:cNvPr id="31" name="TextBox 30">
+            <a:extLst>
+              <a:ext uri="{FF2B5EF4-FFF2-40B4-BE49-F238E27FC236}">
+                <a16:creationId xmlns:a16="http://schemas.microsoft.com/office/drawing/2014/main" id="{C9519918-EAA5-5DC7-F1E0-4E444D531D5A}"/>
+              </a:ext>
+            </a:extLst>
+          </p:cNvPr>
+          <p:cNvSpPr txBox="1"/>
+          <p:nvPr/>
+        </p:nvSpPr>
+        <p:spPr>
+          <a:xfrm>
+            <a:off x="8432800" y="3048000"/>
+            <a:ext cx="330200" cy="276999"/>
           </a:xfrm>
           <a:prstGeom prst="rect">
             <a:avLst/>
@@ -5094,32 +5294,72 @@
           <a:p>
             <a:pPr algn="ctr"/>
             <a:r>
+              <a:rPr lang="en-US" sz="800" b="1">
+                <a:solidFill>
+                  <a:srgbClr val="10212D"/>
+                </a:solidFill>
+                <a:latin typeface="Aptos Display" panose="020B0004020202020204" pitchFamily="34" charset="0"/>
+              </a:rPr>
+              <a:t>NXT</a:t>
+            </a:r>
+          </a:p>
+        </p:txBody>
+      </p:sp>
+      <p:sp>
+        <p:nvSpPr>
+          <p:cNvPr id="32" name="TextBox 31">
+            <a:extLst>
+              <a:ext uri="{FF2B5EF4-FFF2-40B4-BE49-F238E27FC236}">
+                <a16:creationId xmlns:a16="http://schemas.microsoft.com/office/drawing/2014/main" id="{81C11F3E-D478-0A87-0F60-694D56E9D4D6}"/>
+              </a:ext>
+            </a:extLst>
+          </p:cNvPr>
+          <p:cNvSpPr txBox="1"/>
+          <p:nvPr/>
+        </p:nvSpPr>
+        <p:spPr>
+          <a:xfrm>
+            <a:off x="8966200" y="2895600"/>
+            <a:ext cx="2413000" cy="276999"/>
+          </a:xfrm>
+          <a:prstGeom prst="rect">
+            <a:avLst/>
+          </a:prstGeom>
+          <a:noFill/>
+        </p:spPr>
+        <p:txBody>
+          <a:bodyPr vert="horz" wrap="square" lIns="0" tIns="0" rIns="0" bIns="0" rtlCol="0">
+            <a:noAutofit/>
+          </a:bodyPr>
+          <a:lstStyle/>
+          <a:p>
+            <a:r>
               <a:rPr lang="en-US" sz="900" b="1">
                 <a:solidFill>
-                  <a:srgbClr val="10212D"/>
-                </a:solidFill>
-                <a:latin typeface="Aptos Display" panose="020B0004020202020204" pitchFamily="34" charset="0"/>
-              </a:rPr>
-              <a:t>OK</a:t>
-            </a:r>
-          </a:p>
-        </p:txBody>
-      </p:sp>
-      <p:sp>
-        <p:nvSpPr>
-          <p:cNvPr id="27" name="TextBox 26">
-            <a:extLst>
-              <a:ext uri="{FF2B5EF4-FFF2-40B4-BE49-F238E27FC236}">
-                <a16:creationId xmlns:a16="http://schemas.microsoft.com/office/drawing/2014/main" id="{5606C58C-F42C-EF96-F261-E73F03B69FEA}"/>
-              </a:ext>
-            </a:extLst>
-          </p:cNvPr>
-          <p:cNvSpPr txBox="1"/>
-          <p:nvPr/>
-        </p:nvSpPr>
-        <p:spPr>
-          <a:xfrm>
-            <a:off x="8966200" y="3022600"/>
+                  <a:srgbClr val="CE4A2B"/>
+                </a:solidFill>
+                <a:latin typeface="Aptos" panose="020B0004020202020204" pitchFamily="34" charset="0"/>
+              </a:rPr>
+              <a:t>NEXT</a:t>
+            </a:r>
+          </a:p>
+        </p:txBody>
+      </p:sp>
+      <p:sp>
+        <p:nvSpPr>
+          <p:cNvPr id="33" name="TextBox 32">
+            <a:extLst>
+              <a:ext uri="{FF2B5EF4-FFF2-40B4-BE49-F238E27FC236}">
+                <a16:creationId xmlns:a16="http://schemas.microsoft.com/office/drawing/2014/main" id="{7A54AD47-303C-0BEC-88CD-CEBADCE4A8B2}"/>
+              </a:ext>
+            </a:extLst>
+          </p:cNvPr>
+          <p:cNvSpPr txBox="1"/>
+          <p:nvPr/>
+        </p:nvSpPr>
+        <p:spPr>
+          <a:xfrm>
+            <a:off x="8966200" y="3136900"/>
             <a:ext cx="2413000" cy="276999"/>
           </a:xfrm>
           <a:prstGeom prst="rect">
@@ -5134,23 +5374,23 @@
           <a:lstStyle/>
           <a:p>
             <a:r>
-              <a:rPr lang="en-US" sz="1300" b="1">
+              <a:rPr lang="en-US" sz="1250" b="1">
                 <a:solidFill>
                   <a:srgbClr val="1F2329"/>
                 </a:solidFill>
                 <a:latin typeface="Aptos" panose="020B0004020202020204" pitchFamily="34" charset="0"/>
               </a:rPr>
-              <a:t>Azure integration</a:t>
-            </a:r>
-          </a:p>
-        </p:txBody>
-      </p:sp>
-      <p:sp>
-        <p:nvSpPr>
-          <p:cNvPr id="28" name="Rectangle: Rounded Corners 27">
-            <a:extLst>
-              <a:ext uri="{FF2B5EF4-FFF2-40B4-BE49-F238E27FC236}">
-                <a16:creationId xmlns:a16="http://schemas.microsoft.com/office/drawing/2014/main" id="{CE240A36-97A1-8AE3-9D1F-0F6B10192DCB}"/>
+              <a:t>GitHub + Azure design partner</a:t>
+            </a:r>
+          </a:p>
+        </p:txBody>
+      </p:sp>
+      <p:sp>
+        <p:nvSpPr>
+          <p:cNvPr id="34" name="Rectangle: Rounded Corners 33">
+            <a:extLst>
+              <a:ext uri="{FF2B5EF4-FFF2-40B4-BE49-F238E27FC236}">
+                <a16:creationId xmlns:a16="http://schemas.microsoft.com/office/drawing/2014/main" id="{DD44581B-6226-378D-7273-2175A6F820C3}"/>
               </a:ext>
             </a:extLst>
           </p:cNvPr>
@@ -5207,10 +5447,10 @@
       </p:sp>
       <p:sp>
         <p:nvSpPr>
-          <p:cNvPr id="29" name="TextBox 28">
-            <a:extLst>
-              <a:ext uri="{FF2B5EF4-FFF2-40B4-BE49-F238E27FC236}">
-                <a16:creationId xmlns:a16="http://schemas.microsoft.com/office/drawing/2014/main" id="{6AF480E6-CFB2-D918-BD1C-990CBD8063A0}"/>
+          <p:cNvPr id="35" name="TextBox 34">
+            <a:extLst>
+              <a:ext uri="{FF2B5EF4-FFF2-40B4-BE49-F238E27FC236}">
+                <a16:creationId xmlns:a16="http://schemas.microsoft.com/office/drawing/2014/main" id="{31A47E11-9ABE-FE5D-0833-5E261B5345A3}"/>
               </a:ext>
             </a:extLst>
           </p:cNvPr>
@@ -5235,23 +5475,23 @@
           <a:p>
             <a:pPr algn="ctr"/>
             <a:r>
-              <a:rPr lang="en-US" sz="2000" b="1">
+              <a:rPr lang="en-US" sz="1900" b="1">
                 <a:solidFill>
                   <a:srgbClr val="FFFFFF"/>
                 </a:solidFill>
                 <a:latin typeface="Aptos Display" panose="020B0004020202020204" pitchFamily="34" charset="0"/>
               </a:rPr>
-              <a:t>The pilot only passes if it can explain, renew, fall back, roll back, and remove.</a:t>
-            </a:r>
-          </a:p>
-        </p:txBody>
-      </p:sp>
-      <p:sp>
-        <p:nvSpPr>
-          <p:cNvPr id="30" name="TextBox 29">
-            <a:extLst>
-              <a:ext uri="{FF2B5EF4-FFF2-40B4-BE49-F238E27FC236}">
-                <a16:creationId xmlns:a16="http://schemas.microsoft.com/office/drawing/2014/main" id="{8B32746E-4019-7CC3-0BB9-A4A09474702A}"/>
+              <a:t>Next proof: one owned application, real boundaries, owner validation, rollback, and removal.</a:t>
+            </a:r>
+          </a:p>
+        </p:txBody>
+      </p:sp>
+      <p:sp>
+        <p:nvSpPr>
+          <p:cNvPr id="36" name="TextBox 35">
+            <a:extLst>
+              <a:ext uri="{FF2B5EF4-FFF2-40B4-BE49-F238E27FC236}">
+                <a16:creationId xmlns:a16="http://schemas.microsoft.com/office/drawing/2014/main" id="{1E2E1116-C34B-C396-47F6-D9B616850D9D}"/>
               </a:ext>
             </a:extLst>
           </p:cNvPr>
@@ -5282,17 +5522,17 @@
                 </a:solidFill>
                 <a:latin typeface="Aptos" panose="020B0004020202020204" pitchFamily="34" charset="0"/>
               </a:rPr>
-              <a:t>And it must create at least one useful upstream contribution packet.</a:t>
-            </a:r>
-          </a:p>
-        </p:txBody>
-      </p:sp>
-      <p:sp>
-        <p:nvSpPr>
-          <p:cNvPr id="31" name="TextBox 30">
-            <a:extLst>
-              <a:ext uri="{FF2B5EF4-FFF2-40B4-BE49-F238E27FC236}">
-                <a16:creationId xmlns:a16="http://schemas.microsoft.com/office/drawing/2014/main" id="{8A19066A-AFD5-D652-BCCB-EA2654EAA716}"/>
+              <a:t>Ferris remains removable and read-first; execution is not part of this ask.</a:t>
+            </a:r>
+          </a:p>
+        </p:txBody>
+      </p:sp>
+      <p:sp>
+        <p:nvSpPr>
+          <p:cNvPr id="37" name="TextBox 36">
+            <a:extLst>
+              <a:ext uri="{FF2B5EF4-FFF2-40B4-BE49-F238E27FC236}">
+                <a16:creationId xmlns:a16="http://schemas.microsoft.com/office/drawing/2014/main" id="{5F336038-6FBF-2325-C031-305BDDD94BC7}"/>
               </a:ext>
             </a:extLst>
           </p:cNvPr>
@@ -5322,17 +5562,17 @@
                 </a:solidFill>
                 <a:latin typeface="Aptos" panose="020B0004020202020204" pitchFamily="34" charset="0"/>
               </a:rPr>
-              <a:t>Ferris remains read-first and Cargo-native; execution authority expands only through separate governed gates.</a:t>
-            </a:r>
-          </a:p>
-        </p:txBody>
-      </p:sp>
-      <p:sp>
-        <p:nvSpPr>
-          <p:cNvPr id="32" name="TextBox 31">
-            <a:extLst>
-              <a:ext uri="{FF2B5EF4-FFF2-40B4-BE49-F238E27FC236}">
-                <a16:creationId xmlns:a16="http://schemas.microsoft.com/office/drawing/2014/main" id="{653FFA88-67CB-DCD4-B139-E8706B1F1B4D}"/>
+              <a:t>Current status: public incubation platform, exact experimental contracts, no production support claim.</a:t>
+            </a:r>
+          </a:p>
+        </p:txBody>
+      </p:sp>
+      <p:sp>
+        <p:nvSpPr>
+          <p:cNvPr id="38" name="TextBox 37">
+            <a:extLst>
+              <a:ext uri="{FF2B5EF4-FFF2-40B4-BE49-F238E27FC236}">
+                <a16:creationId xmlns:a16="http://schemas.microsoft.com/office/drawing/2014/main" id="{AFB08FC9-C04C-78AF-13E6-58E07D29CC2E}"/>
               </a:ext>
             </a:extLst>
           </p:cNvPr>
@@ -5371,7 +5611,7 @@
     </p:spTree>
     <p:extLst>
       <p:ext uri="{BB962C8B-B14F-4D97-AF65-F5344CB8AC3E}">
-        <p14:creationId xmlns:p14="http://schemas.microsoft.com/office/powerpoint/2010/main" val="1247010981"/>
+        <p14:creationId xmlns:p14="http://schemas.microsoft.com/office/powerpoint/2010/main" val="2443231766"/>
       </p:ext>
     </p:extLst>
   </p:cSld>
@@ -5403,7 +5643,7 @@
           <p:cNvPr id="2" name="TextBox 1">
             <a:extLst>
               <a:ext uri="{FF2B5EF4-FFF2-40B4-BE49-F238E27FC236}">
-                <a16:creationId xmlns:a16="http://schemas.microsoft.com/office/drawing/2014/main" id="{D5D6C4EE-3FE9-01B7-A1E4-851FEDEF52CC}"/>
+                <a16:creationId xmlns:a16="http://schemas.microsoft.com/office/drawing/2014/main" id="{FB96BED9-EEA7-B2B2-E2EC-A421ECDBE280}"/>
               </a:ext>
             </a:extLst>
           </p:cNvPr>
@@ -5443,7 +5683,7 @@
           <p:cNvPr id="3" name="TextBox 2">
             <a:extLst>
               <a:ext uri="{FF2B5EF4-FFF2-40B4-BE49-F238E27FC236}">
-                <a16:creationId xmlns:a16="http://schemas.microsoft.com/office/drawing/2014/main" id="{27A12BFC-6CE8-0F1B-E351-FE2D66BD613E}"/>
+                <a16:creationId xmlns:a16="http://schemas.microsoft.com/office/drawing/2014/main" id="{D90A055B-E6BC-8E01-3696-6163FB1B62D5}"/>
               </a:ext>
             </a:extLst>
           </p:cNvPr>
@@ -5483,7 +5723,7 @@
           <p:cNvPr id="4" name="Rectangle: Rounded Corners 3">
             <a:extLst>
               <a:ext uri="{FF2B5EF4-FFF2-40B4-BE49-F238E27FC236}">
-                <a16:creationId xmlns:a16="http://schemas.microsoft.com/office/drawing/2014/main" id="{06B3D865-B2D3-F7B7-21A3-047DA90514F7}"/>
+                <a16:creationId xmlns:a16="http://schemas.microsoft.com/office/drawing/2014/main" id="{D8743BCF-AA8B-1BAF-0DF0-FC9D8F95470E}"/>
               </a:ext>
             </a:extLst>
           </p:cNvPr>
@@ -5541,7 +5781,7 @@
           <p:cNvPr id="5" name="TextBox 4">
             <a:extLst>
               <a:ext uri="{FF2B5EF4-FFF2-40B4-BE49-F238E27FC236}">
-                <a16:creationId xmlns:a16="http://schemas.microsoft.com/office/drawing/2014/main" id="{0168DB90-4B46-D10C-A19B-72AB98FD727A}"/>
+                <a16:creationId xmlns:a16="http://schemas.microsoft.com/office/drawing/2014/main" id="{A19BEB3B-E227-279D-333C-F4C4296CDF0C}"/>
               </a:ext>
             </a:extLst>
           </p:cNvPr>
@@ -5571,7 +5811,7 @@
                 </a:solidFill>
                 <a:latin typeface="Aptos" panose="020B0004020202020204" pitchFamily="34" charset="0"/>
               </a:rPr>
-              <a:t>0-90 DAYS</a:t>
+              <a:t>NOW</a:t>
             </a:r>
           </a:p>
         </p:txBody>
@@ -5581,7 +5821,7 @@
           <p:cNvPr id="6" name="TextBox 5">
             <a:extLst>
               <a:ext uri="{FF2B5EF4-FFF2-40B4-BE49-F238E27FC236}">
-                <a16:creationId xmlns:a16="http://schemas.microsoft.com/office/drawing/2014/main" id="{7444B21E-660E-231A-D5DA-B084FC562852}"/>
+                <a16:creationId xmlns:a16="http://schemas.microsoft.com/office/drawing/2014/main" id="{1985E856-B762-F64D-E207-144D94AE0F99}"/>
               </a:ext>
             </a:extLst>
           </p:cNvPr>
@@ -5611,7 +5851,7 @@
                 </a:solidFill>
                 <a:latin typeface="Aptos Display" panose="020B0004020202020204" pitchFamily="34" charset="0"/>
               </a:rPr>
-              <a:t>Sponsor + discover</a:t>
+              <a:t>Public foundation</a:t>
             </a:r>
           </a:p>
         </p:txBody>
@@ -5621,7 +5861,7 @@
           <p:cNvPr id="7" name="TextBox 6">
             <a:extLst>
               <a:ext uri="{FF2B5EF4-FFF2-40B4-BE49-F238E27FC236}">
-                <a16:creationId xmlns:a16="http://schemas.microsoft.com/office/drawing/2014/main" id="{5652409F-A9EE-BDED-DBA9-88F2E643D481}"/>
+                <a16:creationId xmlns:a16="http://schemas.microsoft.com/office/drawing/2014/main" id="{36FACBD3-B750-8DF4-7798-FFA0248A30D6}"/>
               </a:ext>
             </a:extLst>
           </p:cNvPr>
@@ -5651,9 +5891,9 @@
                 </a:solidFill>
                 <a:latin typeface="Aptos" panose="020B0004020202020204" pitchFamily="34" charset="0"/>
               </a:rPr>
-              <a:t>Estate census
-Design partners
-Baseline + upstream liaison</a:t>
+              <a:t>Cargo-native plans
+Federation + schemas
+PARLOR + RUNE pins</a:t>
             </a:r>
           </a:p>
         </p:txBody>
@@ -5663,7 +5903,7 @@
           <p:cNvPr id="8" name="Rectangle: Rounded Corners 7">
             <a:extLst>
               <a:ext uri="{FF2B5EF4-FFF2-40B4-BE49-F238E27FC236}">
-                <a16:creationId xmlns:a16="http://schemas.microsoft.com/office/drawing/2014/main" id="{0C139A1F-F9B3-3CCE-2420-D5DBF998CE46}"/>
+                <a16:creationId xmlns:a16="http://schemas.microsoft.com/office/drawing/2014/main" id="{0FDD5C6D-0005-AE51-9C8A-5594561962E1}"/>
               </a:ext>
             </a:extLst>
           </p:cNvPr>
@@ -5721,7 +5961,7 @@
           <p:cNvPr id="9" name="TextBox 8">
             <a:extLst>
               <a:ext uri="{FF2B5EF4-FFF2-40B4-BE49-F238E27FC236}">
-                <a16:creationId xmlns:a16="http://schemas.microsoft.com/office/drawing/2014/main" id="{070EF3D1-A309-3142-470E-E5FD264D519F}"/>
+                <a16:creationId xmlns:a16="http://schemas.microsoft.com/office/drawing/2014/main" id="{82DEF6F4-5582-6548-39F6-2DBEE58D30FE}"/>
               </a:ext>
             </a:extLst>
           </p:cNvPr>
@@ -5751,7 +5991,7 @@
                 </a:solidFill>
                 <a:latin typeface="Aptos" panose="020B0004020202020204" pitchFamily="34" charset="0"/>
               </a:rPr>
-              <a:t>3-6 MONTHS</a:t>
+              <a:t>0-6 MONTHS</a:t>
             </a:r>
           </a:p>
         </p:txBody>
@@ -5761,7 +6001,7 @@
           <p:cNvPr id="10" name="TextBox 9">
             <a:extLst>
               <a:ext uri="{FF2B5EF4-FFF2-40B4-BE49-F238E27FC236}">
-                <a16:creationId xmlns:a16="http://schemas.microsoft.com/office/drawing/2014/main" id="{04E3A806-1385-4DD1-7E16-D360ED022593}"/>
+                <a16:creationId xmlns:a16="http://schemas.microsoft.com/office/drawing/2014/main" id="{54C51C31-39CB-F86E-910E-64CB8025C1A7}"/>
               </a:ext>
             </a:extLst>
           </p:cNvPr>
@@ -5791,7 +6031,7 @@
                 </a:solidFill>
                 <a:latin typeface="Aptos Display" panose="020B0004020202020204" pitchFamily="34" charset="0"/>
               </a:rPr>
-              <a:t>Blueprint proof</a:t>
+              <a:t>Application proof</a:t>
             </a:r>
           </a:p>
         </p:txBody>
@@ -5801,7 +6041,7 @@
           <p:cNvPr id="11" name="TextBox 10">
             <a:extLst>
               <a:ext uri="{FF2B5EF4-FFF2-40B4-BE49-F238E27FC236}">
-                <a16:creationId xmlns:a16="http://schemas.microsoft.com/office/drawing/2014/main" id="{8EA5DE97-FC95-FB41-E926-B12FEACAAD26}"/>
+                <a16:creationId xmlns:a16="http://schemas.microsoft.com/office/drawing/2014/main" id="{E492A541-D40D-67B4-0538-995AFC1DD5A3}"/>
               </a:ext>
             </a:extLst>
           </p:cNvPr>
@@ -5831,9 +6071,9 @@
                 </a:solidFill>
                 <a:latin typeface="Aptos" panose="020B0004020202020204" pitchFamily="34" charset="0"/>
               </a:rPr>
-              <a:t>One application
-GitHub evidence flow
-Windows/Linux + removal</a:t>
+              <a:t>Named design partner
+Boundary + owner gates
+Rollback + removal</a:t>
             </a:r>
           </a:p>
         </p:txBody>
@@ -5843,7 +6083,7 @@
           <p:cNvPr id="12" name="Rectangle: Rounded Corners 11">
             <a:extLst>
               <a:ext uri="{FF2B5EF4-FFF2-40B4-BE49-F238E27FC236}">
-                <a16:creationId xmlns:a16="http://schemas.microsoft.com/office/drawing/2014/main" id="{A54B1238-4DDA-F382-24EF-F64868611E49}"/>
+                <a16:creationId xmlns:a16="http://schemas.microsoft.com/office/drawing/2014/main" id="{D499C3D0-0EF4-D64D-B80E-54424BA28FE5}"/>
               </a:ext>
             </a:extLst>
           </p:cNvPr>
@@ -5901,7 +6141,7 @@
           <p:cNvPr id="13" name="TextBox 12">
             <a:extLst>
               <a:ext uri="{FF2B5EF4-FFF2-40B4-BE49-F238E27FC236}">
-                <a16:creationId xmlns:a16="http://schemas.microsoft.com/office/drawing/2014/main" id="{8104E66E-0B2A-4A21-0ED9-DB9FB3C7971B}"/>
+                <a16:creationId xmlns:a16="http://schemas.microsoft.com/office/drawing/2014/main" id="{B81D9644-E212-5033-A7D2-A232A79B29DF}"/>
               </a:ext>
             </a:extLst>
           </p:cNvPr>
@@ -5941,7 +6181,7 @@
           <p:cNvPr id="14" name="TextBox 13">
             <a:extLst>
               <a:ext uri="{FF2B5EF4-FFF2-40B4-BE49-F238E27FC236}">
-                <a16:creationId xmlns:a16="http://schemas.microsoft.com/office/drawing/2014/main" id="{CA4234B5-C62D-CAE5-73A0-F326AD4A31B8}"/>
+                <a16:creationId xmlns:a16="http://schemas.microsoft.com/office/drawing/2014/main" id="{AB154C74-1B1C-E66A-F7D8-F4B920A302A1}"/>
               </a:ext>
             </a:extLst>
           </p:cNvPr>
@@ -5981,7 +6221,7 @@
           <p:cNvPr id="15" name="TextBox 14">
             <a:extLst>
               <a:ext uri="{FF2B5EF4-FFF2-40B4-BE49-F238E27FC236}">
-                <a16:creationId xmlns:a16="http://schemas.microsoft.com/office/drawing/2014/main" id="{EAAB74A2-C0E3-93A1-D9BA-7D1479491AA2}"/>
+                <a16:creationId xmlns:a16="http://schemas.microsoft.com/office/drawing/2014/main" id="{DCB7A9E4-F2DE-2285-C5CE-C32F93129923}"/>
               </a:ext>
             </a:extLst>
           </p:cNvPr>
@@ -6023,7 +6263,7 @@
           <p:cNvPr id="16" name="Rectangle: Rounded Corners 15">
             <a:extLst>
               <a:ext uri="{FF2B5EF4-FFF2-40B4-BE49-F238E27FC236}">
-                <a16:creationId xmlns:a16="http://schemas.microsoft.com/office/drawing/2014/main" id="{49BF7E31-0CA5-A201-7E0B-3AA9159D4971}"/>
+                <a16:creationId xmlns:a16="http://schemas.microsoft.com/office/drawing/2014/main" id="{2D724CD5-1F7D-8A9F-AB9D-84D6A456342F}"/>
               </a:ext>
             </a:extLst>
           </p:cNvPr>
@@ -6081,7 +6321,7 @@
           <p:cNvPr id="17" name="TextBox 16">
             <a:extLst>
               <a:ext uri="{FF2B5EF4-FFF2-40B4-BE49-F238E27FC236}">
-                <a16:creationId xmlns:a16="http://schemas.microsoft.com/office/drawing/2014/main" id="{A4CECEA0-83D4-92A8-A719-C4BAA8F931D9}"/>
+                <a16:creationId xmlns:a16="http://schemas.microsoft.com/office/drawing/2014/main" id="{2609E1E6-C827-BD92-5D05-A4FFC6FBD93E}"/>
               </a:ext>
             </a:extLst>
           </p:cNvPr>
@@ -6121,7 +6361,7 @@
           <p:cNvPr id="18" name="TextBox 17">
             <a:extLst>
               <a:ext uri="{FF2B5EF4-FFF2-40B4-BE49-F238E27FC236}">
-                <a16:creationId xmlns:a16="http://schemas.microsoft.com/office/drawing/2014/main" id="{C695AF49-9428-1AFA-6E6F-3CDE25C916AA}"/>
+                <a16:creationId xmlns:a16="http://schemas.microsoft.com/office/drawing/2014/main" id="{A819F89C-046D-44DE-5E9C-781D4F716B94}"/>
               </a:ext>
             </a:extLst>
           </p:cNvPr>
@@ -6161,7 +6401,7 @@
           <p:cNvPr id="19" name="TextBox 18">
             <a:extLst>
               <a:ext uri="{FF2B5EF4-FFF2-40B4-BE49-F238E27FC236}">
-                <a16:creationId xmlns:a16="http://schemas.microsoft.com/office/drawing/2014/main" id="{E3D98E87-8CEC-B59D-103E-67A21F249839}"/>
+                <a16:creationId xmlns:a16="http://schemas.microsoft.com/office/drawing/2014/main" id="{EF4DC7AA-6469-3EBB-ABED-FC88028FAA7B}"/>
               </a:ext>
             </a:extLst>
           </p:cNvPr>
@@ -6203,7 +6443,7 @@
           <p:cNvPr id="20" name="Straight Connector 19">
             <a:extLst>
               <a:ext uri="{FF2B5EF4-FFF2-40B4-BE49-F238E27FC236}">
-                <a16:creationId xmlns:a16="http://schemas.microsoft.com/office/drawing/2014/main" id="{2EABEC17-7F3E-C476-8E36-76897BDBDE70}"/>
+                <a16:creationId xmlns:a16="http://schemas.microsoft.com/office/drawing/2014/main" id="{9E17F0DC-89D0-F5B0-56C2-4694E9B8A002}"/>
               </a:ext>
             </a:extLst>
           </p:cNvPr>
@@ -6244,7 +6484,7 @@
           <p:cNvPr id="21" name="Oval 20">
             <a:extLst>
               <a:ext uri="{FF2B5EF4-FFF2-40B4-BE49-F238E27FC236}">
-                <a16:creationId xmlns:a16="http://schemas.microsoft.com/office/drawing/2014/main" id="{BAD0CB6D-7C73-0B90-4AE0-369D31FA27D0}"/>
+                <a16:creationId xmlns:a16="http://schemas.microsoft.com/office/drawing/2014/main" id="{9D5ABB1B-795C-3101-64A3-BC54F54E60FB}"/>
               </a:ext>
             </a:extLst>
           </p:cNvPr>
@@ -6305,7 +6545,7 @@
           <p:cNvPr id="22" name="Oval 21">
             <a:extLst>
               <a:ext uri="{FF2B5EF4-FFF2-40B4-BE49-F238E27FC236}">
-                <a16:creationId xmlns:a16="http://schemas.microsoft.com/office/drawing/2014/main" id="{2915907D-B7BA-D6FC-0D38-51963B911CA7}"/>
+                <a16:creationId xmlns:a16="http://schemas.microsoft.com/office/drawing/2014/main" id="{EFF96A94-DACF-30FD-C374-4367BEAF178D}"/>
               </a:ext>
             </a:extLst>
           </p:cNvPr>
@@ -6366,7 +6606,7 @@
           <p:cNvPr id="23" name="Oval 22">
             <a:extLst>
               <a:ext uri="{FF2B5EF4-FFF2-40B4-BE49-F238E27FC236}">
-                <a16:creationId xmlns:a16="http://schemas.microsoft.com/office/drawing/2014/main" id="{3AD72CF4-1F34-8DC6-7CB0-AE0FDF0A363D}"/>
+                <a16:creationId xmlns:a16="http://schemas.microsoft.com/office/drawing/2014/main" id="{337071DE-7E99-F91F-34C3-C5F252F90A2F}"/>
               </a:ext>
             </a:extLst>
           </p:cNvPr>
@@ -6427,7 +6667,7 @@
           <p:cNvPr id="24" name="Oval 23">
             <a:extLst>
               <a:ext uri="{FF2B5EF4-FFF2-40B4-BE49-F238E27FC236}">
-                <a16:creationId xmlns:a16="http://schemas.microsoft.com/office/drawing/2014/main" id="{FF1C0C06-DBA0-5DFC-C4A7-490286B36E5E}"/>
+                <a16:creationId xmlns:a16="http://schemas.microsoft.com/office/drawing/2014/main" id="{BCC7784A-A2CB-7F83-70D4-BE1031CC4DFF}"/>
               </a:ext>
             </a:extLst>
           </p:cNvPr>
@@ -6488,7 +6728,7 @@
           <p:cNvPr id="25" name="Oval 24">
             <a:extLst>
               <a:ext uri="{FF2B5EF4-FFF2-40B4-BE49-F238E27FC236}">
-                <a16:creationId xmlns:a16="http://schemas.microsoft.com/office/drawing/2014/main" id="{0438D254-0E26-355A-4C99-0236385673EE}"/>
+                <a16:creationId xmlns:a16="http://schemas.microsoft.com/office/drawing/2014/main" id="{54CB53BC-BCCF-FECA-02B2-889132754C90}"/>
               </a:ext>
             </a:extLst>
           </p:cNvPr>
@@ -6549,7 +6789,7 @@
           <p:cNvPr id="26" name="TextBox 25">
             <a:extLst>
               <a:ext uri="{FF2B5EF4-FFF2-40B4-BE49-F238E27FC236}">
-                <a16:creationId xmlns:a16="http://schemas.microsoft.com/office/drawing/2014/main" id="{FF0C3C47-CCD0-E145-86CA-E4A1A5329302}"/>
+                <a16:creationId xmlns:a16="http://schemas.microsoft.com/office/drawing/2014/main" id="{F01FBB28-9BBB-CC8F-EB53-6238A5610B5E}"/>
               </a:ext>
             </a:extLst>
           </p:cNvPr>
@@ -6579,7 +6819,7 @@
                 </a:solidFill>
                 <a:latin typeface="Aptos" panose="020B0004020202020204" pitchFamily="34" charset="0"/>
               </a:rPr>
-              <a:t>Stage gates: owner demand, measurable value, cross-platform proof, policy safety, adoption, rollback, and removal.</a:t>
+              <a:t>Stage gates: named owner demand, measurable value, cross-platform proof, policy safety, rollback, and removal.</a:t>
             </a:r>
           </a:p>
         </p:txBody>
@@ -6589,7 +6829,7 @@
           <p:cNvPr id="27" name="TextBox 26">
             <a:extLst>
               <a:ext uri="{FF2B5EF4-FFF2-40B4-BE49-F238E27FC236}">
-                <a16:creationId xmlns:a16="http://schemas.microsoft.com/office/drawing/2014/main" id="{C5E32778-4C5C-B268-55B7-526A34BE6559}"/>
+                <a16:creationId xmlns:a16="http://schemas.microsoft.com/office/drawing/2014/main" id="{43733792-6206-3F6B-5E7F-5C36AED7824C}"/>
               </a:ext>
             </a:extLst>
           </p:cNvPr>
@@ -6628,7 +6868,7 @@
     </p:spTree>
     <p:extLst>
       <p:ext uri="{BB962C8B-B14F-4D97-AF65-F5344CB8AC3E}">
-        <p14:creationId xmlns:p14="http://schemas.microsoft.com/office/powerpoint/2010/main" val="1536027734"/>
+        <p14:creationId xmlns:p14="http://schemas.microsoft.com/office/powerpoint/2010/main" val="965504574"/>
       </p:ext>
     </p:extLst>
   </p:cSld>
@@ -6660,7 +6900,7 @@
           <p:cNvPr id="2" name="TextBox 1">
             <a:extLst>
               <a:ext uri="{FF2B5EF4-FFF2-40B4-BE49-F238E27FC236}">
-                <a16:creationId xmlns:a16="http://schemas.microsoft.com/office/drawing/2014/main" id="{7B76660B-0E70-3475-91D1-98C92C59F17D}"/>
+                <a16:creationId xmlns:a16="http://schemas.microsoft.com/office/drawing/2014/main" id="{B356C25B-068B-3F3D-5C92-5E317E5328F5}"/>
               </a:ext>
             </a:extLst>
           </p:cNvPr>
@@ -6700,7 +6940,7 @@
           <p:cNvPr id="3" name="TextBox 2">
             <a:extLst>
               <a:ext uri="{FF2B5EF4-FFF2-40B4-BE49-F238E27FC236}">
-                <a16:creationId xmlns:a16="http://schemas.microsoft.com/office/drawing/2014/main" id="{2A84CB13-55FC-5059-C7F1-35E31C594C79}"/>
+                <a16:creationId xmlns:a16="http://schemas.microsoft.com/office/drawing/2014/main" id="{CB747047-72ED-A071-80D0-E627C974EFF1}"/>
               </a:ext>
             </a:extLst>
           </p:cNvPr>
@@ -6740,7 +6980,7 @@
           <p:cNvPr id="4" name="Rectangle: Rounded Corners 3">
             <a:extLst>
               <a:ext uri="{FF2B5EF4-FFF2-40B4-BE49-F238E27FC236}">
-                <a16:creationId xmlns:a16="http://schemas.microsoft.com/office/drawing/2014/main" id="{65EB3D25-7826-A6AB-778C-07C0D51C3101}"/>
+                <a16:creationId xmlns:a16="http://schemas.microsoft.com/office/drawing/2014/main" id="{3918C57D-6B2B-3D13-D5B5-E481377ACACE}"/>
               </a:ext>
             </a:extLst>
           </p:cNvPr>
@@ -6800,7 +7040,7 @@
           <p:cNvPr id="5" name="Oval 4">
             <a:extLst>
               <a:ext uri="{FF2B5EF4-FFF2-40B4-BE49-F238E27FC236}">
-                <a16:creationId xmlns:a16="http://schemas.microsoft.com/office/drawing/2014/main" id="{BDBF4C1E-4EF7-4EBB-B68D-E9543115C216}"/>
+                <a16:creationId xmlns:a16="http://schemas.microsoft.com/office/drawing/2014/main" id="{136959B5-85A5-EFCB-8966-B7447A708DC7}"/>
               </a:ext>
             </a:extLst>
           </p:cNvPr>
@@ -6861,7 +7101,7 @@
           <p:cNvPr id="6" name="TextBox 5">
             <a:extLst>
               <a:ext uri="{FF2B5EF4-FFF2-40B4-BE49-F238E27FC236}">
-                <a16:creationId xmlns:a16="http://schemas.microsoft.com/office/drawing/2014/main" id="{50D38D88-5ED7-1B3E-A1B4-872EDD33D3D5}"/>
+                <a16:creationId xmlns:a16="http://schemas.microsoft.com/office/drawing/2014/main" id="{123DD072-E1DF-A1F3-C8A9-5488DB18EFDA}"/>
               </a:ext>
             </a:extLst>
           </p:cNvPr>
@@ -6902,7 +7142,7 @@
           <p:cNvPr id="7" name="TextBox 6">
             <a:extLst>
               <a:ext uri="{FF2B5EF4-FFF2-40B4-BE49-F238E27FC236}">
-                <a16:creationId xmlns:a16="http://schemas.microsoft.com/office/drawing/2014/main" id="{987902CF-A5F8-C669-B670-07E5AD81AED5}"/>
+                <a16:creationId xmlns:a16="http://schemas.microsoft.com/office/drawing/2014/main" id="{B295A2EF-C339-679F-7EAC-EEC62EFE9D48}"/>
               </a:ext>
             </a:extLst>
           </p:cNvPr>
@@ -6932,7 +7172,7 @@
                 </a:solidFill>
                 <a:latin typeface="Aptos" panose="020B0004020202020204" pitchFamily="34" charset="0"/>
               </a:rPr>
-              <a:t>Six-month cross-company proof</a:t>
+              <a:t>Sponsor one six-month application proof</a:t>
             </a:r>
           </a:p>
         </p:txBody>
@@ -6942,7 +7182,7 @@
           <p:cNvPr id="8" name="Rectangle: Rounded Corners 7">
             <a:extLst>
               <a:ext uri="{FF2B5EF4-FFF2-40B4-BE49-F238E27FC236}">
-                <a16:creationId xmlns:a16="http://schemas.microsoft.com/office/drawing/2014/main" id="{76ED4482-F778-7BE6-87F8-5960F025323B}"/>
+                <a16:creationId xmlns:a16="http://schemas.microsoft.com/office/drawing/2014/main" id="{0511C7D8-D97A-4323-9454-BCD736214E96}"/>
               </a:ext>
             </a:extLst>
           </p:cNvPr>
@@ -7002,7 +7242,7 @@
           <p:cNvPr id="9" name="Oval 8">
             <a:extLst>
               <a:ext uri="{FF2B5EF4-FFF2-40B4-BE49-F238E27FC236}">
-                <a16:creationId xmlns:a16="http://schemas.microsoft.com/office/drawing/2014/main" id="{2699F320-69AF-6F43-C018-BDAD85303AA5}"/>
+                <a16:creationId xmlns:a16="http://schemas.microsoft.com/office/drawing/2014/main" id="{D8616F55-D808-3376-54F4-995147D7AF1E}"/>
               </a:ext>
             </a:extLst>
           </p:cNvPr>
@@ -7063,7 +7303,7 @@
           <p:cNvPr id="10" name="TextBox 9">
             <a:extLst>
               <a:ext uri="{FF2B5EF4-FFF2-40B4-BE49-F238E27FC236}">
-                <a16:creationId xmlns:a16="http://schemas.microsoft.com/office/drawing/2014/main" id="{A7429B78-68A9-042E-8BE6-39DFBDE4C11F}"/>
+                <a16:creationId xmlns:a16="http://schemas.microsoft.com/office/drawing/2014/main" id="{7B9E3AFA-6847-4E4F-B491-B6BE8264F037}"/>
               </a:ext>
             </a:extLst>
           </p:cNvPr>
@@ -7104,7 +7344,7 @@
           <p:cNvPr id="11" name="TextBox 10">
             <a:extLst>
               <a:ext uri="{FF2B5EF4-FFF2-40B4-BE49-F238E27FC236}">
-                <a16:creationId xmlns:a16="http://schemas.microsoft.com/office/drawing/2014/main" id="{5A970A00-8FCC-F04D-1810-7F182D30B15A}"/>
+                <a16:creationId xmlns:a16="http://schemas.microsoft.com/office/drawing/2014/main" id="{C2D59C9B-C24C-A55A-AE56-B75031679CB3}"/>
               </a:ext>
             </a:extLst>
           </p:cNvPr>
@@ -7134,7 +7374,7 @@
                 </a:solidFill>
                 <a:latin typeface="Aptos" panose="020B0004020202020204" pitchFamily="34" charset="0"/>
               </a:rPr>
-              <a:t>One systems application + one GitHub/Copilot workflow</a:t>
+              <a:t>Name one systems application + GitHub/Copilot workflow</a:t>
             </a:r>
           </a:p>
         </p:txBody>
@@ -7144,7 +7384,7 @@
           <p:cNvPr id="12" name="Rectangle: Rounded Corners 11">
             <a:extLst>
               <a:ext uri="{FF2B5EF4-FFF2-40B4-BE49-F238E27FC236}">
-                <a16:creationId xmlns:a16="http://schemas.microsoft.com/office/drawing/2014/main" id="{1256595E-61AA-7478-6A45-C759F0763E37}"/>
+                <a16:creationId xmlns:a16="http://schemas.microsoft.com/office/drawing/2014/main" id="{15735BE8-0D98-5201-58E3-FDAF2365F241}"/>
               </a:ext>
             </a:extLst>
           </p:cNvPr>
@@ -7204,7 +7444,7 @@
           <p:cNvPr id="13" name="Oval 12">
             <a:extLst>
               <a:ext uri="{FF2B5EF4-FFF2-40B4-BE49-F238E27FC236}">
-                <a16:creationId xmlns:a16="http://schemas.microsoft.com/office/drawing/2014/main" id="{9D5192A6-266D-6AF2-B7EC-C65A8358D9EA}"/>
+                <a16:creationId xmlns:a16="http://schemas.microsoft.com/office/drawing/2014/main" id="{0E064558-BB20-65EE-00BA-91B13F27D864}"/>
               </a:ext>
             </a:extLst>
           </p:cNvPr>
@@ -7265,7 +7505,7 @@
           <p:cNvPr id="14" name="TextBox 13">
             <a:extLst>
               <a:ext uri="{FF2B5EF4-FFF2-40B4-BE49-F238E27FC236}">
-                <a16:creationId xmlns:a16="http://schemas.microsoft.com/office/drawing/2014/main" id="{6BD26CF7-05E4-A5FB-0DF8-553B7A535216}"/>
+                <a16:creationId xmlns:a16="http://schemas.microsoft.com/office/drawing/2014/main" id="{DF3DCB0A-BED7-166A-26A2-4BB11DC96FDC}"/>
               </a:ext>
             </a:extLst>
           </p:cNvPr>
@@ -7306,7 +7546,7 @@
           <p:cNvPr id="15" name="TextBox 14">
             <a:extLst>
               <a:ext uri="{FF2B5EF4-FFF2-40B4-BE49-F238E27FC236}">
-                <a16:creationId xmlns:a16="http://schemas.microsoft.com/office/drawing/2014/main" id="{77BE7459-ACF3-B287-7555-D1FF48999685}"/>
+                <a16:creationId xmlns:a16="http://schemas.microsoft.com/office/drawing/2014/main" id="{894D090D-FE48-AECA-0635-A564B80D147E}"/>
               </a:ext>
             </a:extLst>
           </p:cNvPr>
@@ -7346,7 +7586,7 @@
           <p:cNvPr id="16" name="Rectangle: Rounded Corners 15">
             <a:extLst>
               <a:ext uri="{FF2B5EF4-FFF2-40B4-BE49-F238E27FC236}">
-                <a16:creationId xmlns:a16="http://schemas.microsoft.com/office/drawing/2014/main" id="{90D0DFDF-C7FF-73E0-3FA3-0CFB5BE3C338}"/>
+                <a16:creationId xmlns:a16="http://schemas.microsoft.com/office/drawing/2014/main" id="{84D5E16A-115C-10B4-7E57-1C3F82584328}"/>
               </a:ext>
             </a:extLst>
           </p:cNvPr>
@@ -7406,7 +7646,7 @@
           <p:cNvPr id="17" name="Oval 16">
             <a:extLst>
               <a:ext uri="{FF2B5EF4-FFF2-40B4-BE49-F238E27FC236}">
-                <a16:creationId xmlns:a16="http://schemas.microsoft.com/office/drawing/2014/main" id="{EE458713-C53F-7602-C5D0-CFF1946377F9}"/>
+                <a16:creationId xmlns:a16="http://schemas.microsoft.com/office/drawing/2014/main" id="{097DCC27-5CA5-952E-EA16-08531B24E190}"/>
               </a:ext>
             </a:extLst>
           </p:cNvPr>
@@ -7467,7 +7707,7 @@
           <p:cNvPr id="18" name="TextBox 17">
             <a:extLst>
               <a:ext uri="{FF2B5EF4-FFF2-40B4-BE49-F238E27FC236}">
-                <a16:creationId xmlns:a16="http://schemas.microsoft.com/office/drawing/2014/main" id="{BFF4605C-5706-0A96-A902-C4DB6AF4B5A6}"/>
+                <a16:creationId xmlns:a16="http://schemas.microsoft.com/office/drawing/2014/main" id="{98E4CED8-1E79-D694-CBE1-4B1E68139878}"/>
               </a:ext>
             </a:extLst>
           </p:cNvPr>
@@ -7508,7 +7748,7 @@
           <p:cNvPr id="19" name="TextBox 18">
             <a:extLst>
               <a:ext uri="{FF2B5EF4-FFF2-40B4-BE49-F238E27FC236}">
-                <a16:creationId xmlns:a16="http://schemas.microsoft.com/office/drawing/2014/main" id="{3BDDD650-5D7E-37C7-E10D-3E4040FBE3A2}"/>
+                <a16:creationId xmlns:a16="http://schemas.microsoft.com/office/drawing/2014/main" id="{34118DB8-CEEC-1245-2D35-3480ECD6B479}"/>
               </a:ext>
             </a:extLst>
           </p:cNvPr>
@@ -7548,7 +7788,7 @@
           <p:cNvPr id="20" name="Rectangle: Rounded Corners 19">
             <a:extLst>
               <a:ext uri="{FF2B5EF4-FFF2-40B4-BE49-F238E27FC236}">
-                <a16:creationId xmlns:a16="http://schemas.microsoft.com/office/drawing/2014/main" id="{D2FCA31B-EEB9-AAFB-1629-3C2048C53701}"/>
+                <a16:creationId xmlns:a16="http://schemas.microsoft.com/office/drawing/2014/main" id="{6965D5C8-D094-7440-D8F0-32533BF80ABE}"/>
               </a:ext>
             </a:extLst>
           </p:cNvPr>
@@ -7608,7 +7848,7 @@
           <p:cNvPr id="21" name="Oval 20">
             <a:extLst>
               <a:ext uri="{FF2B5EF4-FFF2-40B4-BE49-F238E27FC236}">
-                <a16:creationId xmlns:a16="http://schemas.microsoft.com/office/drawing/2014/main" id="{8EAB4FDD-5DF4-481F-6F92-64AC562E95A3}"/>
+                <a16:creationId xmlns:a16="http://schemas.microsoft.com/office/drawing/2014/main" id="{7E3A3165-B374-A234-A06B-1A1D80931F4A}"/>
               </a:ext>
             </a:extLst>
           </p:cNvPr>
@@ -7669,7 +7909,7 @@
           <p:cNvPr id="22" name="TextBox 21">
             <a:extLst>
               <a:ext uri="{FF2B5EF4-FFF2-40B4-BE49-F238E27FC236}">
-                <a16:creationId xmlns:a16="http://schemas.microsoft.com/office/drawing/2014/main" id="{96A3DAC0-735B-7B36-34EF-92ABEA8FFF7D}"/>
+                <a16:creationId xmlns:a16="http://schemas.microsoft.com/office/drawing/2014/main" id="{8D1923C2-BCC1-3049-3237-07B322F5675A}"/>
               </a:ext>
             </a:extLst>
           </p:cNvPr>
@@ -7710,7 +7950,7 @@
           <p:cNvPr id="23" name="TextBox 22">
             <a:extLst>
               <a:ext uri="{FF2B5EF4-FFF2-40B4-BE49-F238E27FC236}">
-                <a16:creationId xmlns:a16="http://schemas.microsoft.com/office/drawing/2014/main" id="{4C25B562-C736-3230-B22F-66AAD20C440F}"/>
+                <a16:creationId xmlns:a16="http://schemas.microsoft.com/office/drawing/2014/main" id="{7126E334-53DE-3019-46DD-46D463A46DAF}"/>
               </a:ext>
             </a:extLst>
           </p:cNvPr>
@@ -7740,7 +7980,7 @@
                 </a:solidFill>
                 <a:latin typeface="Aptos" panose="020B0004020202020204" pitchFamily="34" charset="0"/>
               </a:rPr>
-              <a:t>Windows/Linux, renewal, rollback, and removal gates</a:t>
+              <a:t>Require Windows/Linux, rollback, removal, and a null-case gate</a:t>
             </a:r>
           </a:p>
         </p:txBody>
@@ -7750,7 +7990,7 @@
           <p:cNvPr id="24" name="Rectangle: Rounded Corners 23">
             <a:extLst>
               <a:ext uri="{FF2B5EF4-FFF2-40B4-BE49-F238E27FC236}">
-                <a16:creationId xmlns:a16="http://schemas.microsoft.com/office/drawing/2014/main" id="{AEB4F2E0-3EC0-033F-C893-20B29941D6A6}"/>
+                <a16:creationId xmlns:a16="http://schemas.microsoft.com/office/drawing/2014/main" id="{42B05CAE-BC1D-5A20-2D7A-D58D87B208FA}"/>
               </a:ext>
             </a:extLst>
           </p:cNvPr>
@@ -7810,7 +8050,7 @@
           <p:cNvPr id="25" name="TextBox 24">
             <a:extLst>
               <a:ext uri="{FF2B5EF4-FFF2-40B4-BE49-F238E27FC236}">
-                <a16:creationId xmlns:a16="http://schemas.microsoft.com/office/drawing/2014/main" id="{34DBD254-A3B3-4854-713E-F280446DA3EA}"/>
+                <a16:creationId xmlns:a16="http://schemas.microsoft.com/office/drawing/2014/main" id="{C898153B-7C7E-1E75-2F69-B2FEF49E3411}"/>
               </a:ext>
             </a:extLst>
           </p:cNvPr>
@@ -7849,7 +8089,7 @@
     </p:spTree>
     <p:extLst>
       <p:ext uri="{BB962C8B-B14F-4D97-AF65-F5344CB8AC3E}">
-        <p14:creationId xmlns:p14="http://schemas.microsoft.com/office/powerpoint/2010/main" val="1521513819"/>
+        <p14:creationId xmlns:p14="http://schemas.microsoft.com/office/powerpoint/2010/main" val="1537845852"/>
       </p:ext>
     </p:extLst>
   </p:cSld>
@@ -7881,7 +8121,7 @@
           <p:cNvPr id="2" name="TextBox 1">
             <a:extLst>
               <a:ext uri="{FF2B5EF4-FFF2-40B4-BE49-F238E27FC236}">
-                <a16:creationId xmlns:a16="http://schemas.microsoft.com/office/drawing/2014/main" id="{659D69ED-4EB6-7929-0214-C69D51AD123E}"/>
+                <a16:creationId xmlns:a16="http://schemas.microsoft.com/office/drawing/2014/main" id="{3B95EB8C-4AFE-9DFB-147E-DF9CA6C5BB82}"/>
               </a:ext>
             </a:extLst>
           </p:cNvPr>
@@ -7921,7 +8161,7 @@
           <p:cNvPr id="3" name="TextBox 2">
             <a:extLst>
               <a:ext uri="{FF2B5EF4-FFF2-40B4-BE49-F238E27FC236}">
-                <a16:creationId xmlns:a16="http://schemas.microsoft.com/office/drawing/2014/main" id="{D62102C2-1F50-CECF-8EE2-501A894CB9D1}"/>
+                <a16:creationId xmlns:a16="http://schemas.microsoft.com/office/drawing/2014/main" id="{D01531CA-48CC-5670-961D-9AAB1AD922F7}"/>
               </a:ext>
             </a:extLst>
           </p:cNvPr>
@@ -7961,7 +8201,7 @@
           <p:cNvPr id="4" name="Rectangle: Rounded Corners 3">
             <a:extLst>
               <a:ext uri="{FF2B5EF4-FFF2-40B4-BE49-F238E27FC236}">
-                <a16:creationId xmlns:a16="http://schemas.microsoft.com/office/drawing/2014/main" id="{6E6F5DFD-97C9-F594-65D9-6A92CB609782}"/>
+                <a16:creationId xmlns:a16="http://schemas.microsoft.com/office/drawing/2014/main" id="{A3C1081C-0CD4-18F2-0056-5DBCE836655E}"/>
               </a:ext>
             </a:extLst>
           </p:cNvPr>
@@ -8019,7 +8259,7 @@
           <p:cNvPr id="5" name="TextBox 4">
             <a:extLst>
               <a:ext uri="{FF2B5EF4-FFF2-40B4-BE49-F238E27FC236}">
-                <a16:creationId xmlns:a16="http://schemas.microsoft.com/office/drawing/2014/main" id="{7C1288D4-A50B-8C85-7504-991E71AD3D78}"/>
+                <a16:creationId xmlns:a16="http://schemas.microsoft.com/office/drawing/2014/main" id="{4D98B17B-3C05-4051-019F-F41B8C9EBBF6}"/>
               </a:ext>
             </a:extLst>
           </p:cNvPr>
@@ -8059,7 +8299,7 @@
           <p:cNvPr id="6" name="TextBox 5">
             <a:extLst>
               <a:ext uri="{FF2B5EF4-FFF2-40B4-BE49-F238E27FC236}">
-                <a16:creationId xmlns:a16="http://schemas.microsoft.com/office/drawing/2014/main" id="{B6CFE4B2-6DEE-993E-D6D5-5B4EDECFCFA0}"/>
+                <a16:creationId xmlns:a16="http://schemas.microsoft.com/office/drawing/2014/main" id="{1E01E488-BEBE-976F-BEF2-1422C84E9F5B}"/>
               </a:ext>
             </a:extLst>
           </p:cNvPr>
@@ -8099,7 +8339,7 @@
           <p:cNvPr id="7" name="TextBox 6">
             <a:extLst>
               <a:ext uri="{FF2B5EF4-FFF2-40B4-BE49-F238E27FC236}">
-                <a16:creationId xmlns:a16="http://schemas.microsoft.com/office/drawing/2014/main" id="{2A3BA17F-29E7-0230-99EA-5D0B0B5BB7A4}"/>
+                <a16:creationId xmlns:a16="http://schemas.microsoft.com/office/drawing/2014/main" id="{582D3898-93FA-9AE0-3970-047020F14E5F}"/>
               </a:ext>
             </a:extLst>
           </p:cNvPr>
@@ -8139,7 +8379,7 @@
           <p:cNvPr id="8" name="Rectangle: Rounded Corners 7">
             <a:extLst>
               <a:ext uri="{FF2B5EF4-FFF2-40B4-BE49-F238E27FC236}">
-                <a16:creationId xmlns:a16="http://schemas.microsoft.com/office/drawing/2014/main" id="{941010CA-3350-FEB0-8AB0-8404FF2A5FC2}"/>
+                <a16:creationId xmlns:a16="http://schemas.microsoft.com/office/drawing/2014/main" id="{00817436-92F8-CA1C-7319-9C0FE156602A}"/>
               </a:ext>
             </a:extLst>
           </p:cNvPr>
@@ -8197,7 +8437,7 @@
           <p:cNvPr id="9" name="TextBox 8">
             <a:extLst>
               <a:ext uri="{FF2B5EF4-FFF2-40B4-BE49-F238E27FC236}">
-                <a16:creationId xmlns:a16="http://schemas.microsoft.com/office/drawing/2014/main" id="{CC817966-67FA-0B4B-A2A1-A3A20901D43D}"/>
+                <a16:creationId xmlns:a16="http://schemas.microsoft.com/office/drawing/2014/main" id="{6A177AE2-B284-8CC2-3FE4-6A03F08B1A7D}"/>
               </a:ext>
             </a:extLst>
           </p:cNvPr>
@@ -8237,7 +8477,7 @@
           <p:cNvPr id="10" name="TextBox 9">
             <a:extLst>
               <a:ext uri="{FF2B5EF4-FFF2-40B4-BE49-F238E27FC236}">
-                <a16:creationId xmlns:a16="http://schemas.microsoft.com/office/drawing/2014/main" id="{8537B3AB-22D9-8F3D-5769-5078F3949ED7}"/>
+                <a16:creationId xmlns:a16="http://schemas.microsoft.com/office/drawing/2014/main" id="{9F0A1872-FCD7-FDF0-7B69-B87FDA82EDBC}"/>
               </a:ext>
             </a:extLst>
           </p:cNvPr>
@@ -8277,7 +8517,7 @@
           <p:cNvPr id="11" name="TextBox 10">
             <a:extLst>
               <a:ext uri="{FF2B5EF4-FFF2-40B4-BE49-F238E27FC236}">
-                <a16:creationId xmlns:a16="http://schemas.microsoft.com/office/drawing/2014/main" id="{682C26FF-1964-9B23-1563-311362BF424D}"/>
+                <a16:creationId xmlns:a16="http://schemas.microsoft.com/office/drawing/2014/main" id="{889F3A38-A9F8-F406-A889-49E17760B9AA}"/>
               </a:ext>
             </a:extLst>
           </p:cNvPr>
@@ -8317,7 +8557,7 @@
           <p:cNvPr id="12" name="Rectangle: Rounded Corners 11">
             <a:extLst>
               <a:ext uri="{FF2B5EF4-FFF2-40B4-BE49-F238E27FC236}">
-                <a16:creationId xmlns:a16="http://schemas.microsoft.com/office/drawing/2014/main" id="{E9245D97-C059-EFF1-AEEF-B99FDFD70274}"/>
+                <a16:creationId xmlns:a16="http://schemas.microsoft.com/office/drawing/2014/main" id="{AB639555-80D4-7466-69B8-354C0AB1B89A}"/>
               </a:ext>
             </a:extLst>
           </p:cNvPr>
@@ -8375,7 +8615,7 @@
           <p:cNvPr id="13" name="TextBox 12">
             <a:extLst>
               <a:ext uri="{FF2B5EF4-FFF2-40B4-BE49-F238E27FC236}">
-                <a16:creationId xmlns:a16="http://schemas.microsoft.com/office/drawing/2014/main" id="{DBFCA059-5F89-5952-0C7C-7CFA1482C05A}"/>
+                <a16:creationId xmlns:a16="http://schemas.microsoft.com/office/drawing/2014/main" id="{D01182C1-BC58-5E0F-DFFF-1125842E7971}"/>
               </a:ext>
             </a:extLst>
           </p:cNvPr>
@@ -8415,7 +8655,7 @@
           <p:cNvPr id="14" name="TextBox 13">
             <a:extLst>
               <a:ext uri="{FF2B5EF4-FFF2-40B4-BE49-F238E27FC236}">
-                <a16:creationId xmlns:a16="http://schemas.microsoft.com/office/drawing/2014/main" id="{F58B0727-52D7-5898-C190-E4C50CFF3D00}"/>
+                <a16:creationId xmlns:a16="http://schemas.microsoft.com/office/drawing/2014/main" id="{F002F391-C6E8-6A66-3FB1-F7F6F1080C8C}"/>
               </a:ext>
             </a:extLst>
           </p:cNvPr>
@@ -8455,7 +8695,7 @@
           <p:cNvPr id="15" name="TextBox 14">
             <a:extLst>
               <a:ext uri="{FF2B5EF4-FFF2-40B4-BE49-F238E27FC236}">
-                <a16:creationId xmlns:a16="http://schemas.microsoft.com/office/drawing/2014/main" id="{3A99106D-773C-4465-3C05-552D6B56340E}"/>
+                <a16:creationId xmlns:a16="http://schemas.microsoft.com/office/drawing/2014/main" id="{21EB5F54-E7F9-AE1D-47BF-D8B56D24064A}"/>
               </a:ext>
             </a:extLst>
           </p:cNvPr>
@@ -8495,7 +8735,7 @@
           <p:cNvPr id="16" name="Rectangle: Rounded Corners 15">
             <a:extLst>
               <a:ext uri="{FF2B5EF4-FFF2-40B4-BE49-F238E27FC236}">
-                <a16:creationId xmlns:a16="http://schemas.microsoft.com/office/drawing/2014/main" id="{1911A43B-1410-B681-3FB6-AAF91576D307}"/>
+                <a16:creationId xmlns:a16="http://schemas.microsoft.com/office/drawing/2014/main" id="{B2D54355-760F-7F9E-C127-DD883E3C2034}"/>
               </a:ext>
             </a:extLst>
           </p:cNvPr>
@@ -8553,7 +8793,7 @@
           <p:cNvPr id="17" name="TextBox 16">
             <a:extLst>
               <a:ext uri="{FF2B5EF4-FFF2-40B4-BE49-F238E27FC236}">
-                <a16:creationId xmlns:a16="http://schemas.microsoft.com/office/drawing/2014/main" id="{E61C8D6E-0A9F-B3C1-C234-7DAB5D930D49}"/>
+                <a16:creationId xmlns:a16="http://schemas.microsoft.com/office/drawing/2014/main" id="{FFE378B3-7430-C311-290A-C4AB304938F5}"/>
               </a:ext>
             </a:extLst>
           </p:cNvPr>
@@ -8593,7 +8833,7 @@
           <p:cNvPr id="18" name="TextBox 17">
             <a:extLst>
               <a:ext uri="{FF2B5EF4-FFF2-40B4-BE49-F238E27FC236}">
-                <a16:creationId xmlns:a16="http://schemas.microsoft.com/office/drawing/2014/main" id="{BB001BDF-4EEB-2BAB-7ED7-ACA7DA4BE61E}"/>
+                <a16:creationId xmlns:a16="http://schemas.microsoft.com/office/drawing/2014/main" id="{C8C5C184-00D7-CA0F-2DCB-7A7BA74CAAF8}"/>
               </a:ext>
             </a:extLst>
           </p:cNvPr>
@@ -8633,7 +8873,7 @@
           <p:cNvPr id="19" name="TextBox 18">
             <a:extLst>
               <a:ext uri="{FF2B5EF4-FFF2-40B4-BE49-F238E27FC236}">
-                <a16:creationId xmlns:a16="http://schemas.microsoft.com/office/drawing/2014/main" id="{5AC02727-1AD3-0D85-222D-CA7B8110A50C}"/>
+                <a16:creationId xmlns:a16="http://schemas.microsoft.com/office/drawing/2014/main" id="{6AD790E1-FDB2-4409-32FF-54E8C17B4773}"/>
               </a:ext>
             </a:extLst>
           </p:cNvPr>
@@ -8673,7 +8913,7 @@
           <p:cNvPr id="20" name="Rectangle: Rounded Corners 19">
             <a:extLst>
               <a:ext uri="{FF2B5EF4-FFF2-40B4-BE49-F238E27FC236}">
-                <a16:creationId xmlns:a16="http://schemas.microsoft.com/office/drawing/2014/main" id="{051E9A5A-96EF-39A3-78FF-5F34E1F1BB41}"/>
+                <a16:creationId xmlns:a16="http://schemas.microsoft.com/office/drawing/2014/main" id="{B23F1E06-307C-8B57-D244-50621C80BC98}"/>
               </a:ext>
             </a:extLst>
           </p:cNvPr>
@@ -8733,7 +8973,7 @@
           <p:cNvPr id="21" name="TextBox 20">
             <a:extLst>
               <a:ext uri="{FF2B5EF4-FFF2-40B4-BE49-F238E27FC236}">
-                <a16:creationId xmlns:a16="http://schemas.microsoft.com/office/drawing/2014/main" id="{B231EFD6-E198-5F4E-73F3-AFB31BD23D88}"/>
+                <a16:creationId xmlns:a16="http://schemas.microsoft.com/office/drawing/2014/main" id="{D12A27CC-9A22-9DE3-D2AA-BC9306279BD1}"/>
               </a:ext>
             </a:extLst>
           </p:cNvPr>
@@ -8773,7 +9013,7 @@
           <p:cNvPr id="22" name="TextBox 21">
             <a:extLst>
               <a:ext uri="{FF2B5EF4-FFF2-40B4-BE49-F238E27FC236}">
-                <a16:creationId xmlns:a16="http://schemas.microsoft.com/office/drawing/2014/main" id="{F71D4AEE-7D8D-6BB9-CA6D-F05E96911027}"/>
+                <a16:creationId xmlns:a16="http://schemas.microsoft.com/office/drawing/2014/main" id="{5E0875D3-E3DB-654E-9DAF-2A9A0BC357DF}"/>
               </a:ext>
             </a:extLst>
           </p:cNvPr>
@@ -8813,7 +9053,7 @@
           <p:cNvPr id="23" name="TextBox 22">
             <a:extLst>
               <a:ext uri="{FF2B5EF4-FFF2-40B4-BE49-F238E27FC236}">
-                <a16:creationId xmlns:a16="http://schemas.microsoft.com/office/drawing/2014/main" id="{CA6308BB-0322-BAD6-2730-9649DAC6158F}"/>
+                <a16:creationId xmlns:a16="http://schemas.microsoft.com/office/drawing/2014/main" id="{9F9C892E-D3DD-8822-1E47-DB70F1B2C3FC}"/>
               </a:ext>
             </a:extLst>
           </p:cNvPr>
@@ -8853,7 +9093,7 @@
           <p:cNvPr id="24" name="TextBox 23">
             <a:extLst>
               <a:ext uri="{FF2B5EF4-FFF2-40B4-BE49-F238E27FC236}">
-                <a16:creationId xmlns:a16="http://schemas.microsoft.com/office/drawing/2014/main" id="{97C5CF1A-FF21-D344-AE85-85253FE47760}"/>
+                <a16:creationId xmlns:a16="http://schemas.microsoft.com/office/drawing/2014/main" id="{54411895-AE5D-E89A-9813-821F62338B8E}"/>
               </a:ext>
             </a:extLst>
           </p:cNvPr>
@@ -8892,7 +9132,7 @@
     </p:spTree>
     <p:extLst>
       <p:ext uri="{BB962C8B-B14F-4D97-AF65-F5344CB8AC3E}">
-        <p14:creationId xmlns:p14="http://schemas.microsoft.com/office/powerpoint/2010/main" val="2008964851"/>
+        <p14:creationId xmlns:p14="http://schemas.microsoft.com/office/powerpoint/2010/main" val="1464473697"/>
       </p:ext>
     </p:extLst>
   </p:cSld>
@@ -8924,7 +9164,7 @@
           <p:cNvPr id="2" name="TextBox 1">
             <a:extLst>
               <a:ext uri="{FF2B5EF4-FFF2-40B4-BE49-F238E27FC236}">
-                <a16:creationId xmlns:a16="http://schemas.microsoft.com/office/drawing/2014/main" id="{99D680D4-5D84-0935-4166-8C8B075480A4}"/>
+                <a16:creationId xmlns:a16="http://schemas.microsoft.com/office/drawing/2014/main" id="{6C485A25-AE8A-4302-79FB-85D62AB705A1}"/>
               </a:ext>
             </a:extLst>
           </p:cNvPr>
@@ -8964,7 +9204,7 @@
           <p:cNvPr id="3" name="TextBox 2">
             <a:extLst>
               <a:ext uri="{FF2B5EF4-FFF2-40B4-BE49-F238E27FC236}">
-                <a16:creationId xmlns:a16="http://schemas.microsoft.com/office/drawing/2014/main" id="{D91B47C8-84B6-3747-FB61-960BC1A8FF6C}"/>
+                <a16:creationId xmlns:a16="http://schemas.microsoft.com/office/drawing/2014/main" id="{81DECB7E-7105-1B9A-636F-FF231A16E6F4}"/>
               </a:ext>
             </a:extLst>
           </p:cNvPr>
@@ -9004,7 +9244,7 @@
           <p:cNvPr id="4" name="TextBox 3">
             <a:extLst>
               <a:ext uri="{FF2B5EF4-FFF2-40B4-BE49-F238E27FC236}">
-                <a16:creationId xmlns:a16="http://schemas.microsoft.com/office/drawing/2014/main" id="{AF5443F2-7A5E-FEB7-A8B1-84E58526D963}"/>
+                <a16:creationId xmlns:a16="http://schemas.microsoft.com/office/drawing/2014/main" id="{6A44856F-D222-5AD5-947A-63925525642A}"/>
               </a:ext>
             </a:extLst>
           </p:cNvPr>
@@ -9044,7 +9284,7 @@
           <p:cNvPr id="5" name="Rectangle: Rounded Corners 4">
             <a:extLst>
               <a:ext uri="{FF2B5EF4-FFF2-40B4-BE49-F238E27FC236}">
-                <a16:creationId xmlns:a16="http://schemas.microsoft.com/office/drawing/2014/main" id="{12608694-CA88-6031-234B-59F016EA7130}"/>
+                <a16:creationId xmlns:a16="http://schemas.microsoft.com/office/drawing/2014/main" id="{27051B60-13B4-80FC-7C83-19D44C77A478}"/>
               </a:ext>
             </a:extLst>
           </p:cNvPr>
@@ -9104,7 +9344,7 @@
           <p:cNvPr id="6" name="Rectangle: Rounded Corners 5">
             <a:extLst>
               <a:ext uri="{FF2B5EF4-FFF2-40B4-BE49-F238E27FC236}">
-                <a16:creationId xmlns:a16="http://schemas.microsoft.com/office/drawing/2014/main" id="{383C8299-E8A3-B173-FBA0-F60C5648D7C2}"/>
+                <a16:creationId xmlns:a16="http://schemas.microsoft.com/office/drawing/2014/main" id="{B016B6DE-E725-8985-B35D-005809F69E37}"/>
               </a:ext>
             </a:extLst>
           </p:cNvPr>
@@ -9164,7 +9404,7 @@
           <p:cNvPr id="7" name="TextBox 6">
             <a:extLst>
               <a:ext uri="{FF2B5EF4-FFF2-40B4-BE49-F238E27FC236}">
-                <a16:creationId xmlns:a16="http://schemas.microsoft.com/office/drawing/2014/main" id="{E87BDE33-202C-0887-1A6A-AFD71D7993D8}"/>
+                <a16:creationId xmlns:a16="http://schemas.microsoft.com/office/drawing/2014/main" id="{68871C16-DCDF-86BF-7492-0B0B10FC9A45}"/>
               </a:ext>
             </a:extLst>
           </p:cNvPr>
@@ -9204,7 +9444,7 @@
           <p:cNvPr id="8" name="TextBox 7">
             <a:extLst>
               <a:ext uri="{FF2B5EF4-FFF2-40B4-BE49-F238E27FC236}">
-                <a16:creationId xmlns:a16="http://schemas.microsoft.com/office/drawing/2014/main" id="{585566AE-ADEB-2EF7-66AA-6A89268EE829}"/>
+                <a16:creationId xmlns:a16="http://schemas.microsoft.com/office/drawing/2014/main" id="{4FA41DB4-2C62-BF03-550B-95EA1F37B341}"/>
               </a:ext>
             </a:extLst>
           </p:cNvPr>
@@ -9245,7 +9485,7 @@
           <p:cNvPr id="9" name="Rectangle: Rounded Corners 8">
             <a:extLst>
               <a:ext uri="{FF2B5EF4-FFF2-40B4-BE49-F238E27FC236}">
-                <a16:creationId xmlns:a16="http://schemas.microsoft.com/office/drawing/2014/main" id="{D0AA2841-BA67-DE62-513B-5AD7855E16AF}"/>
+                <a16:creationId xmlns:a16="http://schemas.microsoft.com/office/drawing/2014/main" id="{B6039DBD-30B4-0D84-CC16-65A45B8F2BC1}"/>
               </a:ext>
             </a:extLst>
           </p:cNvPr>
@@ -9305,7 +9545,7 @@
           <p:cNvPr id="10" name="Rectangle: Rounded Corners 9">
             <a:extLst>
               <a:ext uri="{FF2B5EF4-FFF2-40B4-BE49-F238E27FC236}">
-                <a16:creationId xmlns:a16="http://schemas.microsoft.com/office/drawing/2014/main" id="{FE86764C-DDAE-9504-4514-63397CA29881}"/>
+                <a16:creationId xmlns:a16="http://schemas.microsoft.com/office/drawing/2014/main" id="{82EB0857-067F-71E6-6267-1F01BB06A82D}"/>
               </a:ext>
             </a:extLst>
           </p:cNvPr>
@@ -9365,7 +9605,7 @@
           <p:cNvPr id="11" name="TextBox 10">
             <a:extLst>
               <a:ext uri="{FF2B5EF4-FFF2-40B4-BE49-F238E27FC236}">
-                <a16:creationId xmlns:a16="http://schemas.microsoft.com/office/drawing/2014/main" id="{CD2E59D2-54E3-1BC3-ACD1-CA4FDC4D10D7}"/>
+                <a16:creationId xmlns:a16="http://schemas.microsoft.com/office/drawing/2014/main" id="{A0D2E663-95CA-2C39-F3D0-7EC022154120}"/>
               </a:ext>
             </a:extLst>
           </p:cNvPr>
@@ -9405,7 +9645,7 @@
           <p:cNvPr id="12" name="TextBox 11">
             <a:extLst>
               <a:ext uri="{FF2B5EF4-FFF2-40B4-BE49-F238E27FC236}">
-                <a16:creationId xmlns:a16="http://schemas.microsoft.com/office/drawing/2014/main" id="{0BFC08CD-7412-143D-DC18-C9F2A932B79A}"/>
+                <a16:creationId xmlns:a16="http://schemas.microsoft.com/office/drawing/2014/main" id="{B2684D0F-F47B-00B2-7D4E-682599BEBAD1}"/>
               </a:ext>
             </a:extLst>
           </p:cNvPr>
@@ -9446,7 +9686,7 @@
           <p:cNvPr id="13" name="Rectangle: Rounded Corners 12">
             <a:extLst>
               <a:ext uri="{FF2B5EF4-FFF2-40B4-BE49-F238E27FC236}">
-                <a16:creationId xmlns:a16="http://schemas.microsoft.com/office/drawing/2014/main" id="{6BA90766-971C-E0E5-D25E-D82411899AB6}"/>
+                <a16:creationId xmlns:a16="http://schemas.microsoft.com/office/drawing/2014/main" id="{77FB932F-A7C8-1AE8-8312-1DA3F23AEA72}"/>
               </a:ext>
             </a:extLst>
           </p:cNvPr>
@@ -9504,7 +9744,7 @@
           <p:cNvPr id="14" name="Rectangle 13">
             <a:extLst>
               <a:ext uri="{FF2B5EF4-FFF2-40B4-BE49-F238E27FC236}">
-                <a16:creationId xmlns:a16="http://schemas.microsoft.com/office/drawing/2014/main" id="{55FB3282-1928-59D4-EFA0-0BEE0326FABB}"/>
+                <a16:creationId xmlns:a16="http://schemas.microsoft.com/office/drawing/2014/main" id="{F74842B5-6FFE-2FE4-C548-5A3210E00DAC}"/>
               </a:ext>
             </a:extLst>
           </p:cNvPr>
@@ -9564,7 +9804,7 @@
           <p:cNvPr id="15" name="TextBox 14">
             <a:extLst>
               <a:ext uri="{FF2B5EF4-FFF2-40B4-BE49-F238E27FC236}">
-                <a16:creationId xmlns:a16="http://schemas.microsoft.com/office/drawing/2014/main" id="{665E4198-43C7-8900-74C7-60E784F43E4B}"/>
+                <a16:creationId xmlns:a16="http://schemas.microsoft.com/office/drawing/2014/main" id="{301AAE4E-4F99-CEB5-D150-E310D0BF5A82}"/>
               </a:ext>
             </a:extLst>
           </p:cNvPr>
@@ -9604,7 +9844,7 @@
           <p:cNvPr id="16" name="TextBox 15">
             <a:extLst>
               <a:ext uri="{FF2B5EF4-FFF2-40B4-BE49-F238E27FC236}">
-                <a16:creationId xmlns:a16="http://schemas.microsoft.com/office/drawing/2014/main" id="{FD259D8F-41C7-49BD-FFB0-D9AEF46F23A1}"/>
+                <a16:creationId xmlns:a16="http://schemas.microsoft.com/office/drawing/2014/main" id="{4B2B0E86-4954-AA96-6239-0EB8C96D764E}"/>
               </a:ext>
             </a:extLst>
           </p:cNvPr>
@@ -9644,7 +9884,7 @@
           <p:cNvPr id="17" name="Rectangle: Rounded Corners 16">
             <a:extLst>
               <a:ext uri="{FF2B5EF4-FFF2-40B4-BE49-F238E27FC236}">
-                <a16:creationId xmlns:a16="http://schemas.microsoft.com/office/drawing/2014/main" id="{FEA1E1F1-B0F3-26FB-14EE-54B02C701425}"/>
+                <a16:creationId xmlns:a16="http://schemas.microsoft.com/office/drawing/2014/main" id="{0CA1D01E-DE67-A403-F8C2-2FA0A93E8F5F}"/>
               </a:ext>
             </a:extLst>
           </p:cNvPr>
@@ -9702,7 +9942,7 @@
           <p:cNvPr id="18" name="Rectangle 17">
             <a:extLst>
               <a:ext uri="{FF2B5EF4-FFF2-40B4-BE49-F238E27FC236}">
-                <a16:creationId xmlns:a16="http://schemas.microsoft.com/office/drawing/2014/main" id="{4E21C22B-6E2C-071E-8BAD-1AEFAE72A9C5}"/>
+                <a16:creationId xmlns:a16="http://schemas.microsoft.com/office/drawing/2014/main" id="{35127323-F2BB-EB46-1622-AD8643BA5591}"/>
               </a:ext>
             </a:extLst>
           </p:cNvPr>
@@ -9762,7 +10002,7 @@
           <p:cNvPr id="19" name="TextBox 18">
             <a:extLst>
               <a:ext uri="{FF2B5EF4-FFF2-40B4-BE49-F238E27FC236}">
-                <a16:creationId xmlns:a16="http://schemas.microsoft.com/office/drawing/2014/main" id="{3F64291E-5B7A-A4DA-CD4F-8839630BF4B7}"/>
+                <a16:creationId xmlns:a16="http://schemas.microsoft.com/office/drawing/2014/main" id="{183D05B5-0D40-824B-DF05-069F8EADE14A}"/>
               </a:ext>
             </a:extLst>
           </p:cNvPr>
@@ -9802,7 +10042,7 @@
           <p:cNvPr id="20" name="TextBox 19">
             <a:extLst>
               <a:ext uri="{FF2B5EF4-FFF2-40B4-BE49-F238E27FC236}">
-                <a16:creationId xmlns:a16="http://schemas.microsoft.com/office/drawing/2014/main" id="{CD58BB31-04B6-72E3-54D1-D4D51F5BC8F8}"/>
+                <a16:creationId xmlns:a16="http://schemas.microsoft.com/office/drawing/2014/main" id="{746DA808-0689-5FB3-636F-CC563F430659}"/>
               </a:ext>
             </a:extLst>
           </p:cNvPr>
@@ -9842,7 +10082,7 @@
           <p:cNvPr id="21" name="TextBox 20">
             <a:extLst>
               <a:ext uri="{FF2B5EF4-FFF2-40B4-BE49-F238E27FC236}">
-                <a16:creationId xmlns:a16="http://schemas.microsoft.com/office/drawing/2014/main" id="{EE5C7D7B-2E70-3033-9F90-948F4D699FDF}"/>
+                <a16:creationId xmlns:a16="http://schemas.microsoft.com/office/drawing/2014/main" id="{9E19D07C-4A59-2535-93B5-E0F496C3B5B9}"/>
               </a:ext>
             </a:extLst>
           </p:cNvPr>
@@ -9882,7 +10122,7 @@
           <p:cNvPr id="22" name="TextBox 21">
             <a:extLst>
               <a:ext uri="{FF2B5EF4-FFF2-40B4-BE49-F238E27FC236}">
-                <a16:creationId xmlns:a16="http://schemas.microsoft.com/office/drawing/2014/main" id="{26787380-111E-C980-1F0A-A520126B907C}"/>
+                <a16:creationId xmlns:a16="http://schemas.microsoft.com/office/drawing/2014/main" id="{CAE20527-C986-FDC1-2617-662CEA33709F}"/>
               </a:ext>
             </a:extLst>
           </p:cNvPr>
@@ -9921,7 +10161,7 @@
     </p:spTree>
     <p:extLst>
       <p:ext uri="{BB962C8B-B14F-4D97-AF65-F5344CB8AC3E}">
-        <p14:creationId xmlns:p14="http://schemas.microsoft.com/office/powerpoint/2010/main" val="4282769333"/>
+        <p14:creationId xmlns:p14="http://schemas.microsoft.com/office/powerpoint/2010/main" val="1285798742"/>
       </p:ext>
     </p:extLst>
   </p:cSld>
@@ -9953,7 +10193,7 @@
           <p:cNvPr id="2" name="TextBox 1">
             <a:extLst>
               <a:ext uri="{FF2B5EF4-FFF2-40B4-BE49-F238E27FC236}">
-                <a16:creationId xmlns:a16="http://schemas.microsoft.com/office/drawing/2014/main" id="{293415E6-B7BC-8320-03C1-FE29A724A82D}"/>
+                <a16:creationId xmlns:a16="http://schemas.microsoft.com/office/drawing/2014/main" id="{025CBB22-F964-5406-A465-68834EF7E849}"/>
               </a:ext>
             </a:extLst>
           </p:cNvPr>
@@ -9993,7 +10233,7 @@
           <p:cNvPr id="3" name="TextBox 2">
             <a:extLst>
               <a:ext uri="{FF2B5EF4-FFF2-40B4-BE49-F238E27FC236}">
-                <a16:creationId xmlns:a16="http://schemas.microsoft.com/office/drawing/2014/main" id="{85D4FDBF-231B-5DFC-C936-C677E6E42A87}"/>
+                <a16:creationId xmlns:a16="http://schemas.microsoft.com/office/drawing/2014/main" id="{C477F4B7-F795-C285-4B3F-AB1E9512A2BF}"/>
               </a:ext>
             </a:extLst>
           </p:cNvPr>
@@ -10033,7 +10273,7 @@
           <p:cNvPr id="4" name="Oval 3">
             <a:extLst>
               <a:ext uri="{FF2B5EF4-FFF2-40B4-BE49-F238E27FC236}">
-                <a16:creationId xmlns:a16="http://schemas.microsoft.com/office/drawing/2014/main" id="{5A51A268-6B66-C05A-415B-73282CE256FD}"/>
+                <a16:creationId xmlns:a16="http://schemas.microsoft.com/office/drawing/2014/main" id="{49DBAB4B-F75A-9121-F106-B702108A8C2B}"/>
               </a:ext>
             </a:extLst>
           </p:cNvPr>
@@ -10094,7 +10334,7 @@
           <p:cNvPr id="5" name="TextBox 4">
             <a:extLst>
               <a:ext uri="{FF2B5EF4-FFF2-40B4-BE49-F238E27FC236}">
-                <a16:creationId xmlns:a16="http://schemas.microsoft.com/office/drawing/2014/main" id="{AF1DE8BB-C7E2-BB93-ED69-E232C7E2634D}"/>
+                <a16:creationId xmlns:a16="http://schemas.microsoft.com/office/drawing/2014/main" id="{38AF63B9-7076-F9E5-2623-77549852E5B7}"/>
               </a:ext>
             </a:extLst>
           </p:cNvPr>
@@ -10135,7 +10375,7 @@
           <p:cNvPr id="6" name="TextBox 5">
             <a:extLst>
               <a:ext uri="{FF2B5EF4-FFF2-40B4-BE49-F238E27FC236}">
-                <a16:creationId xmlns:a16="http://schemas.microsoft.com/office/drawing/2014/main" id="{E1F1A188-AA0A-8092-7725-274585B44679}"/>
+                <a16:creationId xmlns:a16="http://schemas.microsoft.com/office/drawing/2014/main" id="{406BFFF5-C563-51B2-8E23-436F1F198CD3}"/>
               </a:ext>
             </a:extLst>
           </p:cNvPr>
@@ -10175,7 +10415,7 @@
           <p:cNvPr id="7" name="TextBox 6">
             <a:extLst>
               <a:ext uri="{FF2B5EF4-FFF2-40B4-BE49-F238E27FC236}">
-                <a16:creationId xmlns:a16="http://schemas.microsoft.com/office/drawing/2014/main" id="{03B1C05B-14FF-F957-DC6B-4BF40A7515A8}"/>
+                <a16:creationId xmlns:a16="http://schemas.microsoft.com/office/drawing/2014/main" id="{8D017FF8-9136-82F6-F506-F3FD1B0FEB09}"/>
               </a:ext>
             </a:extLst>
           </p:cNvPr>
@@ -10215,7 +10455,7 @@
           <p:cNvPr id="8" name="Straight Connector 7">
             <a:extLst>
               <a:ext uri="{FF2B5EF4-FFF2-40B4-BE49-F238E27FC236}">
-                <a16:creationId xmlns:a16="http://schemas.microsoft.com/office/drawing/2014/main" id="{767F428B-75E3-296D-F325-82F5E723AD74}"/>
+                <a16:creationId xmlns:a16="http://schemas.microsoft.com/office/drawing/2014/main" id="{3671E3A8-0237-A87F-AF76-DADE60F4DC0D}"/>
               </a:ext>
             </a:extLst>
           </p:cNvPr>
@@ -10256,7 +10496,7 @@
           <p:cNvPr id="9" name="Oval 8">
             <a:extLst>
               <a:ext uri="{FF2B5EF4-FFF2-40B4-BE49-F238E27FC236}">
-                <a16:creationId xmlns:a16="http://schemas.microsoft.com/office/drawing/2014/main" id="{E7216A1F-0C46-DA27-3157-D05A4B6BA712}"/>
+                <a16:creationId xmlns:a16="http://schemas.microsoft.com/office/drawing/2014/main" id="{D9ADD919-0D74-703C-F53F-673A4E4546D7}"/>
               </a:ext>
             </a:extLst>
           </p:cNvPr>
@@ -10317,7 +10557,7 @@
           <p:cNvPr id="10" name="TextBox 9">
             <a:extLst>
               <a:ext uri="{FF2B5EF4-FFF2-40B4-BE49-F238E27FC236}">
-                <a16:creationId xmlns:a16="http://schemas.microsoft.com/office/drawing/2014/main" id="{54983361-42D3-01A8-8E7E-7F71429FAC7E}"/>
+                <a16:creationId xmlns:a16="http://schemas.microsoft.com/office/drawing/2014/main" id="{D1CBC2D6-E4AE-E455-C366-69888854590A}"/>
               </a:ext>
             </a:extLst>
           </p:cNvPr>
@@ -10358,7 +10598,7 @@
           <p:cNvPr id="11" name="TextBox 10">
             <a:extLst>
               <a:ext uri="{FF2B5EF4-FFF2-40B4-BE49-F238E27FC236}">
-                <a16:creationId xmlns:a16="http://schemas.microsoft.com/office/drawing/2014/main" id="{50B2C49B-8E56-D736-28AA-6082FEEEE765}"/>
+                <a16:creationId xmlns:a16="http://schemas.microsoft.com/office/drawing/2014/main" id="{E6E2EFD4-2E41-1451-40BB-D357784966CE}"/>
               </a:ext>
             </a:extLst>
           </p:cNvPr>
@@ -10398,7 +10638,7 @@
           <p:cNvPr id="12" name="TextBox 11">
             <a:extLst>
               <a:ext uri="{FF2B5EF4-FFF2-40B4-BE49-F238E27FC236}">
-                <a16:creationId xmlns:a16="http://schemas.microsoft.com/office/drawing/2014/main" id="{8F55A30B-DD54-213F-6CC8-9C4465B2075A}"/>
+                <a16:creationId xmlns:a16="http://schemas.microsoft.com/office/drawing/2014/main" id="{E612A890-A398-1664-A817-68191E341633}"/>
               </a:ext>
             </a:extLst>
           </p:cNvPr>
@@ -10438,7 +10678,7 @@
           <p:cNvPr id="13" name="Straight Connector 12">
             <a:extLst>
               <a:ext uri="{FF2B5EF4-FFF2-40B4-BE49-F238E27FC236}">
-                <a16:creationId xmlns:a16="http://schemas.microsoft.com/office/drawing/2014/main" id="{5403574D-8A67-799D-ABA4-5BDDD14A56A3}"/>
+                <a16:creationId xmlns:a16="http://schemas.microsoft.com/office/drawing/2014/main" id="{1B4B1BE6-978E-82FA-A246-3FF4FA7E975C}"/>
               </a:ext>
             </a:extLst>
           </p:cNvPr>
@@ -10479,7 +10719,7 @@
           <p:cNvPr id="14" name="Oval 13">
             <a:extLst>
               <a:ext uri="{FF2B5EF4-FFF2-40B4-BE49-F238E27FC236}">
-                <a16:creationId xmlns:a16="http://schemas.microsoft.com/office/drawing/2014/main" id="{8BD1DF0B-3F47-BB7D-93AD-466FADE3FADC}"/>
+                <a16:creationId xmlns:a16="http://schemas.microsoft.com/office/drawing/2014/main" id="{226CA27C-AEBF-F7C5-D301-F8953CB84219}"/>
               </a:ext>
             </a:extLst>
           </p:cNvPr>
@@ -10540,7 +10780,7 @@
           <p:cNvPr id="15" name="TextBox 14">
             <a:extLst>
               <a:ext uri="{FF2B5EF4-FFF2-40B4-BE49-F238E27FC236}">
-                <a16:creationId xmlns:a16="http://schemas.microsoft.com/office/drawing/2014/main" id="{0B9DE542-1F5C-B458-8782-5F91AB6E922C}"/>
+                <a16:creationId xmlns:a16="http://schemas.microsoft.com/office/drawing/2014/main" id="{E3E1E47D-45C6-C168-D726-EDAC4BF4E93B}"/>
               </a:ext>
             </a:extLst>
           </p:cNvPr>
@@ -10581,7 +10821,7 @@
           <p:cNvPr id="16" name="TextBox 15">
             <a:extLst>
               <a:ext uri="{FF2B5EF4-FFF2-40B4-BE49-F238E27FC236}">
-                <a16:creationId xmlns:a16="http://schemas.microsoft.com/office/drawing/2014/main" id="{92E576F8-5E4B-8DA1-4FAF-27145E915F7A}"/>
+                <a16:creationId xmlns:a16="http://schemas.microsoft.com/office/drawing/2014/main" id="{C1507523-2A4F-C7D2-393B-DFCE9ED8F4CE}"/>
               </a:ext>
             </a:extLst>
           </p:cNvPr>
@@ -10621,7 +10861,7 @@
           <p:cNvPr id="17" name="TextBox 16">
             <a:extLst>
               <a:ext uri="{FF2B5EF4-FFF2-40B4-BE49-F238E27FC236}">
-                <a16:creationId xmlns:a16="http://schemas.microsoft.com/office/drawing/2014/main" id="{5CA0BB40-02BE-5F02-2643-5ADCAC2678B6}"/>
+                <a16:creationId xmlns:a16="http://schemas.microsoft.com/office/drawing/2014/main" id="{1BAFD9CC-A062-AC49-1509-00C20B696836}"/>
               </a:ext>
             </a:extLst>
           </p:cNvPr>
@@ -10661,7 +10901,7 @@
           <p:cNvPr id="18" name="Straight Connector 17">
             <a:extLst>
               <a:ext uri="{FF2B5EF4-FFF2-40B4-BE49-F238E27FC236}">
-                <a16:creationId xmlns:a16="http://schemas.microsoft.com/office/drawing/2014/main" id="{AD1A0100-8D59-48F5-2ECC-85798F338DCD}"/>
+                <a16:creationId xmlns:a16="http://schemas.microsoft.com/office/drawing/2014/main" id="{8BCB3DA7-E588-3980-1FD4-C5282C3EA2DE}"/>
               </a:ext>
             </a:extLst>
           </p:cNvPr>
@@ -10702,7 +10942,7 @@
           <p:cNvPr id="19" name="Oval 18">
             <a:extLst>
               <a:ext uri="{FF2B5EF4-FFF2-40B4-BE49-F238E27FC236}">
-                <a16:creationId xmlns:a16="http://schemas.microsoft.com/office/drawing/2014/main" id="{8358014C-ED32-2276-0FE9-670C0E6BEF79}"/>
+                <a16:creationId xmlns:a16="http://schemas.microsoft.com/office/drawing/2014/main" id="{012C198E-55A1-2B10-96E9-477D6A788965}"/>
               </a:ext>
             </a:extLst>
           </p:cNvPr>
@@ -10763,7 +11003,7 @@
           <p:cNvPr id="20" name="TextBox 19">
             <a:extLst>
               <a:ext uri="{FF2B5EF4-FFF2-40B4-BE49-F238E27FC236}">
-                <a16:creationId xmlns:a16="http://schemas.microsoft.com/office/drawing/2014/main" id="{8866E422-900E-D839-17AE-3AD759CC32D8}"/>
+                <a16:creationId xmlns:a16="http://schemas.microsoft.com/office/drawing/2014/main" id="{D2ACE7FE-D60C-56DD-FA6C-D876A05CDEE9}"/>
               </a:ext>
             </a:extLst>
           </p:cNvPr>
@@ -10804,7 +11044,7 @@
           <p:cNvPr id="21" name="TextBox 20">
             <a:extLst>
               <a:ext uri="{FF2B5EF4-FFF2-40B4-BE49-F238E27FC236}">
-                <a16:creationId xmlns:a16="http://schemas.microsoft.com/office/drawing/2014/main" id="{5E2D9F99-BE0B-DDFA-D7A5-FE25137E24A4}"/>
+                <a16:creationId xmlns:a16="http://schemas.microsoft.com/office/drawing/2014/main" id="{B4A14C18-C0BD-EDBD-EA56-AF397EB989AA}"/>
               </a:ext>
             </a:extLst>
           </p:cNvPr>
@@ -10844,7 +11084,7 @@
           <p:cNvPr id="22" name="TextBox 21">
             <a:extLst>
               <a:ext uri="{FF2B5EF4-FFF2-40B4-BE49-F238E27FC236}">
-                <a16:creationId xmlns:a16="http://schemas.microsoft.com/office/drawing/2014/main" id="{FB1C882F-92F4-9EF9-8AB6-9CD75935B685}"/>
+                <a16:creationId xmlns:a16="http://schemas.microsoft.com/office/drawing/2014/main" id="{6445FF49-6C24-45AE-025B-68C3181DA9CA}"/>
               </a:ext>
             </a:extLst>
           </p:cNvPr>
@@ -10884,7 +11124,7 @@
           <p:cNvPr id="23" name="TextBox 22">
             <a:extLst>
               <a:ext uri="{FF2B5EF4-FFF2-40B4-BE49-F238E27FC236}">
-                <a16:creationId xmlns:a16="http://schemas.microsoft.com/office/drawing/2014/main" id="{0353C3E7-C782-69AF-6743-0BE345872D36}"/>
+                <a16:creationId xmlns:a16="http://schemas.microsoft.com/office/drawing/2014/main" id="{4CCC90A7-721C-448D-BF97-CC169F458306}"/>
               </a:ext>
             </a:extLst>
           </p:cNvPr>
@@ -10924,7 +11164,7 @@
           <p:cNvPr id="24" name="TextBox 23">
             <a:extLst>
               <a:ext uri="{FF2B5EF4-FFF2-40B4-BE49-F238E27FC236}">
-                <a16:creationId xmlns:a16="http://schemas.microsoft.com/office/drawing/2014/main" id="{6BE442C4-7D9A-2AF5-B88E-19A806A5B217}"/>
+                <a16:creationId xmlns:a16="http://schemas.microsoft.com/office/drawing/2014/main" id="{6C07A3C7-051F-BBFC-79BA-85BFF2F760B2}"/>
               </a:ext>
             </a:extLst>
           </p:cNvPr>
@@ -10963,7 +11203,7 @@
     </p:spTree>
     <p:extLst>
       <p:ext uri="{BB962C8B-B14F-4D97-AF65-F5344CB8AC3E}">
-        <p14:creationId xmlns:p14="http://schemas.microsoft.com/office/powerpoint/2010/main" val="433494681"/>
+        <p14:creationId xmlns:p14="http://schemas.microsoft.com/office/powerpoint/2010/main" val="1932824270"/>
       </p:ext>
     </p:extLst>
   </p:cSld>
@@ -10995,7 +11235,7 @@
           <p:cNvPr id="2" name="TextBox 1">
             <a:extLst>
               <a:ext uri="{FF2B5EF4-FFF2-40B4-BE49-F238E27FC236}">
-                <a16:creationId xmlns:a16="http://schemas.microsoft.com/office/drawing/2014/main" id="{18397910-A6C1-9557-CC11-BCF513D08390}"/>
+                <a16:creationId xmlns:a16="http://schemas.microsoft.com/office/drawing/2014/main" id="{5FC103EA-5825-C573-A08B-54D58802AF6E}"/>
               </a:ext>
             </a:extLst>
           </p:cNvPr>
@@ -11035,7 +11275,7 @@
           <p:cNvPr id="3" name="TextBox 2">
             <a:extLst>
               <a:ext uri="{FF2B5EF4-FFF2-40B4-BE49-F238E27FC236}">
-                <a16:creationId xmlns:a16="http://schemas.microsoft.com/office/drawing/2014/main" id="{04046680-E94B-D4EE-E55F-426AA8229B8B}"/>
+                <a16:creationId xmlns:a16="http://schemas.microsoft.com/office/drawing/2014/main" id="{9564D5E0-C65F-8517-38E3-E8536E052842}"/>
               </a:ext>
             </a:extLst>
           </p:cNvPr>
@@ -11075,7 +11315,7 @@
           <p:cNvPr id="4" name="Rectangle: Rounded Corners 3">
             <a:extLst>
               <a:ext uri="{FF2B5EF4-FFF2-40B4-BE49-F238E27FC236}">
-                <a16:creationId xmlns:a16="http://schemas.microsoft.com/office/drawing/2014/main" id="{33E28145-E450-8879-C4EE-29B51F098E36}"/>
+                <a16:creationId xmlns:a16="http://schemas.microsoft.com/office/drawing/2014/main" id="{13F77A99-E2A1-7B51-BE75-D61A510671A2}"/>
               </a:ext>
             </a:extLst>
           </p:cNvPr>
@@ -11135,7 +11375,7 @@
           <p:cNvPr id="5" name="TextBox 4">
             <a:extLst>
               <a:ext uri="{FF2B5EF4-FFF2-40B4-BE49-F238E27FC236}">
-                <a16:creationId xmlns:a16="http://schemas.microsoft.com/office/drawing/2014/main" id="{86239780-3C81-E080-9353-2297B0080AE6}"/>
+                <a16:creationId xmlns:a16="http://schemas.microsoft.com/office/drawing/2014/main" id="{920D6033-347A-51E6-A818-A12BE2D3DD34}"/>
               </a:ext>
             </a:extLst>
           </p:cNvPr>
@@ -11175,7 +11415,7 @@
           <p:cNvPr id="6" name="TextBox 5">
             <a:extLst>
               <a:ext uri="{FF2B5EF4-FFF2-40B4-BE49-F238E27FC236}">
-                <a16:creationId xmlns:a16="http://schemas.microsoft.com/office/drawing/2014/main" id="{F897CEE2-6963-C39C-0708-41B1EDBE0D69}"/>
+                <a16:creationId xmlns:a16="http://schemas.microsoft.com/office/drawing/2014/main" id="{BAC6622D-6BE3-BD51-DBFE-02DC02E46609}"/>
               </a:ext>
             </a:extLst>
           </p:cNvPr>
@@ -11215,7 +11455,7 @@
           <p:cNvPr id="7" name="Rectangle: Rounded Corners 6">
             <a:extLst>
               <a:ext uri="{FF2B5EF4-FFF2-40B4-BE49-F238E27FC236}">
-                <a16:creationId xmlns:a16="http://schemas.microsoft.com/office/drawing/2014/main" id="{EE31CB97-4E26-F232-3A8E-4D792856882F}"/>
+                <a16:creationId xmlns:a16="http://schemas.microsoft.com/office/drawing/2014/main" id="{4D59C664-0544-779A-2598-2EA33AE0266C}"/>
               </a:ext>
             </a:extLst>
           </p:cNvPr>
@@ -11275,7 +11515,7 @@
           <p:cNvPr id="8" name="TextBox 7">
             <a:extLst>
               <a:ext uri="{FF2B5EF4-FFF2-40B4-BE49-F238E27FC236}">
-                <a16:creationId xmlns:a16="http://schemas.microsoft.com/office/drawing/2014/main" id="{3952B61E-E6E4-33DE-DAE6-B1961E00A158}"/>
+                <a16:creationId xmlns:a16="http://schemas.microsoft.com/office/drawing/2014/main" id="{1AFC2387-9860-AC4A-34C1-07ADB2889E37}"/>
               </a:ext>
             </a:extLst>
           </p:cNvPr>
@@ -11315,7 +11555,7 @@
           <p:cNvPr id="9" name="TextBox 8">
             <a:extLst>
               <a:ext uri="{FF2B5EF4-FFF2-40B4-BE49-F238E27FC236}">
-                <a16:creationId xmlns:a16="http://schemas.microsoft.com/office/drawing/2014/main" id="{64E7A938-FFB5-AE94-D8B4-B7D018EF9066}"/>
+                <a16:creationId xmlns:a16="http://schemas.microsoft.com/office/drawing/2014/main" id="{90EFC6E7-18B3-CC51-0B44-43146A4B35B0}"/>
               </a:ext>
             </a:extLst>
           </p:cNvPr>
@@ -11355,7 +11595,7 @@
           <p:cNvPr id="10" name="Rectangle: Rounded Corners 9">
             <a:extLst>
               <a:ext uri="{FF2B5EF4-FFF2-40B4-BE49-F238E27FC236}">
-                <a16:creationId xmlns:a16="http://schemas.microsoft.com/office/drawing/2014/main" id="{4FD03D77-E87F-8791-D812-35EBEFB74AC4}"/>
+                <a16:creationId xmlns:a16="http://schemas.microsoft.com/office/drawing/2014/main" id="{7B022BDF-D07F-CED3-1CEF-7D81ADDF6B45}"/>
               </a:ext>
             </a:extLst>
           </p:cNvPr>
@@ -11415,7 +11655,7 @@
           <p:cNvPr id="11" name="TextBox 10">
             <a:extLst>
               <a:ext uri="{FF2B5EF4-FFF2-40B4-BE49-F238E27FC236}">
-                <a16:creationId xmlns:a16="http://schemas.microsoft.com/office/drawing/2014/main" id="{A2E0A134-5C20-ACC5-2D7F-C8EB7F35DD6F}"/>
+                <a16:creationId xmlns:a16="http://schemas.microsoft.com/office/drawing/2014/main" id="{40C3F782-0596-C6C3-E5CB-9CE6906676DA}"/>
               </a:ext>
             </a:extLst>
           </p:cNvPr>
@@ -11455,7 +11695,7 @@
           <p:cNvPr id="12" name="TextBox 11">
             <a:extLst>
               <a:ext uri="{FF2B5EF4-FFF2-40B4-BE49-F238E27FC236}">
-                <a16:creationId xmlns:a16="http://schemas.microsoft.com/office/drawing/2014/main" id="{1C879692-3C51-499C-1265-E84F2D952803}"/>
+                <a16:creationId xmlns:a16="http://schemas.microsoft.com/office/drawing/2014/main" id="{77B25829-8683-ACAB-0655-F532232A022D}"/>
               </a:ext>
             </a:extLst>
           </p:cNvPr>
@@ -11495,7 +11735,7 @@
           <p:cNvPr id="13" name="Rectangle: Rounded Corners 12">
             <a:extLst>
               <a:ext uri="{FF2B5EF4-FFF2-40B4-BE49-F238E27FC236}">
-                <a16:creationId xmlns:a16="http://schemas.microsoft.com/office/drawing/2014/main" id="{52418234-0624-9B14-1620-E31E3CACECA5}"/>
+                <a16:creationId xmlns:a16="http://schemas.microsoft.com/office/drawing/2014/main" id="{2C5F152B-B250-48D6-9913-EB2FA891ED5A}"/>
               </a:ext>
             </a:extLst>
           </p:cNvPr>
@@ -11555,7 +11795,7 @@
           <p:cNvPr id="14" name="TextBox 13">
             <a:extLst>
               <a:ext uri="{FF2B5EF4-FFF2-40B4-BE49-F238E27FC236}">
-                <a16:creationId xmlns:a16="http://schemas.microsoft.com/office/drawing/2014/main" id="{55D8CEDC-187C-21F0-2A22-8363D2FAFDDF}"/>
+                <a16:creationId xmlns:a16="http://schemas.microsoft.com/office/drawing/2014/main" id="{4753AACB-1B9C-30F8-EAB9-65C1004A9786}"/>
               </a:ext>
             </a:extLst>
           </p:cNvPr>
@@ -11595,7 +11835,7 @@
           <p:cNvPr id="15" name="TextBox 14">
             <a:extLst>
               <a:ext uri="{FF2B5EF4-FFF2-40B4-BE49-F238E27FC236}">
-                <a16:creationId xmlns:a16="http://schemas.microsoft.com/office/drawing/2014/main" id="{5AF18596-81B2-C1C4-4D61-3DA59934F0D0}"/>
+                <a16:creationId xmlns:a16="http://schemas.microsoft.com/office/drawing/2014/main" id="{B364AA31-C1E2-DBCF-7F4B-2748DDD9472F}"/>
               </a:ext>
             </a:extLst>
           </p:cNvPr>
@@ -11635,7 +11875,7 @@
           <p:cNvPr id="16" name="Rectangle: Rounded Corners 15">
             <a:extLst>
               <a:ext uri="{FF2B5EF4-FFF2-40B4-BE49-F238E27FC236}">
-                <a16:creationId xmlns:a16="http://schemas.microsoft.com/office/drawing/2014/main" id="{CAD3B74D-B5BE-333D-7DF1-96961245A936}"/>
+                <a16:creationId xmlns:a16="http://schemas.microsoft.com/office/drawing/2014/main" id="{500DA2B2-67E8-DFCE-415A-BDC06D1E8227}"/>
               </a:ext>
             </a:extLst>
           </p:cNvPr>
@@ -11695,7 +11935,7 @@
           <p:cNvPr id="17" name="TextBox 16">
             <a:extLst>
               <a:ext uri="{FF2B5EF4-FFF2-40B4-BE49-F238E27FC236}">
-                <a16:creationId xmlns:a16="http://schemas.microsoft.com/office/drawing/2014/main" id="{87E753B9-AD29-86CC-C8F9-2B5C3F5729DA}"/>
+                <a16:creationId xmlns:a16="http://schemas.microsoft.com/office/drawing/2014/main" id="{2C6B4705-22B3-1656-263C-0FD9454E1364}"/>
               </a:ext>
             </a:extLst>
           </p:cNvPr>
@@ -11735,7 +11975,7 @@
           <p:cNvPr id="18" name="TextBox 17">
             <a:extLst>
               <a:ext uri="{FF2B5EF4-FFF2-40B4-BE49-F238E27FC236}">
-                <a16:creationId xmlns:a16="http://schemas.microsoft.com/office/drawing/2014/main" id="{37A399DC-0B0C-295D-1773-F8A38CD21616}"/>
+                <a16:creationId xmlns:a16="http://schemas.microsoft.com/office/drawing/2014/main" id="{1350000A-6640-B303-6D4D-181F33122EDF}"/>
               </a:ext>
             </a:extLst>
           </p:cNvPr>
@@ -11775,7 +12015,7 @@
           <p:cNvPr id="19" name="Rectangle: Rounded Corners 18">
             <a:extLst>
               <a:ext uri="{FF2B5EF4-FFF2-40B4-BE49-F238E27FC236}">
-                <a16:creationId xmlns:a16="http://schemas.microsoft.com/office/drawing/2014/main" id="{BFE46B89-85AB-CA03-B9A2-5D3C83CBE113}"/>
+                <a16:creationId xmlns:a16="http://schemas.microsoft.com/office/drawing/2014/main" id="{1BB7698E-10DF-7C0B-62FD-FF71E0BA0FC0}"/>
               </a:ext>
             </a:extLst>
           </p:cNvPr>
@@ -11835,7 +12075,7 @@
           <p:cNvPr id="20" name="TextBox 19">
             <a:extLst>
               <a:ext uri="{FF2B5EF4-FFF2-40B4-BE49-F238E27FC236}">
-                <a16:creationId xmlns:a16="http://schemas.microsoft.com/office/drawing/2014/main" id="{9CE3986B-1F3D-DB52-90D8-03A21DF0C9DF}"/>
+                <a16:creationId xmlns:a16="http://schemas.microsoft.com/office/drawing/2014/main" id="{55460742-8AD1-C107-FFEF-D0F2882B06B3}"/>
               </a:ext>
             </a:extLst>
           </p:cNvPr>
@@ -11875,7 +12115,7 @@
           <p:cNvPr id="21" name="TextBox 20">
             <a:extLst>
               <a:ext uri="{FF2B5EF4-FFF2-40B4-BE49-F238E27FC236}">
-                <a16:creationId xmlns:a16="http://schemas.microsoft.com/office/drawing/2014/main" id="{EBDE2C47-8751-EA25-A0DB-27282432292A}"/>
+                <a16:creationId xmlns:a16="http://schemas.microsoft.com/office/drawing/2014/main" id="{7F6996AE-903B-E6E9-73BD-AA36907A213C}"/>
               </a:ext>
             </a:extLst>
           </p:cNvPr>
@@ -11915,7 +12155,7 @@
           <p:cNvPr id="22" name="TextBox 21">
             <a:extLst>
               <a:ext uri="{FF2B5EF4-FFF2-40B4-BE49-F238E27FC236}">
-                <a16:creationId xmlns:a16="http://schemas.microsoft.com/office/drawing/2014/main" id="{BD49A33A-C2D1-749E-DC9B-BA71B354B394}"/>
+                <a16:creationId xmlns:a16="http://schemas.microsoft.com/office/drawing/2014/main" id="{1161A3B4-A527-EEBE-979B-F5940138F959}"/>
               </a:ext>
             </a:extLst>
           </p:cNvPr>
@@ -11955,7 +12195,7 @@
           <p:cNvPr id="23" name="TextBox 22">
             <a:extLst>
               <a:ext uri="{FF2B5EF4-FFF2-40B4-BE49-F238E27FC236}">
-                <a16:creationId xmlns:a16="http://schemas.microsoft.com/office/drawing/2014/main" id="{95B2F950-E272-B8BF-D104-39EFA675321C}"/>
+                <a16:creationId xmlns:a16="http://schemas.microsoft.com/office/drawing/2014/main" id="{90CB8B3A-19AB-C5CA-CC42-94E4179500CA}"/>
               </a:ext>
             </a:extLst>
           </p:cNvPr>
@@ -11985,7 +12225,7 @@
                 </a:solidFill>
                 <a:latin typeface="Aptos" panose="020B0004020202020204" pitchFamily="34" charset="0"/>
               </a:rPr>
-              <a:t>Ferris thesis: preserve owner authority; coordinate application intent, evidence, lifecycle, and affected work.</a:t>
+              <a:t>Ferris now demonstrates this layer without replacing Cargo, CI, execution, or owner authority.</a:t>
             </a:r>
           </a:p>
         </p:txBody>
@@ -11995,7 +12235,7 @@
           <p:cNvPr id="24" name="TextBox 23">
             <a:extLst>
               <a:ext uri="{FF2B5EF4-FFF2-40B4-BE49-F238E27FC236}">
-                <a16:creationId xmlns:a16="http://schemas.microsoft.com/office/drawing/2014/main" id="{AD236B53-17E6-47B7-D04F-79411062EB4A}"/>
+                <a16:creationId xmlns:a16="http://schemas.microsoft.com/office/drawing/2014/main" id="{C7A0F748-1627-8B38-9010-A6B4E83F17E5}"/>
               </a:ext>
             </a:extLst>
           </p:cNvPr>
@@ -12034,7 +12274,7 @@
     </p:spTree>
     <p:extLst>
       <p:ext uri="{BB962C8B-B14F-4D97-AF65-F5344CB8AC3E}">
-        <p14:creationId xmlns:p14="http://schemas.microsoft.com/office/powerpoint/2010/main" val="180709810"/>
+        <p14:creationId xmlns:p14="http://schemas.microsoft.com/office/powerpoint/2010/main" val="1008610841"/>
       </p:ext>
     </p:extLst>
   </p:cSld>
@@ -12066,7 +12306,7 @@
           <p:cNvPr id="2" name="TextBox 1">
             <a:extLst>
               <a:ext uri="{FF2B5EF4-FFF2-40B4-BE49-F238E27FC236}">
-                <a16:creationId xmlns:a16="http://schemas.microsoft.com/office/drawing/2014/main" id="{6B0CA298-0077-B78F-B0AB-E54B237DE5FF}"/>
+                <a16:creationId xmlns:a16="http://schemas.microsoft.com/office/drawing/2014/main" id="{E1B44488-ECE4-84F9-F119-CAACAA89A55E}"/>
               </a:ext>
             </a:extLst>
           </p:cNvPr>
@@ -12096,7 +12336,7 @@
                 </a:solidFill>
                 <a:latin typeface="Aptos" panose="020B0004020202020204" pitchFamily="34" charset="0"/>
               </a:rPr>
-              <a:t>THE PROPOSED CONTROL PLANE</a:t>
+              <a:t>PUBLIC PRODUCT PROOF</a:t>
             </a:r>
           </a:p>
         </p:txBody>
@@ -12106,7 +12346,7 @@
           <p:cNvPr id="3" name="TextBox 2">
             <a:extLst>
               <a:ext uri="{FF2B5EF4-FFF2-40B4-BE49-F238E27FC236}">
-                <a16:creationId xmlns:a16="http://schemas.microsoft.com/office/drawing/2014/main" id="{F099CA67-A1DA-DD73-3858-96547AED7F7C}"/>
+                <a16:creationId xmlns:a16="http://schemas.microsoft.com/office/drawing/2014/main" id="{B8A9FE4C-AB13-61B6-3A6E-3977F0FD8456}"/>
               </a:ext>
             </a:extLst>
           </p:cNvPr>
@@ -12136,7 +12376,7 @@
                 </a:solidFill>
                 <a:latin typeface="Aptos Display" panose="020B0004020202020204" pitchFamily="34" charset="0"/>
               </a:rPr>
-              <a:t>Application blueprints turn Rust adoption into a supportable system</a:t>
+              <a:t>Ferris now proves the application layer can stay Cargo-native</a:t>
             </a:r>
           </a:p>
         </p:txBody>
@@ -12146,7 +12386,7 @@
           <p:cNvPr id="4" name="Rectangle: Rounded Corners 3">
             <a:extLst>
               <a:ext uri="{FF2B5EF4-FFF2-40B4-BE49-F238E27FC236}">
-                <a16:creationId xmlns:a16="http://schemas.microsoft.com/office/drawing/2014/main" id="{54D3E64D-4A36-97E8-24EA-4E63AD217D2D}"/>
+                <a16:creationId xmlns:a16="http://schemas.microsoft.com/office/drawing/2014/main" id="{08FC9205-093B-4EF5-277E-1167C37E0E01}"/>
               </a:ext>
             </a:extLst>
           </p:cNvPr>
@@ -12155,14 +12395,14 @@
         </p:nvSpPr>
         <p:spPr>
           <a:xfrm>
-            <a:off x="914400" y="2413000"/>
-            <a:ext cx="1879600" cy="2717800"/>
+            <a:off x="660400" y="1676400"/>
+            <a:ext cx="5207000" cy="1422400"/>
           </a:xfrm>
           <a:prstGeom prst="roundRect">
             <a:avLst/>
           </a:prstGeom>
           <a:solidFill>
-            <a:srgbClr val="E8F1F7"/>
+            <a:srgbClr val="FCFDFF"/>
           </a:solidFill>
           <a:ln w="19050" cap="flat" cmpd="sng" algn="ctr">
             <a:solidFill>
@@ -12201,10 +12441,10 @@
       </p:sp>
       <p:sp>
         <p:nvSpPr>
-          <p:cNvPr id="5" name="Oval 4">
-            <a:extLst>
-              <a:ext uri="{FF2B5EF4-FFF2-40B4-BE49-F238E27FC236}">
-                <a16:creationId xmlns:a16="http://schemas.microsoft.com/office/drawing/2014/main" id="{08DA77E4-5E32-2325-0A60-221388747075}"/>
+          <p:cNvPr id="5" name="Rectangle 4">
+            <a:extLst>
+              <a:ext uri="{FF2B5EF4-FFF2-40B4-BE49-F238E27FC236}">
+                <a16:creationId xmlns:a16="http://schemas.microsoft.com/office/drawing/2014/main" id="{BC0E25AE-97D4-C626-6DA9-00B3E3B388E0}"/>
               </a:ext>
             </a:extLst>
           </p:cNvPr>
@@ -12213,10 +12453,10 @@
         </p:nvSpPr>
         <p:spPr>
           <a:xfrm>
-            <a:off x="1549400" y="2641600"/>
-            <a:ext cx="609600" cy="609600"/>
-          </a:xfrm>
-          <a:prstGeom prst="ellipse">
+            <a:off x="660400" y="1676400"/>
+            <a:ext cx="101600" cy="1422400"/>
+          </a:xfrm>
+          <a:prstGeom prst="rect">
             <a:avLst/>
           </a:prstGeom>
           <a:solidFill>
@@ -12224,10 +12464,9 @@
           </a:solidFill>
           <a:ln w="19050" cap="flat" cmpd="sng" algn="ctr">
             <a:solidFill>
-              <a:schemeClr val="accent1">
-                <a:shade val="15000"/>
+              <a:srgbClr val="CE4A2B">
                 <a:alpha val="0"/>
-              </a:schemeClr>
+              </a:srgbClr>
             </a:solidFill>
             <a:prstDash val="solid"/>
             <a:miter lim="800000"/>
@@ -12265,38 +12504,37 @@
           <p:cNvPr id="6" name="TextBox 5">
             <a:extLst>
               <a:ext uri="{FF2B5EF4-FFF2-40B4-BE49-F238E27FC236}">
-                <a16:creationId xmlns:a16="http://schemas.microsoft.com/office/drawing/2014/main" id="{9DC92BED-BAC7-B149-C44B-3B96100450B3}"/>
-              </a:ext>
-            </a:extLst>
-          </p:cNvPr>
-          <p:cNvSpPr txBox="1"/>
-          <p:nvPr/>
-        </p:nvSpPr>
-        <p:spPr>
-          <a:xfrm>
-            <a:off x="1739900" y="2781300"/>
-            <a:ext cx="228600" cy="276999"/>
-          </a:xfrm>
-          <a:prstGeom prst="rect">
-            <a:avLst/>
-          </a:prstGeom>
-          <a:noFill/>
-        </p:spPr>
-        <p:txBody>
-          <a:bodyPr vert="horz" wrap="square" lIns="0" tIns="0" rIns="0" bIns="0" rtlCol="0">
-            <a:noAutofit/>
-          </a:bodyPr>
-          <a:lstStyle/>
-          <a:p>
-            <a:pPr algn="ctr"/>
-            <a:r>
-              <a:rPr lang="en-US" sz="1400" b="1">
-                <a:solidFill>
-                  <a:srgbClr val="FFFFFF"/>
-                </a:solidFill>
-                <a:latin typeface="Aptos Display" panose="020B0004020202020204" pitchFamily="34" charset="0"/>
-              </a:rPr>
-              <a:t>1</a:t>
+                <a16:creationId xmlns:a16="http://schemas.microsoft.com/office/drawing/2014/main" id="{0609C71D-B5F0-92C6-63CF-164D68F22FCF}"/>
+              </a:ext>
+            </a:extLst>
+          </p:cNvPr>
+          <p:cNvSpPr txBox="1"/>
+          <p:nvPr/>
+        </p:nvSpPr>
+        <p:spPr>
+          <a:xfrm>
+            <a:off x="939800" y="1879600"/>
+            <a:ext cx="4724400" cy="276999"/>
+          </a:xfrm>
+          <a:prstGeom prst="rect">
+            <a:avLst/>
+          </a:prstGeom>
+          <a:noFill/>
+        </p:spPr>
+        <p:txBody>
+          <a:bodyPr vert="horz" wrap="square" lIns="0" tIns="0" rIns="0" bIns="0" rtlCol="0">
+            <a:noAutofit/>
+          </a:bodyPr>
+          <a:lstStyle/>
+          <a:p>
+            <a:r>
+              <a:rPr lang="en-US" sz="1600" b="1">
+                <a:solidFill>
+                  <a:srgbClr val="1F2329"/>
+                </a:solidFill>
+                <a:latin typeface="Aptos" panose="020B0004020202020204" pitchFamily="34" charset="0"/>
+              </a:rPr>
+              <a:t>CARGO DISCOVERY</a:t>
             </a:r>
           </a:p>
         </p:txBody>
@@ -12306,89 +12544,47 @@
           <p:cNvPr id="7" name="TextBox 6">
             <a:extLst>
               <a:ext uri="{FF2B5EF4-FFF2-40B4-BE49-F238E27FC236}">
-                <a16:creationId xmlns:a16="http://schemas.microsoft.com/office/drawing/2014/main" id="{879A41CE-0914-A23D-E6D8-B60E2033084A}"/>
-              </a:ext>
-            </a:extLst>
-          </p:cNvPr>
-          <p:cNvSpPr txBox="1"/>
-          <p:nvPr/>
-        </p:nvSpPr>
-        <p:spPr>
-          <a:xfrm>
-            <a:off x="1092200" y="3454400"/>
-            <a:ext cx="1524000" cy="276999"/>
-          </a:xfrm>
-          <a:prstGeom prst="rect">
-            <a:avLst/>
-          </a:prstGeom>
-          <a:noFill/>
-        </p:spPr>
-        <p:txBody>
-          <a:bodyPr vert="horz" wrap="square" lIns="0" tIns="0" rIns="0" bIns="0" rtlCol="0">
-            <a:noAutofit/>
-          </a:bodyPr>
-          <a:lstStyle/>
-          <a:p>
-            <a:pPr algn="ctr"/>
-            <a:r>
-              <a:rPr lang="en-US" sz="1500" b="1">
-                <a:solidFill>
-                  <a:srgbClr val="1F2329"/>
-                </a:solidFill>
-                <a:latin typeface="Aptos Display" panose="020B0004020202020204" pitchFamily="34" charset="0"/>
-              </a:rPr>
-              <a:t>Application intent</a:t>
-            </a:r>
-          </a:p>
-        </p:txBody>
-      </p:sp>
-      <p:sp>
-        <p:nvSpPr>
-          <p:cNvPr id="8" name="TextBox 7">
-            <a:extLst>
-              <a:ext uri="{FF2B5EF4-FFF2-40B4-BE49-F238E27FC236}">
-                <a16:creationId xmlns:a16="http://schemas.microsoft.com/office/drawing/2014/main" id="{7D4DACCF-E248-BC15-7624-56421A06A917}"/>
-              </a:ext>
-            </a:extLst>
-          </p:cNvPr>
-          <p:cNvSpPr txBox="1"/>
-          <p:nvPr/>
-        </p:nvSpPr>
-        <p:spPr>
-          <a:xfrm>
-            <a:off x="1117600" y="4127500"/>
-            <a:ext cx="1473200" cy="276999"/>
-          </a:xfrm>
-          <a:prstGeom prst="rect">
-            <a:avLst/>
-          </a:prstGeom>
-          <a:noFill/>
-        </p:spPr>
-        <p:txBody>
-          <a:bodyPr vert="horz" wrap="square" lIns="0" tIns="0" rIns="0" bIns="0" rtlCol="0">
-            <a:noAutofit/>
-          </a:bodyPr>
-          <a:lstStyle/>
-          <a:p>
-            <a:pPr algn="ctr"/>
-            <a:r>
-              <a:rPr lang="en-US" sz="1050">
+                <a16:creationId xmlns:a16="http://schemas.microsoft.com/office/drawing/2014/main" id="{0BB8ACBE-97D0-0823-F318-E65C12EC16FC}"/>
+              </a:ext>
+            </a:extLst>
+          </p:cNvPr>
+          <p:cNvSpPr txBox="1"/>
+          <p:nvPr/>
+        </p:nvSpPr>
+        <p:spPr>
+          <a:xfrm>
+            <a:off x="939800" y="2336800"/>
+            <a:ext cx="4724400" cy="276999"/>
+          </a:xfrm>
+          <a:prstGeom prst="rect">
+            <a:avLst/>
+          </a:prstGeom>
+          <a:noFill/>
+        </p:spPr>
+        <p:txBody>
+          <a:bodyPr vert="horz" wrap="square" lIns="0" tIns="0" rIns="0" bIns="0" rtlCol="0">
+            <a:noAutofit/>
+          </a:bodyPr>
+          <a:lstStyle/>
+          <a:p>
+            <a:r>
+              <a:rPr lang="en-US" sz="1150">
                 <a:solidFill>
                   <a:srgbClr val="646C77"/>
                 </a:solidFill>
                 <a:latin typeface="Aptos" panose="020B0004020202020204" pitchFamily="34" charset="0"/>
               </a:rPr>
-              <a:t>components | services | owners | policy</a:t>
-            </a:r>
-          </a:p>
-        </p:txBody>
-      </p:sp>
-      <p:sp>
-        <p:nvSpPr>
-          <p:cNvPr id="9" name="Rectangle: Rounded Corners 8">
-            <a:extLst>
-              <a:ext uri="{FF2B5EF4-FFF2-40B4-BE49-F238E27FC236}">
-                <a16:creationId xmlns:a16="http://schemas.microsoft.com/office/drawing/2014/main" id="{943BA18A-0782-7F3E-3806-BCA00F914321}"/>
+              <a:t>cargo ferris locates the current workspace through Cargo itself.</a:t>
+            </a:r>
+          </a:p>
+        </p:txBody>
+      </p:sp>
+      <p:sp>
+        <p:nvSpPr>
+          <p:cNvPr id="8" name="Rectangle: Rounded Corners 7">
+            <a:extLst>
+              <a:ext uri="{FF2B5EF4-FFF2-40B4-BE49-F238E27FC236}">
+                <a16:creationId xmlns:a16="http://schemas.microsoft.com/office/drawing/2014/main" id="{7B4DD7FC-B8A8-AE47-F715-A1D6C7B6C573}"/>
               </a:ext>
             </a:extLst>
           </p:cNvPr>
@@ -12397,14 +12593,14 @@
         </p:nvSpPr>
         <p:spPr>
           <a:xfrm>
-            <a:off x="3048000" y="2184400"/>
-            <a:ext cx="1879600" cy="2717800"/>
+            <a:off x="6223000" y="1676400"/>
+            <a:ext cx="5207000" cy="1422400"/>
           </a:xfrm>
           <a:prstGeom prst="roundRect">
             <a:avLst/>
           </a:prstGeom>
           <a:solidFill>
-            <a:srgbClr val="E8F1F7"/>
+            <a:srgbClr val="FCFDFF"/>
           </a:solidFill>
           <a:ln w="19050" cap="flat" cmpd="sng" algn="ctr">
             <a:solidFill>
@@ -12443,10 +12639,10 @@
       </p:sp>
       <p:sp>
         <p:nvSpPr>
-          <p:cNvPr id="10" name="Oval 9">
-            <a:extLst>
-              <a:ext uri="{FF2B5EF4-FFF2-40B4-BE49-F238E27FC236}">
-                <a16:creationId xmlns:a16="http://schemas.microsoft.com/office/drawing/2014/main" id="{3CA07068-4ECC-7A65-0AAA-9E28126F0382}"/>
+          <p:cNvPr id="9" name="Rectangle 8">
+            <a:extLst>
+              <a:ext uri="{FF2B5EF4-FFF2-40B4-BE49-F238E27FC236}">
+                <a16:creationId xmlns:a16="http://schemas.microsoft.com/office/drawing/2014/main" id="{E4632837-421D-86F5-B26B-B10509A08359}"/>
               </a:ext>
             </a:extLst>
           </p:cNvPr>
@@ -12455,10 +12651,10 @@
         </p:nvSpPr>
         <p:spPr>
           <a:xfrm>
-            <a:off x="3683000" y="2413000"/>
-            <a:ext cx="609600" cy="609600"/>
-          </a:xfrm>
-          <a:prstGeom prst="ellipse">
+            <a:off x="6223000" y="1676400"/>
+            <a:ext cx="101600" cy="1422400"/>
+          </a:xfrm>
+          <a:prstGeom prst="rect">
             <a:avLst/>
           </a:prstGeom>
           <a:solidFill>
@@ -12466,10 +12662,9 @@
           </a:solidFill>
           <a:ln w="19050" cap="flat" cmpd="sng" algn="ctr">
             <a:solidFill>
-              <a:schemeClr val="accent1">
-                <a:shade val="15000"/>
+              <a:srgbClr val="CE4A2B">
                 <a:alpha val="0"/>
-              </a:schemeClr>
+              </a:srgbClr>
             </a:solidFill>
             <a:prstDash val="solid"/>
             <a:miter lim="800000"/>
@@ -12504,133 +12699,90 @@
       </p:sp>
       <p:sp>
         <p:nvSpPr>
+          <p:cNvPr id="10" name="TextBox 9">
+            <a:extLst>
+              <a:ext uri="{FF2B5EF4-FFF2-40B4-BE49-F238E27FC236}">
+                <a16:creationId xmlns:a16="http://schemas.microsoft.com/office/drawing/2014/main" id="{860D8D68-E528-9B2C-AD41-B1DEFE371752}"/>
+              </a:ext>
+            </a:extLst>
+          </p:cNvPr>
+          <p:cNvSpPr txBox="1"/>
+          <p:nvPr/>
+        </p:nvSpPr>
+        <p:spPr>
+          <a:xfrm>
+            <a:off x="6502400" y="1879600"/>
+            <a:ext cx="4724400" cy="276999"/>
+          </a:xfrm>
+          <a:prstGeom prst="rect">
+            <a:avLst/>
+          </a:prstGeom>
+          <a:noFill/>
+        </p:spPr>
+        <p:txBody>
+          <a:bodyPr vert="horz" wrap="square" lIns="0" tIns="0" rIns="0" bIns="0" rtlCol="0">
+            <a:noAutofit/>
+          </a:bodyPr>
+          <a:lstStyle/>
+          <a:p>
+            <a:r>
+              <a:rPr lang="en-US" sz="1600" b="1">
+                <a:solidFill>
+                  <a:srgbClr val="1F2329"/>
+                </a:solidFill>
+                <a:latin typeface="Aptos" panose="020B0004020202020204" pitchFamily="34" charset="0"/>
+              </a:rPr>
+              <a:t>VALIDATION PLAN</a:t>
+            </a:r>
+          </a:p>
+        </p:txBody>
+      </p:sp>
+      <p:sp>
+        <p:nvSpPr>
           <p:cNvPr id="11" name="TextBox 10">
             <a:extLst>
               <a:ext uri="{FF2B5EF4-FFF2-40B4-BE49-F238E27FC236}">
-                <a16:creationId xmlns:a16="http://schemas.microsoft.com/office/drawing/2014/main" id="{F4CA9950-8B4F-8432-7957-0941C7C964C9}"/>
-              </a:ext>
-            </a:extLst>
-          </p:cNvPr>
-          <p:cNvSpPr txBox="1"/>
-          <p:nvPr/>
-        </p:nvSpPr>
-        <p:spPr>
-          <a:xfrm>
-            <a:off x="3873500" y="2552700"/>
-            <a:ext cx="228600" cy="276999"/>
-          </a:xfrm>
-          <a:prstGeom prst="rect">
-            <a:avLst/>
-          </a:prstGeom>
-          <a:noFill/>
-        </p:spPr>
-        <p:txBody>
-          <a:bodyPr vert="horz" wrap="square" lIns="0" tIns="0" rIns="0" bIns="0" rtlCol="0">
-            <a:noAutofit/>
-          </a:bodyPr>
-          <a:lstStyle/>
-          <a:p>
-            <a:pPr algn="ctr"/>
-            <a:r>
-              <a:rPr lang="en-US" sz="1400" b="1">
-                <a:solidFill>
-                  <a:srgbClr val="FFFFFF"/>
-                </a:solidFill>
-                <a:latin typeface="Aptos Display" panose="020B0004020202020204" pitchFamily="34" charset="0"/>
-              </a:rPr>
-              <a:t>2</a:t>
-            </a:r>
-          </a:p>
-        </p:txBody>
-      </p:sp>
-      <p:sp>
-        <p:nvSpPr>
-          <p:cNvPr id="12" name="TextBox 11">
-            <a:extLst>
-              <a:ext uri="{FF2B5EF4-FFF2-40B4-BE49-F238E27FC236}">
-                <a16:creationId xmlns:a16="http://schemas.microsoft.com/office/drawing/2014/main" id="{05D54381-790B-6FE1-F8CB-FD8D7C606251}"/>
-              </a:ext>
-            </a:extLst>
-          </p:cNvPr>
-          <p:cNvSpPr txBox="1"/>
-          <p:nvPr/>
-        </p:nvSpPr>
-        <p:spPr>
-          <a:xfrm>
-            <a:off x="3225800" y="3225800"/>
-            <a:ext cx="1524000" cy="276999"/>
-          </a:xfrm>
-          <a:prstGeom prst="rect">
-            <a:avLst/>
-          </a:prstGeom>
-          <a:noFill/>
-        </p:spPr>
-        <p:txBody>
-          <a:bodyPr vert="horz" wrap="square" lIns="0" tIns="0" rIns="0" bIns="0" rtlCol="0">
-            <a:noAutofit/>
-          </a:bodyPr>
-          <a:lstStyle/>
-          <a:p>
-            <a:pPr algn="ctr"/>
-            <a:r>
-              <a:rPr lang="en-US" sz="1500" b="1">
-                <a:solidFill>
-                  <a:srgbClr val="1F2329"/>
-                </a:solidFill>
-                <a:latin typeface="Aptos Display" panose="020B0004020202020204" pitchFamily="34" charset="0"/>
-              </a:rPr>
-              <a:t>Cargo truth</a:t>
-            </a:r>
-          </a:p>
-        </p:txBody>
-      </p:sp>
-      <p:sp>
-        <p:nvSpPr>
-          <p:cNvPr id="13" name="TextBox 12">
-            <a:extLst>
-              <a:ext uri="{FF2B5EF4-FFF2-40B4-BE49-F238E27FC236}">
-                <a16:creationId xmlns:a16="http://schemas.microsoft.com/office/drawing/2014/main" id="{4D24A9D9-B596-54F6-7336-AF8097666A45}"/>
-              </a:ext>
-            </a:extLst>
-          </p:cNvPr>
-          <p:cNvSpPr txBox="1"/>
-          <p:nvPr/>
-        </p:nvSpPr>
-        <p:spPr>
-          <a:xfrm>
-            <a:off x="3251200" y="3898900"/>
-            <a:ext cx="1473200" cy="276999"/>
-          </a:xfrm>
-          <a:prstGeom prst="rect">
-            <a:avLst/>
-          </a:prstGeom>
-          <a:noFill/>
-        </p:spPr>
-        <p:txBody>
-          <a:bodyPr vert="horz" wrap="square" lIns="0" tIns="0" rIns="0" bIns="0" rtlCol="0">
-            <a:noAutofit/>
-          </a:bodyPr>
-          <a:lstStyle/>
-          <a:p>
-            <a:pPr algn="ctr"/>
-            <a:r>
-              <a:rPr lang="en-US" sz="1050">
+                <a16:creationId xmlns:a16="http://schemas.microsoft.com/office/drawing/2014/main" id="{7080134B-9798-1CE5-27DE-4374511B3BE9}"/>
+              </a:ext>
+            </a:extLst>
+          </p:cNvPr>
+          <p:cNvSpPr txBox="1"/>
+          <p:nvPr/>
+        </p:nvSpPr>
+        <p:spPr>
+          <a:xfrm>
+            <a:off x="6502400" y="2336800"/>
+            <a:ext cx="4724400" cy="276999"/>
+          </a:xfrm>
+          <a:prstGeom prst="rect">
+            <a:avLst/>
+          </a:prstGeom>
+          <a:noFill/>
+        </p:spPr>
+        <p:txBody>
+          <a:bodyPr vert="horz" wrap="square" lIns="0" tIns="0" rIns="0" bIns="0" rtlCol="0">
+            <a:noAutofit/>
+          </a:bodyPr>
+          <a:lstStyle/>
+          <a:p>
+            <a:r>
+              <a:rPr lang="en-US" sz="1150">
                 <a:solidFill>
                   <a:srgbClr val="646C77"/>
                 </a:solidFill>
                 <a:latin typeface="Aptos" panose="020B0004020202020204" pitchFamily="34" charset="0"/>
               </a:rPr>
-              <a:t>packages | targets | features | sources</a:t>
-            </a:r>
-          </a:p>
-        </p:txBody>
-      </p:sp>
-      <p:sp>
-        <p:nvSpPr>
-          <p:cNvPr id="14" name="Rectangle: Rounded Corners 13">
-            <a:extLst>
-              <a:ext uri="{FF2B5EF4-FFF2-40B4-BE49-F238E27FC236}">
-                <a16:creationId xmlns:a16="http://schemas.microsoft.com/office/drawing/2014/main" id="{C0ACEDA7-35A0-FEDA-5F9A-1130D8AE692B}"/>
+              <a:t>Changed paths and packages produce conservative, non-executable validation scope.</a:t>
+            </a:r>
+          </a:p>
+        </p:txBody>
+      </p:sp>
+      <p:sp>
+        <p:nvSpPr>
+          <p:cNvPr id="12" name="Rectangle: Rounded Corners 11">
+            <a:extLst>
+              <a:ext uri="{FF2B5EF4-FFF2-40B4-BE49-F238E27FC236}">
+                <a16:creationId xmlns:a16="http://schemas.microsoft.com/office/drawing/2014/main" id="{3CA798DD-92B8-5C6C-4B37-93E5A14ECED4}"/>
               </a:ext>
             </a:extLst>
           </p:cNvPr>
@@ -12639,14 +12791,14 @@
         </p:nvSpPr>
         <p:spPr>
           <a:xfrm>
-            <a:off x="5181600" y="1955800"/>
-            <a:ext cx="1879600" cy="2717800"/>
+            <a:off x="660400" y="3429000"/>
+            <a:ext cx="5207000" cy="1422400"/>
           </a:xfrm>
           <a:prstGeom prst="roundRect">
             <a:avLst/>
           </a:prstGeom>
           <a:solidFill>
-            <a:srgbClr val="10212D"/>
+            <a:srgbClr val="FCFDFF"/>
           </a:solidFill>
           <a:ln w="19050" cap="flat" cmpd="sng" algn="ctr">
             <a:solidFill>
@@ -12685,10 +12837,10 @@
       </p:sp>
       <p:sp>
         <p:nvSpPr>
-          <p:cNvPr id="15" name="Oval 14">
-            <a:extLst>
-              <a:ext uri="{FF2B5EF4-FFF2-40B4-BE49-F238E27FC236}">
-                <a16:creationId xmlns:a16="http://schemas.microsoft.com/office/drawing/2014/main" id="{61966E21-DF92-75B6-550C-FB87DD70E164}"/>
+          <p:cNvPr id="13" name="Rectangle 12">
+            <a:extLst>
+              <a:ext uri="{FF2B5EF4-FFF2-40B4-BE49-F238E27FC236}">
+                <a16:creationId xmlns:a16="http://schemas.microsoft.com/office/drawing/2014/main" id="{5D11D83F-D6FB-F5B3-D583-322F950B1267}"/>
               </a:ext>
             </a:extLst>
           </p:cNvPr>
@@ -12697,21 +12849,20 @@
         </p:nvSpPr>
         <p:spPr>
           <a:xfrm>
-            <a:off x="5816600" y="2184400"/>
-            <a:ext cx="609600" cy="609600"/>
-          </a:xfrm>
-          <a:prstGeom prst="ellipse">
+            <a:off x="660400" y="3429000"/>
+            <a:ext cx="101600" cy="1422400"/>
+          </a:xfrm>
+          <a:prstGeom prst="rect">
             <a:avLst/>
           </a:prstGeom>
           <a:solidFill>
-            <a:srgbClr val="D95F31"/>
+            <a:srgbClr val="52B8C8"/>
           </a:solidFill>
           <a:ln w="19050" cap="flat" cmpd="sng" algn="ctr">
             <a:solidFill>
-              <a:schemeClr val="accent1">
-                <a:shade val="15000"/>
+              <a:srgbClr val="52B8C8">
                 <a:alpha val="0"/>
-              </a:schemeClr>
+              </a:srgbClr>
             </a:solidFill>
             <a:prstDash val="solid"/>
             <a:miter lim="800000"/>
@@ -12746,133 +12897,90 @@
       </p:sp>
       <p:sp>
         <p:nvSpPr>
-          <p:cNvPr id="16" name="TextBox 15">
-            <a:extLst>
-              <a:ext uri="{FF2B5EF4-FFF2-40B4-BE49-F238E27FC236}">
-                <a16:creationId xmlns:a16="http://schemas.microsoft.com/office/drawing/2014/main" id="{D5425DBA-F4F0-96DA-A0F2-015B1D222BC5}"/>
-              </a:ext>
-            </a:extLst>
-          </p:cNvPr>
-          <p:cNvSpPr txBox="1"/>
-          <p:nvPr/>
-        </p:nvSpPr>
-        <p:spPr>
-          <a:xfrm>
-            <a:off x="6007100" y="2324100"/>
-            <a:ext cx="228600" cy="276999"/>
-          </a:xfrm>
-          <a:prstGeom prst="rect">
-            <a:avLst/>
-          </a:prstGeom>
-          <a:noFill/>
-        </p:spPr>
-        <p:txBody>
-          <a:bodyPr vert="horz" wrap="square" lIns="0" tIns="0" rIns="0" bIns="0" rtlCol="0">
-            <a:noAutofit/>
-          </a:bodyPr>
-          <a:lstStyle/>
-          <a:p>
-            <a:pPr algn="ctr"/>
-            <a:r>
-              <a:rPr lang="en-US" sz="1400" b="1">
-                <a:solidFill>
-                  <a:srgbClr val="FFFFFF"/>
-                </a:solidFill>
-                <a:latin typeface="Aptos Display" panose="020B0004020202020204" pitchFamily="34" charset="0"/>
-              </a:rPr>
-              <a:t>3</a:t>
-            </a:r>
-          </a:p>
-        </p:txBody>
-      </p:sp>
-      <p:sp>
-        <p:nvSpPr>
-          <p:cNvPr id="17" name="TextBox 16">
-            <a:extLst>
-              <a:ext uri="{FF2B5EF4-FFF2-40B4-BE49-F238E27FC236}">
-                <a16:creationId xmlns:a16="http://schemas.microsoft.com/office/drawing/2014/main" id="{4F468C69-EE69-E2F2-8A7E-49C02AAE95AC}"/>
-              </a:ext>
-            </a:extLst>
-          </p:cNvPr>
-          <p:cNvSpPr txBox="1"/>
-          <p:nvPr/>
-        </p:nvSpPr>
-        <p:spPr>
-          <a:xfrm>
-            <a:off x="5359400" y="2997200"/>
-            <a:ext cx="1524000" cy="276999"/>
-          </a:xfrm>
-          <a:prstGeom prst="rect">
-            <a:avLst/>
-          </a:prstGeom>
-          <a:noFill/>
-        </p:spPr>
-        <p:txBody>
-          <a:bodyPr vert="horz" wrap="square" lIns="0" tIns="0" rIns="0" bIns="0" rtlCol="0">
-            <a:noAutofit/>
-          </a:bodyPr>
-          <a:lstStyle/>
-          <a:p>
-            <a:pPr algn="ctr"/>
-            <a:r>
-              <a:rPr lang="en-US" sz="1500" b="1">
-                <a:solidFill>
-                  <a:srgbClr val="FFFFFF"/>
-                </a:solidFill>
-                <a:latin typeface="Aptos Display" panose="020B0004020202020204" pitchFamily="34" charset="0"/>
-              </a:rPr>
-              <a:t>Contracts</a:t>
-            </a:r>
-          </a:p>
-        </p:txBody>
-      </p:sp>
-      <p:sp>
-        <p:nvSpPr>
-          <p:cNvPr id="18" name="TextBox 17">
-            <a:extLst>
-              <a:ext uri="{FF2B5EF4-FFF2-40B4-BE49-F238E27FC236}">
-                <a16:creationId xmlns:a16="http://schemas.microsoft.com/office/drawing/2014/main" id="{42BFB705-EBEE-D49D-EB16-0F7CC43D7A52}"/>
-              </a:ext>
-            </a:extLst>
-          </p:cNvPr>
-          <p:cNvSpPr txBox="1"/>
-          <p:nvPr/>
-        </p:nvSpPr>
-        <p:spPr>
-          <a:xfrm>
-            <a:off x="5384800" y="3670300"/>
-            <a:ext cx="1473200" cy="276999"/>
-          </a:xfrm>
-          <a:prstGeom prst="rect">
-            <a:avLst/>
-          </a:prstGeom>
-          <a:noFill/>
-        </p:spPr>
-        <p:txBody>
-          <a:bodyPr vert="horz" wrap="square" lIns="0" tIns="0" rIns="0" bIns="0" rtlCol="0">
-            <a:noAutofit/>
-          </a:bodyPr>
-          <a:lstStyle/>
-          <a:p>
-            <a:pPr algn="ctr"/>
-            <a:r>
-              <a:rPr lang="en-US" sz="1050">
-                <a:solidFill>
-                  <a:srgbClr val="E5E1D8"/>
+          <p:cNvPr id="14" name="TextBox 13">
+            <a:extLst>
+              <a:ext uri="{FF2B5EF4-FFF2-40B4-BE49-F238E27FC236}">
+                <a16:creationId xmlns:a16="http://schemas.microsoft.com/office/drawing/2014/main" id="{7A1C6DA3-DA9C-994C-1795-DB0856908617}"/>
+              </a:ext>
+            </a:extLst>
+          </p:cNvPr>
+          <p:cNvSpPr txBox="1"/>
+          <p:nvPr/>
+        </p:nvSpPr>
+        <p:spPr>
+          <a:xfrm>
+            <a:off x="939800" y="3632200"/>
+            <a:ext cx="4724400" cy="276999"/>
+          </a:xfrm>
+          <a:prstGeom prst="rect">
+            <a:avLst/>
+          </a:prstGeom>
+          <a:noFill/>
+        </p:spPr>
+        <p:txBody>
+          <a:bodyPr vert="horz" wrap="square" lIns="0" tIns="0" rIns="0" bIns="0" rtlCol="0">
+            <a:noAutofit/>
+          </a:bodyPr>
+          <a:lstStyle/>
+          <a:p>
+            <a:r>
+              <a:rPr lang="en-US" sz="1600" b="1">
+                <a:solidFill>
+                  <a:srgbClr val="1F2329"/>
                 </a:solidFill>
                 <a:latin typeface="Aptos" panose="020B0004020202020204" pitchFamily="34" charset="0"/>
               </a:rPr>
-              <a:t>Rust API | C ABI | CXX | WIT | wire IDL</a:t>
-            </a:r>
-          </a:p>
-        </p:txBody>
-      </p:sp>
-      <p:sp>
-        <p:nvSpPr>
-          <p:cNvPr id="19" name="Rectangle: Rounded Corners 18">
-            <a:extLst>
-              <a:ext uri="{FF2B5EF4-FFF2-40B4-BE49-F238E27FC236}">
-                <a16:creationId xmlns:a16="http://schemas.microsoft.com/office/drawing/2014/main" id="{B965483E-1F7A-CF42-F895-009547B466ED}"/>
+              <a:t>FEDERATED PLAN</a:t>
+            </a:r>
+          </a:p>
+        </p:txBody>
+      </p:sp>
+      <p:sp>
+        <p:nvSpPr>
+          <p:cNvPr id="15" name="TextBox 14">
+            <a:extLst>
+              <a:ext uri="{FF2B5EF4-FFF2-40B4-BE49-F238E27FC236}">
+                <a16:creationId xmlns:a16="http://schemas.microsoft.com/office/drawing/2014/main" id="{599B08D0-647F-3800-5686-ED865A3C54A6}"/>
+              </a:ext>
+            </a:extLst>
+          </p:cNvPr>
+          <p:cNvSpPr txBox="1"/>
+          <p:nvPr/>
+        </p:nvSpPr>
+        <p:spPr>
+          <a:xfrm>
+            <a:off x="939800" y="4089400"/>
+            <a:ext cx="4724400" cy="276999"/>
+          </a:xfrm>
+          <a:prstGeom prst="rect">
+            <a:avLst/>
+          </a:prstGeom>
+          <a:noFill/>
+        </p:spPr>
+        <p:txBody>
+          <a:bodyPr vert="horz" wrap="square" lIns="0" tIns="0" rIns="0" bIns="0" rtlCol="0">
+            <a:noAutofit/>
+          </a:bodyPr>
+          <a:lstStyle/>
+          <a:p>
+            <a:r>
+              <a:rPr lang="en-US" sz="1150">
+                <a:solidFill>
+                  <a:srgbClr val="646C77"/>
+                </a:solidFill>
+                <a:latin typeface="Aptos" panose="020B0004020202020204" pitchFamily="34" charset="0"/>
+              </a:rPr>
+              <a:t>One strict request links 2-16 independent workspace plans without flattening Cargo truth.</a:t>
+            </a:r>
+          </a:p>
+        </p:txBody>
+      </p:sp>
+      <p:sp>
+        <p:nvSpPr>
+          <p:cNvPr id="16" name="Rectangle: Rounded Corners 15">
+            <a:extLst>
+              <a:ext uri="{FF2B5EF4-FFF2-40B4-BE49-F238E27FC236}">
+                <a16:creationId xmlns:a16="http://schemas.microsoft.com/office/drawing/2014/main" id="{05065F39-4077-F619-CB24-8B1A58FBA2C5}"/>
               </a:ext>
             </a:extLst>
           </p:cNvPr>
@@ -12881,14 +12989,14 @@
         </p:nvSpPr>
         <p:spPr>
           <a:xfrm>
-            <a:off x="7315200" y="2184400"/>
-            <a:ext cx="1879600" cy="2717800"/>
+            <a:off x="6223000" y="3429000"/>
+            <a:ext cx="5207000" cy="1422400"/>
           </a:xfrm>
           <a:prstGeom prst="roundRect">
             <a:avLst/>
           </a:prstGeom>
           <a:solidFill>
-            <a:srgbClr val="E8F1F7"/>
+            <a:srgbClr val="FCFDFF"/>
           </a:solidFill>
           <a:ln w="19050" cap="flat" cmpd="sng" algn="ctr">
             <a:solidFill>
@@ -12927,10 +13035,10 @@
       </p:sp>
       <p:sp>
         <p:nvSpPr>
-          <p:cNvPr id="20" name="Oval 19">
-            <a:extLst>
-              <a:ext uri="{FF2B5EF4-FFF2-40B4-BE49-F238E27FC236}">
-                <a16:creationId xmlns:a16="http://schemas.microsoft.com/office/drawing/2014/main" id="{69B8477D-6064-2541-5987-A8BFA1698E40}"/>
+          <p:cNvPr id="17" name="Rectangle 16">
+            <a:extLst>
+              <a:ext uri="{FF2B5EF4-FFF2-40B4-BE49-F238E27FC236}">
+                <a16:creationId xmlns:a16="http://schemas.microsoft.com/office/drawing/2014/main" id="{B62F2E8C-F22B-6FFB-7451-5D0F1ACD2A77}"/>
               </a:ext>
             </a:extLst>
           </p:cNvPr>
@@ -12939,10 +13047,10 @@
         </p:nvSpPr>
         <p:spPr>
           <a:xfrm>
-            <a:off x="7950200" y="2413000"/>
-            <a:ext cx="609600" cy="609600"/>
-          </a:xfrm>
-          <a:prstGeom prst="ellipse">
+            <a:off x="6223000" y="3429000"/>
+            <a:ext cx="101600" cy="1422400"/>
+          </a:xfrm>
+          <a:prstGeom prst="rect">
             <a:avLst/>
           </a:prstGeom>
           <a:solidFill>
@@ -12950,10 +13058,9 @@
           </a:solidFill>
           <a:ln w="19050" cap="flat" cmpd="sng" algn="ctr">
             <a:solidFill>
-              <a:schemeClr val="accent1">
-                <a:shade val="15000"/>
+              <a:srgbClr val="CE4A2B">
                 <a:alpha val="0"/>
-              </a:schemeClr>
+              </a:srgbClr>
             </a:solidFill>
             <a:prstDash val="solid"/>
             <a:miter lim="800000"/>
@@ -12988,133 +13095,90 @@
       </p:sp>
       <p:sp>
         <p:nvSpPr>
-          <p:cNvPr id="21" name="TextBox 20">
-            <a:extLst>
-              <a:ext uri="{FF2B5EF4-FFF2-40B4-BE49-F238E27FC236}">
-                <a16:creationId xmlns:a16="http://schemas.microsoft.com/office/drawing/2014/main" id="{087D6527-F342-0576-3E6B-948B7168E3BC}"/>
-              </a:ext>
-            </a:extLst>
-          </p:cNvPr>
-          <p:cNvSpPr txBox="1"/>
-          <p:nvPr/>
-        </p:nvSpPr>
-        <p:spPr>
-          <a:xfrm>
-            <a:off x="8140700" y="2552700"/>
-            <a:ext cx="228600" cy="276999"/>
-          </a:xfrm>
-          <a:prstGeom prst="rect">
-            <a:avLst/>
-          </a:prstGeom>
-          <a:noFill/>
-        </p:spPr>
-        <p:txBody>
-          <a:bodyPr vert="horz" wrap="square" lIns="0" tIns="0" rIns="0" bIns="0" rtlCol="0">
-            <a:noAutofit/>
-          </a:bodyPr>
-          <a:lstStyle/>
-          <a:p>
-            <a:pPr algn="ctr"/>
-            <a:r>
-              <a:rPr lang="en-US" sz="1400" b="1">
-                <a:solidFill>
-                  <a:srgbClr val="FFFFFF"/>
-                </a:solidFill>
-                <a:latin typeface="Aptos Display" panose="020B0004020202020204" pitchFamily="34" charset="0"/>
-              </a:rPr>
-              <a:t>4</a:t>
-            </a:r>
-          </a:p>
-        </p:txBody>
-      </p:sp>
-      <p:sp>
-        <p:nvSpPr>
-          <p:cNvPr id="22" name="TextBox 21">
-            <a:extLst>
-              <a:ext uri="{FF2B5EF4-FFF2-40B4-BE49-F238E27FC236}">
-                <a16:creationId xmlns:a16="http://schemas.microsoft.com/office/drawing/2014/main" id="{59782F3E-B22E-D0E1-BFA4-DBFAB80C8F06}"/>
-              </a:ext>
-            </a:extLst>
-          </p:cNvPr>
-          <p:cNvSpPr txBox="1"/>
-          <p:nvPr/>
-        </p:nvSpPr>
-        <p:spPr>
-          <a:xfrm>
-            <a:off x="7493000" y="3225800"/>
-            <a:ext cx="1524000" cy="276999"/>
-          </a:xfrm>
-          <a:prstGeom prst="rect">
-            <a:avLst/>
-          </a:prstGeom>
-          <a:noFill/>
-        </p:spPr>
-        <p:txBody>
-          <a:bodyPr vert="horz" wrap="square" lIns="0" tIns="0" rIns="0" bIns="0" rtlCol="0">
-            <a:noAutofit/>
-          </a:bodyPr>
-          <a:lstStyle/>
-          <a:p>
-            <a:pPr algn="ctr"/>
-            <a:r>
-              <a:rPr lang="en-US" sz="1500" b="1">
+          <p:cNvPr id="18" name="TextBox 17">
+            <a:extLst>
+              <a:ext uri="{FF2B5EF4-FFF2-40B4-BE49-F238E27FC236}">
+                <a16:creationId xmlns:a16="http://schemas.microsoft.com/office/drawing/2014/main" id="{D0AD3E2F-8275-B7EC-7789-66155F5B82FF}"/>
+              </a:ext>
+            </a:extLst>
+          </p:cNvPr>
+          <p:cNvSpPr txBox="1"/>
+          <p:nvPr/>
+        </p:nvSpPr>
+        <p:spPr>
+          <a:xfrm>
+            <a:off x="6502400" y="3632200"/>
+            <a:ext cx="4724400" cy="276999"/>
+          </a:xfrm>
+          <a:prstGeom prst="rect">
+            <a:avLst/>
+          </a:prstGeom>
+          <a:noFill/>
+        </p:spPr>
+        <p:txBody>
+          <a:bodyPr vert="horz" wrap="square" lIns="0" tIns="0" rIns="0" bIns="0" rtlCol="0">
+            <a:noAutofit/>
+          </a:bodyPr>
+          <a:lstStyle/>
+          <a:p>
+            <a:r>
+              <a:rPr lang="en-US" sz="1600" b="1">
                 <a:solidFill>
                   <a:srgbClr val="1F2329"/>
                 </a:solidFill>
-                <a:latin typeface="Aptos Display" panose="020B0004020202020204" pitchFamily="34" charset="0"/>
-              </a:rPr>
-              <a:t>Supported profiles</a:t>
-            </a:r>
-          </a:p>
-        </p:txBody>
-      </p:sp>
-      <p:sp>
-        <p:nvSpPr>
-          <p:cNvPr id="23" name="TextBox 22">
-            <a:extLst>
-              <a:ext uri="{FF2B5EF4-FFF2-40B4-BE49-F238E27FC236}">
-                <a16:creationId xmlns:a16="http://schemas.microsoft.com/office/drawing/2014/main" id="{FAF696B8-626E-2AD1-9710-73E57F3F16AC}"/>
-              </a:ext>
-            </a:extLst>
-          </p:cNvPr>
-          <p:cNvSpPr txBox="1"/>
-          <p:nvPr/>
-        </p:nvSpPr>
-        <p:spPr>
-          <a:xfrm>
-            <a:off x="7518400" y="3898900"/>
-            <a:ext cx="1473200" cy="276999"/>
-          </a:xfrm>
-          <a:prstGeom prst="rect">
-            <a:avLst/>
-          </a:prstGeom>
-          <a:noFill/>
-        </p:spPr>
-        <p:txBody>
-          <a:bodyPr vert="horz" wrap="square" lIns="0" tIns="0" rIns="0" bIns="0" rtlCol="0">
-            <a:noAutofit/>
-          </a:bodyPr>
-          <a:lstStyle/>
-          <a:p>
-            <a:pPr algn="ctr"/>
-            <a:r>
-              <a:rPr lang="en-US" sz="1050">
+                <a:latin typeface="Aptos" panose="020B0004020202020204" pitchFamily="34" charset="0"/>
+              </a:rPr>
+              <a:t>CONSUMER PINS</a:t>
+            </a:r>
+          </a:p>
+        </p:txBody>
+      </p:sp>
+      <p:sp>
+        <p:nvSpPr>
+          <p:cNvPr id="19" name="TextBox 18">
+            <a:extLst>
+              <a:ext uri="{FF2B5EF4-FFF2-40B4-BE49-F238E27FC236}">
+                <a16:creationId xmlns:a16="http://schemas.microsoft.com/office/drawing/2014/main" id="{938DA327-F810-1996-79D7-3429120D1D09}"/>
+              </a:ext>
+            </a:extLst>
+          </p:cNvPr>
+          <p:cNvSpPr txBox="1"/>
+          <p:nvPr/>
+        </p:nvSpPr>
+        <p:spPr>
+          <a:xfrm>
+            <a:off x="6502400" y="4089400"/>
+            <a:ext cx="4724400" cy="276999"/>
+          </a:xfrm>
+          <a:prstGeom prst="rect">
+            <a:avLst/>
+          </a:prstGeom>
+          <a:noFill/>
+        </p:spPr>
+        <p:txBody>
+          <a:bodyPr vert="horz" wrap="square" lIns="0" tIns="0" rIns="0" bIns="0" rtlCol="0">
+            <a:noAutofit/>
+          </a:bodyPr>
+          <a:lstStyle/>
+          <a:p>
+            <a:r>
+              <a:rPr lang="en-US" sz="1150">
                 <a:solidFill>
                   <a:srgbClr val="646C77"/>
                 </a:solidFill>
                 <a:latin typeface="Aptos" panose="020B0004020202020204" pitchFamily="34" charset="0"/>
               </a:rPr>
-              <a:t>crates | providers | platforms | renewal</a:t>
-            </a:r>
-          </a:p>
-        </p:txBody>
-      </p:sp>
-      <p:sp>
-        <p:nvSpPr>
-          <p:cNvPr id="24" name="Rectangle: Rounded Corners 23">
-            <a:extLst>
-              <a:ext uri="{FF2B5EF4-FFF2-40B4-BE49-F238E27FC236}">
-                <a16:creationId xmlns:a16="http://schemas.microsoft.com/office/drawing/2014/main" id="{B8E44CBF-CED0-ABA1-84A8-12BCAC13F8A5}"/>
+              <a:t>PARLOR and RUNE validate exact experimental output contracts on Windows and Ubuntu.</a:t>
+            </a:r>
+          </a:p>
+        </p:txBody>
+      </p:sp>
+      <p:sp>
+        <p:nvSpPr>
+          <p:cNvPr id="20" name="Rectangle: Rounded Corners 19">
+            <a:extLst>
+              <a:ext uri="{FF2B5EF4-FFF2-40B4-BE49-F238E27FC236}">
+                <a16:creationId xmlns:a16="http://schemas.microsoft.com/office/drawing/2014/main" id="{12855475-AADF-6EF9-7C9D-12D1282A0A0E}"/>
               </a:ext>
             </a:extLst>
           </p:cNvPr>
@@ -13123,18 +13187,20 @@
         </p:nvSpPr>
         <p:spPr>
           <a:xfrm>
-            <a:off x="9448800" y="2413000"/>
-            <a:ext cx="1879600" cy="2717800"/>
+            <a:off x="660400" y="5359400"/>
+            <a:ext cx="10769600" cy="609600"/>
           </a:xfrm>
           <a:prstGeom prst="roundRect">
             <a:avLst/>
           </a:prstGeom>
           <a:solidFill>
-            <a:srgbClr val="E8F1F7"/>
+            <a:srgbClr val="10212D"/>
           </a:solidFill>
           <a:ln w="19050" cap="flat" cmpd="sng" algn="ctr">
             <a:solidFill>
-              <a:srgbClr val="C5CED8"/>
+              <a:srgbClr val="10212D">
+                <a:alpha val="0"/>
+              </a:srgbClr>
             </a:solidFill>
             <a:prstDash val="solid"/>
             <a:miter lim="800000"/>
@@ -13169,235 +13235,51 @@
       </p:sp>
       <p:sp>
         <p:nvSpPr>
-          <p:cNvPr id="25" name="Oval 24">
-            <a:extLst>
-              <a:ext uri="{FF2B5EF4-FFF2-40B4-BE49-F238E27FC236}">
-                <a16:creationId xmlns:a16="http://schemas.microsoft.com/office/drawing/2014/main" id="{94D36EE1-02CF-C26B-5A0A-0AF2B14AF625}"/>
-              </a:ext>
-            </a:extLst>
-          </p:cNvPr>
-          <p:cNvSpPr/>
-          <p:nvPr/>
-        </p:nvSpPr>
-        <p:spPr>
-          <a:xfrm>
-            <a:off x="10083800" y="2641600"/>
-            <a:ext cx="609600" cy="609600"/>
-          </a:xfrm>
-          <a:prstGeom prst="ellipse">
-            <a:avLst/>
-          </a:prstGeom>
-          <a:solidFill>
-            <a:srgbClr val="CE4A2B"/>
-          </a:solidFill>
-          <a:ln w="19050" cap="flat" cmpd="sng" algn="ctr">
-            <a:solidFill>
-              <a:schemeClr val="accent1">
-                <a:shade val="15000"/>
-                <a:alpha val="0"/>
-              </a:schemeClr>
-            </a:solidFill>
-            <a:prstDash val="solid"/>
-            <a:miter lim="800000"/>
-            <a:headEnd type="none" w="med" len="med"/>
-            <a:tailEnd type="none" w="med" len="med"/>
-          </a:ln>
-        </p:spPr>
-        <p:style>
-          <a:lnRef idx="2">
-            <a:schemeClr val="accent1">
-              <a:shade val="15000"/>
-            </a:schemeClr>
-          </a:lnRef>
-          <a:fillRef idx="1">
-            <a:schemeClr val="accent1"/>
-          </a:fillRef>
-          <a:effectRef idx="0">
-            <a:schemeClr val="accent1"/>
-          </a:effectRef>
-          <a:fontRef idx="minor">
-            <a:schemeClr val="lt1"/>
-          </a:fontRef>
-        </p:style>
-        <p:txBody>
-          <a:bodyPr rtlCol="0" anchor="ctr"/>
+          <p:cNvPr id="21" name="TextBox 20">
+            <a:extLst>
+              <a:ext uri="{FF2B5EF4-FFF2-40B4-BE49-F238E27FC236}">
+                <a16:creationId xmlns:a16="http://schemas.microsoft.com/office/drawing/2014/main" id="{52CF1358-D5C3-30CB-0714-E84E9CB78D01}"/>
+              </a:ext>
+            </a:extLst>
+          </p:cNvPr>
+          <p:cNvSpPr txBox="1"/>
+          <p:nvPr/>
+        </p:nvSpPr>
+        <p:spPr>
+          <a:xfrm>
+            <a:off x="965200" y="5524500"/>
+            <a:ext cx="10160000" cy="276999"/>
+          </a:xfrm>
+          <a:prstGeom prst="rect">
+            <a:avLst/>
+          </a:prstGeom>
+          <a:noFill/>
+        </p:spPr>
+        <p:txBody>
+          <a:bodyPr vert="horz" wrap="square" lIns="0" tIns="0" rIns="0" bIns="0" rtlCol="0">
+            <a:noAutofit/>
+          </a:bodyPr>
           <a:lstStyle/>
           <a:p>
             <a:pPr algn="ctr"/>
-            <a:endParaRPr lang="en-US"/>
-          </a:p>
-        </p:txBody>
-      </p:sp>
-      <p:sp>
-        <p:nvSpPr>
-          <p:cNvPr id="26" name="TextBox 25">
-            <a:extLst>
-              <a:ext uri="{FF2B5EF4-FFF2-40B4-BE49-F238E27FC236}">
-                <a16:creationId xmlns:a16="http://schemas.microsoft.com/office/drawing/2014/main" id="{21DF025F-D2F3-7ABC-6378-8B485CD5BEB8}"/>
-              </a:ext>
-            </a:extLst>
-          </p:cNvPr>
-          <p:cNvSpPr txBox="1"/>
-          <p:nvPr/>
-        </p:nvSpPr>
-        <p:spPr>
-          <a:xfrm>
-            <a:off x="10274300" y="2781300"/>
-            <a:ext cx="228600" cy="276999"/>
-          </a:xfrm>
-          <a:prstGeom prst="rect">
-            <a:avLst/>
-          </a:prstGeom>
-          <a:noFill/>
-        </p:spPr>
-        <p:txBody>
-          <a:bodyPr vert="horz" wrap="square" lIns="0" tIns="0" rIns="0" bIns="0" rtlCol="0">
-            <a:noAutofit/>
-          </a:bodyPr>
-          <a:lstStyle/>
-          <a:p>
-            <a:pPr algn="ctr"/>
-            <a:r>
-              <a:rPr lang="en-US" sz="1400" b="1">
+            <a:r>
+              <a:rPr lang="en-US" sz="1700" b="1">
                 <a:solidFill>
                   <a:srgbClr val="FFFFFF"/>
                 </a:solidFill>
                 <a:latin typeface="Aptos Display" panose="020B0004020202020204" pitchFamily="34" charset="0"/>
               </a:rPr>
-              <a:t>5</a:t>
-            </a:r>
-          </a:p>
-        </p:txBody>
-      </p:sp>
-      <p:sp>
-        <p:nvSpPr>
-          <p:cNvPr id="27" name="TextBox 26">
-            <a:extLst>
-              <a:ext uri="{FF2B5EF4-FFF2-40B4-BE49-F238E27FC236}">
-                <a16:creationId xmlns:a16="http://schemas.microsoft.com/office/drawing/2014/main" id="{3E38C574-DA16-C59F-730C-0DF2C4BAB0C2}"/>
-              </a:ext>
-            </a:extLst>
-          </p:cNvPr>
-          <p:cNvSpPr txBox="1"/>
-          <p:nvPr/>
-        </p:nvSpPr>
-        <p:spPr>
-          <a:xfrm>
-            <a:off x="9626600" y="3454400"/>
-            <a:ext cx="1524000" cy="276999"/>
-          </a:xfrm>
-          <a:prstGeom prst="rect">
-            <a:avLst/>
-          </a:prstGeom>
-          <a:noFill/>
-        </p:spPr>
-        <p:txBody>
-          <a:bodyPr vert="horz" wrap="square" lIns="0" tIns="0" rIns="0" bIns="0" rtlCol="0">
-            <a:noAutofit/>
-          </a:bodyPr>
-          <a:lstStyle/>
-          <a:p>
-            <a:pPr algn="ctr"/>
-            <a:r>
-              <a:rPr lang="en-US" sz="1500" b="1">
-                <a:solidFill>
-                  <a:srgbClr val="1F2329"/>
-                </a:solidFill>
-                <a:latin typeface="Aptos Display" panose="020B0004020202020204" pitchFamily="34" charset="0"/>
-              </a:rPr>
-              <a:t>Evidence + lifecycle</a:t>
-            </a:r>
-          </a:p>
-        </p:txBody>
-      </p:sp>
-      <p:sp>
-        <p:nvSpPr>
-          <p:cNvPr id="28" name="TextBox 27">
-            <a:extLst>
-              <a:ext uri="{FF2B5EF4-FFF2-40B4-BE49-F238E27FC236}">
-                <a16:creationId xmlns:a16="http://schemas.microsoft.com/office/drawing/2014/main" id="{C3963420-1198-EF2D-214B-646BCFDD3DC8}"/>
-              </a:ext>
-            </a:extLst>
-          </p:cNvPr>
-          <p:cNvSpPr txBox="1"/>
-          <p:nvPr/>
-        </p:nvSpPr>
-        <p:spPr>
-          <a:xfrm>
-            <a:off x="9652000" y="4127500"/>
-            <a:ext cx="1473200" cy="276999"/>
-          </a:xfrm>
-          <a:prstGeom prst="rect">
-            <a:avLst/>
-          </a:prstGeom>
-          <a:noFill/>
-        </p:spPr>
-        <p:txBody>
-          <a:bodyPr vert="horz" wrap="square" lIns="0" tIns="0" rIns="0" bIns="0" rtlCol="0">
-            <a:noAutofit/>
-          </a:bodyPr>
-          <a:lstStyle/>
-          <a:p>
-            <a:pPr algn="ctr"/>
-            <a:r>
-              <a:rPr lang="en-US" sz="1050">
-                <a:solidFill>
-                  <a:srgbClr val="646C77"/>
-                </a:solidFill>
-                <a:latin typeface="Aptos" panose="020B0004020202020204" pitchFamily="34" charset="0"/>
-              </a:rPr>
-              <a:t>security | validation | rollback | removal</a:t>
-            </a:r>
-          </a:p>
-        </p:txBody>
-      </p:sp>
-      <p:sp>
-        <p:nvSpPr>
-          <p:cNvPr id="29" name="TextBox 28">
-            <a:extLst>
-              <a:ext uri="{FF2B5EF4-FFF2-40B4-BE49-F238E27FC236}">
-                <a16:creationId xmlns:a16="http://schemas.microsoft.com/office/drawing/2014/main" id="{B9665AD8-D80A-C890-D693-1C77D0C6DDDD}"/>
-              </a:ext>
-            </a:extLst>
-          </p:cNvPr>
-          <p:cNvSpPr txBox="1"/>
-          <p:nvPr/>
-        </p:nvSpPr>
-        <p:spPr>
-          <a:xfrm>
-            <a:off x="1143000" y="5588000"/>
-            <a:ext cx="9906000" cy="276999"/>
-          </a:xfrm>
-          <a:prstGeom prst="rect">
-            <a:avLst/>
-          </a:prstGeom>
-          <a:noFill/>
-        </p:spPr>
-        <p:txBody>
-          <a:bodyPr vert="horz" wrap="square" lIns="0" tIns="0" rIns="0" bIns="0" rtlCol="0">
-            <a:noAutofit/>
-          </a:bodyPr>
-          <a:lstStyle/>
-          <a:p>
-            <a:pPr algn="ctr"/>
-            <a:r>
-              <a:rPr lang="en-US" b="1">
-                <a:solidFill>
-                  <a:srgbClr val="CE4A2B"/>
-                </a:solidFill>
-                <a:latin typeface="Aptos Display" panose="020B0004020202020204" pitchFamily="34" charset="0"/>
-              </a:rPr>
-              <a:t>One answer to: what is supported here, what changes now, what must be validated, and who may proceed?</a:t>
-            </a:r>
-          </a:p>
-        </p:txBody>
-      </p:sp>
-      <p:sp>
-        <p:nvSpPr>
-          <p:cNvPr id="30" name="TextBox 29">
-            <a:extLst>
-              <a:ext uri="{FF2B5EF4-FFF2-40B4-BE49-F238E27FC236}">
-                <a16:creationId xmlns:a16="http://schemas.microsoft.com/office/drawing/2014/main" id="{D378BD0D-D1DB-952C-DC64-71A7076FFE7D}"/>
+              <a:t>Read-only. Non-executable. Portable JSON. Unknowns widen safely.</a:t>
+            </a:r>
+          </a:p>
+        </p:txBody>
+      </p:sp>
+      <p:sp>
+        <p:nvSpPr>
+          <p:cNvPr id="22" name="TextBox 21">
+            <a:extLst>
+              <a:ext uri="{FF2B5EF4-FFF2-40B4-BE49-F238E27FC236}">
+                <a16:creationId xmlns:a16="http://schemas.microsoft.com/office/drawing/2014/main" id="{EB9B75B4-EFB7-DDFC-7219-7198E50A9F15}"/>
               </a:ext>
             </a:extLst>
           </p:cNvPr>
@@ -13427,17 +13309,17 @@
                 </a:solidFill>
                 <a:latin typeface="Aptos" panose="020B0004020202020204" pitchFamily="34" charset="0"/>
               </a:rPr>
-              <a:t>Blueprints are renewable evidence records -- not permanent approved-crate lists.</a:t>
-            </a:r>
-          </a:p>
-        </p:txBody>
-      </p:sp>
-      <p:sp>
-        <p:nvSpPr>
-          <p:cNvPr id="31" name="TextBox 30">
-            <a:extLst>
-              <a:ext uri="{FF2B5EF4-FFF2-40B4-BE49-F238E27FC236}">
-                <a16:creationId xmlns:a16="http://schemas.microsoft.com/office/drawing/2014/main" id="{D9B2609F-55A9-E478-7959-03C673719111}"/>
+              <a:t>Published schemas cover validation-plan success structure; runtime semantic invariants remain explicit.</a:t>
+            </a:r>
+          </a:p>
+        </p:txBody>
+      </p:sp>
+      <p:sp>
+        <p:nvSpPr>
+          <p:cNvPr id="23" name="TextBox 22">
+            <a:extLst>
+              <a:ext uri="{FF2B5EF4-FFF2-40B4-BE49-F238E27FC236}">
+                <a16:creationId xmlns:a16="http://schemas.microsoft.com/office/drawing/2014/main" id="{4BAC5E2E-8B21-ACEF-FA4F-E1DB67B58B20}"/>
               </a:ext>
             </a:extLst>
           </p:cNvPr>
@@ -13476,7 +13358,7 @@
     </p:spTree>
     <p:extLst>
       <p:ext uri="{BB962C8B-B14F-4D97-AF65-F5344CB8AC3E}">
-        <p14:creationId xmlns:p14="http://schemas.microsoft.com/office/powerpoint/2010/main" val="85336399"/>
+        <p14:creationId xmlns:p14="http://schemas.microsoft.com/office/powerpoint/2010/main" val="1076517255"/>
       </p:ext>
     </p:extLst>
   </p:cSld>
@@ -13508,7 +13390,7 @@
           <p:cNvPr id="2" name="TextBox 1">
             <a:extLst>
               <a:ext uri="{FF2B5EF4-FFF2-40B4-BE49-F238E27FC236}">
-                <a16:creationId xmlns:a16="http://schemas.microsoft.com/office/drawing/2014/main" id="{0C1911E0-8303-1078-EF68-2937FB390779}"/>
+                <a16:creationId xmlns:a16="http://schemas.microsoft.com/office/drawing/2014/main" id="{407C20C8-EAA1-41B2-DDA1-5C2BB98DDB39}"/>
               </a:ext>
             </a:extLst>
           </p:cNvPr>
@@ -13548,7 +13430,7 @@
           <p:cNvPr id="3" name="TextBox 2">
             <a:extLst>
               <a:ext uri="{FF2B5EF4-FFF2-40B4-BE49-F238E27FC236}">
-                <a16:creationId xmlns:a16="http://schemas.microsoft.com/office/drawing/2014/main" id="{7221A82F-61B9-4125-DE83-B5DBEE532B43}"/>
+                <a16:creationId xmlns:a16="http://schemas.microsoft.com/office/drawing/2014/main" id="{236A7D1F-367D-DEE2-0683-33CB00296F25}"/>
               </a:ext>
             </a:extLst>
           </p:cNvPr>
@@ -13588,7 +13470,7 @@
           <p:cNvPr id="4" name="Oval 3">
             <a:extLst>
               <a:ext uri="{FF2B5EF4-FFF2-40B4-BE49-F238E27FC236}">
-                <a16:creationId xmlns:a16="http://schemas.microsoft.com/office/drawing/2014/main" id="{A0BEBADD-E6E8-9A04-3BAC-D802096820F4}"/>
+                <a16:creationId xmlns:a16="http://schemas.microsoft.com/office/drawing/2014/main" id="{373CDCE3-DFB2-D4B5-5294-5DFE55CE4972}"/>
               </a:ext>
             </a:extLst>
           </p:cNvPr>
@@ -13649,7 +13531,7 @@
           <p:cNvPr id="5" name="TextBox 4">
             <a:extLst>
               <a:ext uri="{FF2B5EF4-FFF2-40B4-BE49-F238E27FC236}">
-                <a16:creationId xmlns:a16="http://schemas.microsoft.com/office/drawing/2014/main" id="{E4ABE1E7-158C-B66F-6DAF-C895A29230AF}"/>
+                <a16:creationId xmlns:a16="http://schemas.microsoft.com/office/drawing/2014/main" id="{25E0F43D-BEF7-DA55-674B-3721CDB05838}"/>
               </a:ext>
             </a:extLst>
           </p:cNvPr>
@@ -13690,7 +13572,7 @@
           <p:cNvPr id="6" name="Straight Connector 5">
             <a:extLst>
               <a:ext uri="{FF2B5EF4-FFF2-40B4-BE49-F238E27FC236}">
-                <a16:creationId xmlns:a16="http://schemas.microsoft.com/office/drawing/2014/main" id="{F2315780-DF2B-90FF-4DF1-3206E9206593}"/>
+                <a16:creationId xmlns:a16="http://schemas.microsoft.com/office/drawing/2014/main" id="{2A674A51-C33D-4FDE-6140-9297A1B1492A}"/>
               </a:ext>
             </a:extLst>
           </p:cNvPr>
@@ -13731,7 +13613,7 @@
           <p:cNvPr id="7" name="TextBox 6">
             <a:extLst>
               <a:ext uri="{FF2B5EF4-FFF2-40B4-BE49-F238E27FC236}">
-                <a16:creationId xmlns:a16="http://schemas.microsoft.com/office/drawing/2014/main" id="{C004B9CB-05C7-F016-14CC-1D1660BFC887}"/>
+                <a16:creationId xmlns:a16="http://schemas.microsoft.com/office/drawing/2014/main" id="{0E08230B-1965-E9B6-47E9-C20AA4DC1DD4}"/>
               </a:ext>
             </a:extLst>
           </p:cNvPr>
@@ -13772,7 +13654,7 @@
           <p:cNvPr id="8" name="Oval 7">
             <a:extLst>
               <a:ext uri="{FF2B5EF4-FFF2-40B4-BE49-F238E27FC236}">
-                <a16:creationId xmlns:a16="http://schemas.microsoft.com/office/drawing/2014/main" id="{1A20A0B7-3CC1-03F3-67CE-C95F51D94D8B}"/>
+                <a16:creationId xmlns:a16="http://schemas.microsoft.com/office/drawing/2014/main" id="{76207B75-D7FB-297F-B0BE-68240037C876}"/>
               </a:ext>
             </a:extLst>
           </p:cNvPr>
@@ -13833,7 +13715,7 @@
           <p:cNvPr id="9" name="TextBox 8">
             <a:extLst>
               <a:ext uri="{FF2B5EF4-FFF2-40B4-BE49-F238E27FC236}">
-                <a16:creationId xmlns:a16="http://schemas.microsoft.com/office/drawing/2014/main" id="{4791A035-D455-7FF0-C348-A21294D8A0FE}"/>
+                <a16:creationId xmlns:a16="http://schemas.microsoft.com/office/drawing/2014/main" id="{B20B660E-F192-F30D-3FFA-B5CA0D9D861C}"/>
               </a:ext>
             </a:extLst>
           </p:cNvPr>
@@ -13874,7 +13756,7 @@
           <p:cNvPr id="10" name="Straight Connector 9">
             <a:extLst>
               <a:ext uri="{FF2B5EF4-FFF2-40B4-BE49-F238E27FC236}">
-                <a16:creationId xmlns:a16="http://schemas.microsoft.com/office/drawing/2014/main" id="{F68613A9-5D0C-AF89-F032-AC9FE48DA119}"/>
+                <a16:creationId xmlns:a16="http://schemas.microsoft.com/office/drawing/2014/main" id="{5CF27FFF-1DA5-481F-820E-F3BCD9830C1E}"/>
               </a:ext>
             </a:extLst>
           </p:cNvPr>
@@ -13915,7 +13797,7 @@
           <p:cNvPr id="11" name="TextBox 10">
             <a:extLst>
               <a:ext uri="{FF2B5EF4-FFF2-40B4-BE49-F238E27FC236}">
-                <a16:creationId xmlns:a16="http://schemas.microsoft.com/office/drawing/2014/main" id="{E7A17B5F-FFA2-C7B8-7672-86F15149807D}"/>
+                <a16:creationId xmlns:a16="http://schemas.microsoft.com/office/drawing/2014/main" id="{98D47E65-31B6-5FD0-CA4B-24E2BDB92860}"/>
               </a:ext>
             </a:extLst>
           </p:cNvPr>
@@ -13956,7 +13838,7 @@
           <p:cNvPr id="12" name="Oval 11">
             <a:extLst>
               <a:ext uri="{FF2B5EF4-FFF2-40B4-BE49-F238E27FC236}">
-                <a16:creationId xmlns:a16="http://schemas.microsoft.com/office/drawing/2014/main" id="{FC8C4B53-F565-258F-5DC9-38279B2CE42D}"/>
+                <a16:creationId xmlns:a16="http://schemas.microsoft.com/office/drawing/2014/main" id="{F29CA353-9C78-2291-75E3-44924DE4A686}"/>
               </a:ext>
             </a:extLst>
           </p:cNvPr>
@@ -14017,7 +13899,7 @@
           <p:cNvPr id="13" name="TextBox 12">
             <a:extLst>
               <a:ext uri="{FF2B5EF4-FFF2-40B4-BE49-F238E27FC236}">
-                <a16:creationId xmlns:a16="http://schemas.microsoft.com/office/drawing/2014/main" id="{B697E424-3C27-B94A-EE2D-BB57C520754C}"/>
+                <a16:creationId xmlns:a16="http://schemas.microsoft.com/office/drawing/2014/main" id="{3B84F47B-39C1-36E3-FB33-31D7384AA46B}"/>
               </a:ext>
             </a:extLst>
           </p:cNvPr>
@@ -14058,7 +13940,7 @@
           <p:cNvPr id="14" name="Straight Connector 13">
             <a:extLst>
               <a:ext uri="{FF2B5EF4-FFF2-40B4-BE49-F238E27FC236}">
-                <a16:creationId xmlns:a16="http://schemas.microsoft.com/office/drawing/2014/main" id="{DD0FAB92-BA25-B78F-86F0-5245B0675E73}"/>
+                <a16:creationId xmlns:a16="http://schemas.microsoft.com/office/drawing/2014/main" id="{C8E843B0-C917-88B7-225C-7794FD3368A9}"/>
               </a:ext>
             </a:extLst>
           </p:cNvPr>
@@ -14099,7 +13981,7 @@
           <p:cNvPr id="15" name="TextBox 14">
             <a:extLst>
               <a:ext uri="{FF2B5EF4-FFF2-40B4-BE49-F238E27FC236}">
-                <a16:creationId xmlns:a16="http://schemas.microsoft.com/office/drawing/2014/main" id="{DE3DE107-2988-2DF4-1041-043E627E2502}"/>
+                <a16:creationId xmlns:a16="http://schemas.microsoft.com/office/drawing/2014/main" id="{EEF6141C-D9EA-DA30-C003-4F72122E8F8B}"/>
               </a:ext>
             </a:extLst>
           </p:cNvPr>
@@ -14140,7 +14022,7 @@
           <p:cNvPr id="16" name="Oval 15">
             <a:extLst>
               <a:ext uri="{FF2B5EF4-FFF2-40B4-BE49-F238E27FC236}">
-                <a16:creationId xmlns:a16="http://schemas.microsoft.com/office/drawing/2014/main" id="{11E07956-24BE-03B3-BCB5-2DD95A4DF0DC}"/>
+                <a16:creationId xmlns:a16="http://schemas.microsoft.com/office/drawing/2014/main" id="{AA884A53-D0D8-68BD-4F03-FC6954C1E724}"/>
               </a:ext>
             </a:extLst>
           </p:cNvPr>
@@ -14201,7 +14083,7 @@
           <p:cNvPr id="17" name="TextBox 16">
             <a:extLst>
               <a:ext uri="{FF2B5EF4-FFF2-40B4-BE49-F238E27FC236}">
-                <a16:creationId xmlns:a16="http://schemas.microsoft.com/office/drawing/2014/main" id="{DE6BCC73-8E52-F6B2-0677-9F683C1043BB}"/>
+                <a16:creationId xmlns:a16="http://schemas.microsoft.com/office/drawing/2014/main" id="{CA71E8D0-1217-0819-A572-EA35AC3399E7}"/>
               </a:ext>
             </a:extLst>
           </p:cNvPr>
@@ -14242,7 +14124,7 @@
           <p:cNvPr id="18" name="Straight Connector 17">
             <a:extLst>
               <a:ext uri="{FF2B5EF4-FFF2-40B4-BE49-F238E27FC236}">
-                <a16:creationId xmlns:a16="http://schemas.microsoft.com/office/drawing/2014/main" id="{F0A37926-DD24-52D4-95CC-E00AA0E21A22}"/>
+                <a16:creationId xmlns:a16="http://schemas.microsoft.com/office/drawing/2014/main" id="{BF04C43D-7006-3520-5080-5AEBB28A3E47}"/>
               </a:ext>
             </a:extLst>
           </p:cNvPr>
@@ -14283,7 +14165,7 @@
           <p:cNvPr id="19" name="TextBox 18">
             <a:extLst>
               <a:ext uri="{FF2B5EF4-FFF2-40B4-BE49-F238E27FC236}">
-                <a16:creationId xmlns:a16="http://schemas.microsoft.com/office/drawing/2014/main" id="{F840990D-5865-0AE3-4D11-312ADEF27819}"/>
+                <a16:creationId xmlns:a16="http://schemas.microsoft.com/office/drawing/2014/main" id="{44BDACEC-CC87-DACA-FE7F-59003EF4D35C}"/>
               </a:ext>
             </a:extLst>
           </p:cNvPr>
@@ -14324,7 +14206,7 @@
           <p:cNvPr id="20" name="Oval 19">
             <a:extLst>
               <a:ext uri="{FF2B5EF4-FFF2-40B4-BE49-F238E27FC236}">
-                <a16:creationId xmlns:a16="http://schemas.microsoft.com/office/drawing/2014/main" id="{F13A2D6F-C505-F5BC-8BCE-B9776EB0F589}"/>
+                <a16:creationId xmlns:a16="http://schemas.microsoft.com/office/drawing/2014/main" id="{BB8FD131-6C0E-30D2-2837-A74CDAA6EE82}"/>
               </a:ext>
             </a:extLst>
           </p:cNvPr>
@@ -14385,7 +14267,7 @@
           <p:cNvPr id="21" name="TextBox 20">
             <a:extLst>
               <a:ext uri="{FF2B5EF4-FFF2-40B4-BE49-F238E27FC236}">
-                <a16:creationId xmlns:a16="http://schemas.microsoft.com/office/drawing/2014/main" id="{35DBA7B7-CB4E-7F1A-3FB4-0662653AD4CF}"/>
+                <a16:creationId xmlns:a16="http://schemas.microsoft.com/office/drawing/2014/main" id="{7269F1AA-DFD0-1A79-4337-C42D34C85CDB}"/>
               </a:ext>
             </a:extLst>
           </p:cNvPr>
@@ -14426,7 +14308,7 @@
           <p:cNvPr id="22" name="Straight Connector 21">
             <a:extLst>
               <a:ext uri="{FF2B5EF4-FFF2-40B4-BE49-F238E27FC236}">
-                <a16:creationId xmlns:a16="http://schemas.microsoft.com/office/drawing/2014/main" id="{C40CA3DC-36CC-035D-8F9A-6CF57038C911}"/>
+                <a16:creationId xmlns:a16="http://schemas.microsoft.com/office/drawing/2014/main" id="{E6DFC719-6260-1696-1138-922152749AD2}"/>
               </a:ext>
             </a:extLst>
           </p:cNvPr>
@@ -14467,7 +14349,7 @@
           <p:cNvPr id="23" name="TextBox 22">
             <a:extLst>
               <a:ext uri="{FF2B5EF4-FFF2-40B4-BE49-F238E27FC236}">
-                <a16:creationId xmlns:a16="http://schemas.microsoft.com/office/drawing/2014/main" id="{452B558B-9E4C-6D90-9E7F-4EDFB6B9732F}"/>
+                <a16:creationId xmlns:a16="http://schemas.microsoft.com/office/drawing/2014/main" id="{44773A8A-05D5-57EC-28DD-05FA10A6C7BF}"/>
               </a:ext>
             </a:extLst>
           </p:cNvPr>
@@ -14508,7 +14390,7 @@
           <p:cNvPr id="24" name="Oval 23">
             <a:extLst>
               <a:ext uri="{FF2B5EF4-FFF2-40B4-BE49-F238E27FC236}">
-                <a16:creationId xmlns:a16="http://schemas.microsoft.com/office/drawing/2014/main" id="{92085BF8-6E66-BFFA-ABA9-5EF9DDFADF49}"/>
+                <a16:creationId xmlns:a16="http://schemas.microsoft.com/office/drawing/2014/main" id="{46C4D923-37E9-6006-38BA-27203B8DA9CE}"/>
               </a:ext>
             </a:extLst>
           </p:cNvPr>
@@ -14569,7 +14451,7 @@
           <p:cNvPr id="25" name="TextBox 24">
             <a:extLst>
               <a:ext uri="{FF2B5EF4-FFF2-40B4-BE49-F238E27FC236}">
-                <a16:creationId xmlns:a16="http://schemas.microsoft.com/office/drawing/2014/main" id="{AA30FDFF-C0E0-E347-024B-C04E3EF914B7}"/>
+                <a16:creationId xmlns:a16="http://schemas.microsoft.com/office/drawing/2014/main" id="{9D7F419D-BFA0-ECBF-B465-F74E31B0A03C}"/>
               </a:ext>
             </a:extLst>
           </p:cNvPr>
@@ -14610,7 +14492,7 @@
           <p:cNvPr id="26" name="TextBox 25">
             <a:extLst>
               <a:ext uri="{FF2B5EF4-FFF2-40B4-BE49-F238E27FC236}">
-                <a16:creationId xmlns:a16="http://schemas.microsoft.com/office/drawing/2014/main" id="{9CFC4D80-DCF2-B50B-896F-61BD49BAF136}"/>
+                <a16:creationId xmlns:a16="http://schemas.microsoft.com/office/drawing/2014/main" id="{1288E3E2-27C1-CD73-3EC3-7868C079B49F}"/>
               </a:ext>
             </a:extLst>
           </p:cNvPr>
@@ -14651,7 +14533,7 @@
           <p:cNvPr id="27" name="Rectangle: Rounded Corners 26">
             <a:extLst>
               <a:ext uri="{FF2B5EF4-FFF2-40B4-BE49-F238E27FC236}">
-                <a16:creationId xmlns:a16="http://schemas.microsoft.com/office/drawing/2014/main" id="{E766FF75-58DF-23D4-5801-AA69F4399CBE}"/>
+                <a16:creationId xmlns:a16="http://schemas.microsoft.com/office/drawing/2014/main" id="{CFB89B74-ADBE-C1BF-5DC4-8FC39E25DF0B}"/>
               </a:ext>
             </a:extLst>
           </p:cNvPr>
@@ -14711,7 +14593,7 @@
           <p:cNvPr id="28" name="TextBox 27">
             <a:extLst>
               <a:ext uri="{FF2B5EF4-FFF2-40B4-BE49-F238E27FC236}">
-                <a16:creationId xmlns:a16="http://schemas.microsoft.com/office/drawing/2014/main" id="{F4A7296A-34AD-7BAB-02B4-3A7A2E6D43FD}"/>
+                <a16:creationId xmlns:a16="http://schemas.microsoft.com/office/drawing/2014/main" id="{194BE535-84CC-2858-9117-61FDBCFCA622}"/>
               </a:ext>
             </a:extLst>
           </p:cNvPr>
@@ -14751,7 +14633,7 @@
           <p:cNvPr id="29" name="TextBox 28">
             <a:extLst>
               <a:ext uri="{FF2B5EF4-FFF2-40B4-BE49-F238E27FC236}">
-                <a16:creationId xmlns:a16="http://schemas.microsoft.com/office/drawing/2014/main" id="{C7988CA5-FCDA-3AC9-050B-F274F8DC5A68}"/>
+                <a16:creationId xmlns:a16="http://schemas.microsoft.com/office/drawing/2014/main" id="{ADE59712-B702-A2DD-DB72-48063C3D2F48}"/>
               </a:ext>
             </a:extLst>
           </p:cNvPr>
@@ -14791,7 +14673,7 @@
           <p:cNvPr id="30" name="TextBox 29">
             <a:extLst>
               <a:ext uri="{FF2B5EF4-FFF2-40B4-BE49-F238E27FC236}">
-                <a16:creationId xmlns:a16="http://schemas.microsoft.com/office/drawing/2014/main" id="{79AF8725-CAEC-059B-2B66-CC5B411D1F16}"/>
+                <a16:creationId xmlns:a16="http://schemas.microsoft.com/office/drawing/2014/main" id="{81D194B0-C6C5-6CBD-3150-2BF09D4FD0D6}"/>
               </a:ext>
             </a:extLst>
           </p:cNvPr>
@@ -14831,7 +14713,7 @@
           <p:cNvPr id="31" name="TextBox 30">
             <a:extLst>
               <a:ext uri="{FF2B5EF4-FFF2-40B4-BE49-F238E27FC236}">
-                <a16:creationId xmlns:a16="http://schemas.microsoft.com/office/drawing/2014/main" id="{3682E969-BB72-02C7-30D3-ED837F671F24}"/>
+                <a16:creationId xmlns:a16="http://schemas.microsoft.com/office/drawing/2014/main" id="{B2DC06D3-458A-3B52-50F8-2BEC7A5669E3}"/>
               </a:ext>
             </a:extLst>
           </p:cNvPr>
@@ -14870,7 +14752,7 @@
     </p:spTree>
     <p:extLst>
       <p:ext uri="{BB962C8B-B14F-4D97-AF65-F5344CB8AC3E}">
-        <p14:creationId xmlns:p14="http://schemas.microsoft.com/office/powerpoint/2010/main" val="3103440305"/>
+        <p14:creationId xmlns:p14="http://schemas.microsoft.com/office/powerpoint/2010/main" val="1765777944"/>
       </p:ext>
     </p:extLst>
   </p:cSld>
@@ -14902,7 +14784,7 @@
           <p:cNvPr id="2" name="TextBox 1">
             <a:extLst>
               <a:ext uri="{FF2B5EF4-FFF2-40B4-BE49-F238E27FC236}">
-                <a16:creationId xmlns:a16="http://schemas.microsoft.com/office/drawing/2014/main" id="{D33EDDCC-7782-3D5E-1D9C-D20479D63007}"/>
+                <a16:creationId xmlns:a16="http://schemas.microsoft.com/office/drawing/2014/main" id="{4B913FE5-7B1C-49CA-C3C4-8AF7F1D934A8}"/>
               </a:ext>
             </a:extLst>
           </p:cNvPr>
@@ -14942,7 +14824,7 @@
           <p:cNvPr id="3" name="TextBox 2">
             <a:extLst>
               <a:ext uri="{FF2B5EF4-FFF2-40B4-BE49-F238E27FC236}">
-                <a16:creationId xmlns:a16="http://schemas.microsoft.com/office/drawing/2014/main" id="{07CAAF94-B698-62BD-A34C-7F0BBB558C8C}"/>
+                <a16:creationId xmlns:a16="http://schemas.microsoft.com/office/drawing/2014/main" id="{E52E3F29-A390-4E9C-914C-924C991548CF}"/>
               </a:ext>
             </a:extLst>
           </p:cNvPr>
@@ -14982,7 +14864,7 @@
           <p:cNvPr id="4" name="Rectangle: Rounded Corners 3">
             <a:extLst>
               <a:ext uri="{FF2B5EF4-FFF2-40B4-BE49-F238E27FC236}">
-                <a16:creationId xmlns:a16="http://schemas.microsoft.com/office/drawing/2014/main" id="{049284A0-8FFC-CB54-433F-9A427B958214}"/>
+                <a16:creationId xmlns:a16="http://schemas.microsoft.com/office/drawing/2014/main" id="{DC22F5A3-CCF7-CC52-B99E-EE7800E44B18}"/>
               </a:ext>
             </a:extLst>
           </p:cNvPr>
@@ -15040,7 +14922,7 @@
           <p:cNvPr id="5" name="Rectangle: Rounded Corners 4">
             <a:extLst>
               <a:ext uri="{FF2B5EF4-FFF2-40B4-BE49-F238E27FC236}">
-                <a16:creationId xmlns:a16="http://schemas.microsoft.com/office/drawing/2014/main" id="{6E25F504-35B6-7A2F-4945-2EE678DD876A}"/>
+                <a16:creationId xmlns:a16="http://schemas.microsoft.com/office/drawing/2014/main" id="{532303F5-995B-E07C-9E59-6B6378E7656B}"/>
               </a:ext>
             </a:extLst>
           </p:cNvPr>
@@ -15098,7 +14980,7 @@
           <p:cNvPr id="6" name="TextBox 5">
             <a:extLst>
               <a:ext uri="{FF2B5EF4-FFF2-40B4-BE49-F238E27FC236}">
-                <a16:creationId xmlns:a16="http://schemas.microsoft.com/office/drawing/2014/main" id="{99692C39-A56D-F6E3-EBC2-781A69AE2DA2}"/>
+                <a16:creationId xmlns:a16="http://schemas.microsoft.com/office/drawing/2014/main" id="{950B4A96-0777-B3B6-55A9-66F98F718D1D}"/>
               </a:ext>
             </a:extLst>
           </p:cNvPr>
@@ -15138,7 +15020,7 @@
           <p:cNvPr id="7" name="TextBox 6">
             <a:extLst>
               <a:ext uri="{FF2B5EF4-FFF2-40B4-BE49-F238E27FC236}">
-                <a16:creationId xmlns:a16="http://schemas.microsoft.com/office/drawing/2014/main" id="{0BAB8F5C-8C8F-D3EA-9268-10190FA807AB}"/>
+                <a16:creationId xmlns:a16="http://schemas.microsoft.com/office/drawing/2014/main" id="{C1564C85-62F6-1B34-2E92-76DDE18AFB62}"/>
               </a:ext>
             </a:extLst>
           </p:cNvPr>
@@ -15178,7 +15060,7 @@
           <p:cNvPr id="8" name="TextBox 7">
             <a:extLst>
               <a:ext uri="{FF2B5EF4-FFF2-40B4-BE49-F238E27FC236}">
-                <a16:creationId xmlns:a16="http://schemas.microsoft.com/office/drawing/2014/main" id="{8EF930E0-3D5F-C75D-8D1A-0F13B4B89C4F}"/>
+                <a16:creationId xmlns:a16="http://schemas.microsoft.com/office/drawing/2014/main" id="{D81FEDEA-600A-C379-AF2D-A52F9F03F587}"/>
               </a:ext>
             </a:extLst>
           </p:cNvPr>
@@ -15224,7 +15106,7 @@
           <p:cNvPr id="9" name="TextBox 8">
             <a:extLst>
               <a:ext uri="{FF2B5EF4-FFF2-40B4-BE49-F238E27FC236}">
-                <a16:creationId xmlns:a16="http://schemas.microsoft.com/office/drawing/2014/main" id="{A8E2EBE3-A9E6-1A89-7C4A-B779D7A3BDC2}"/>
+                <a16:creationId xmlns:a16="http://schemas.microsoft.com/office/drawing/2014/main" id="{448D1AB1-568B-CB3E-C1B9-C3051933A243}"/>
               </a:ext>
             </a:extLst>
           </p:cNvPr>
@@ -15264,7 +15146,7 @@
           <p:cNvPr id="10" name="TextBox 9">
             <a:extLst>
               <a:ext uri="{FF2B5EF4-FFF2-40B4-BE49-F238E27FC236}">
-                <a16:creationId xmlns:a16="http://schemas.microsoft.com/office/drawing/2014/main" id="{9F7E07E2-1432-7C6F-BEEA-D8133404FA16}"/>
+                <a16:creationId xmlns:a16="http://schemas.microsoft.com/office/drawing/2014/main" id="{4BE10F50-E462-AE5C-44C8-AB56FC95DC38}"/>
               </a:ext>
             </a:extLst>
           </p:cNvPr>
@@ -15304,7 +15186,7 @@
           <p:cNvPr id="11" name="TextBox 10">
             <a:extLst>
               <a:ext uri="{FF2B5EF4-FFF2-40B4-BE49-F238E27FC236}">
-                <a16:creationId xmlns:a16="http://schemas.microsoft.com/office/drawing/2014/main" id="{36B544BB-420D-5C5F-B42E-92F2CC45532A}"/>
+                <a16:creationId xmlns:a16="http://schemas.microsoft.com/office/drawing/2014/main" id="{A566E2A9-5B22-E2A5-DD82-074EE93D9170}"/>
               </a:ext>
             </a:extLst>
           </p:cNvPr>
@@ -15350,7 +15232,7 @@
           <p:cNvPr id="12" name="TextBox 11">
             <a:extLst>
               <a:ext uri="{FF2B5EF4-FFF2-40B4-BE49-F238E27FC236}">
-                <a16:creationId xmlns:a16="http://schemas.microsoft.com/office/drawing/2014/main" id="{7AA15B6A-2181-F009-FF0A-026F0432CFB9}"/>
+                <a16:creationId xmlns:a16="http://schemas.microsoft.com/office/drawing/2014/main" id="{A10C879C-986C-BAC4-0529-6FBAA437BF9A}"/>
               </a:ext>
             </a:extLst>
           </p:cNvPr>
@@ -15390,7 +15272,7 @@
           <p:cNvPr id="13" name="TextBox 12">
             <a:extLst>
               <a:ext uri="{FF2B5EF4-FFF2-40B4-BE49-F238E27FC236}">
-                <a16:creationId xmlns:a16="http://schemas.microsoft.com/office/drawing/2014/main" id="{3D7AE67C-48E7-BD42-F247-51C41E300225}"/>
+                <a16:creationId xmlns:a16="http://schemas.microsoft.com/office/drawing/2014/main" id="{BC5D901F-5F7A-232E-4F46-E4A9B3738197}"/>
               </a:ext>
             </a:extLst>
           </p:cNvPr>
@@ -15429,7 +15311,7 @@
     </p:spTree>
     <p:extLst>
       <p:ext uri="{BB962C8B-B14F-4D97-AF65-F5344CB8AC3E}">
-        <p14:creationId xmlns:p14="http://schemas.microsoft.com/office/powerpoint/2010/main" val="3707399560"/>
+        <p14:creationId xmlns:p14="http://schemas.microsoft.com/office/powerpoint/2010/main" val="2901759577"/>
       </p:ext>
     </p:extLst>
   </p:cSld>
@@ -15461,7 +15343,7 @@
           <p:cNvPr id="2" name="TextBox 1">
             <a:extLst>
               <a:ext uri="{FF2B5EF4-FFF2-40B4-BE49-F238E27FC236}">
-                <a16:creationId xmlns:a16="http://schemas.microsoft.com/office/drawing/2014/main" id="{F7352744-CAD7-EC1D-502A-282223FC4FCF}"/>
+                <a16:creationId xmlns:a16="http://schemas.microsoft.com/office/drawing/2014/main" id="{284DA727-936D-C035-E338-75E1DD393AF3}"/>
               </a:ext>
             </a:extLst>
           </p:cNvPr>
@@ -15501,7 +15383,7 @@
           <p:cNvPr id="3" name="TextBox 2">
             <a:extLst>
               <a:ext uri="{FF2B5EF4-FFF2-40B4-BE49-F238E27FC236}">
-                <a16:creationId xmlns:a16="http://schemas.microsoft.com/office/drawing/2014/main" id="{D0EE8212-F5B9-80FE-C41B-F6A813786A00}"/>
+                <a16:creationId xmlns:a16="http://schemas.microsoft.com/office/drawing/2014/main" id="{BD1DB7FB-261A-99FB-1D57-FC6C1A284C85}"/>
               </a:ext>
             </a:extLst>
           </p:cNvPr>
@@ -15541,7 +15423,7 @@
           <p:cNvPr id="4" name="Rectangle: Rounded Corners 3">
             <a:extLst>
               <a:ext uri="{FF2B5EF4-FFF2-40B4-BE49-F238E27FC236}">
-                <a16:creationId xmlns:a16="http://schemas.microsoft.com/office/drawing/2014/main" id="{4886ABD0-00BE-25D8-CB39-6138225C8191}"/>
+                <a16:creationId xmlns:a16="http://schemas.microsoft.com/office/drawing/2014/main" id="{B199D7F6-1A49-6CD5-5B05-6B92DC8FC3B5}"/>
               </a:ext>
             </a:extLst>
           </p:cNvPr>
@@ -15601,7 +15483,7 @@
           <p:cNvPr id="5" name="TextBox 4">
             <a:extLst>
               <a:ext uri="{FF2B5EF4-FFF2-40B4-BE49-F238E27FC236}">
-                <a16:creationId xmlns:a16="http://schemas.microsoft.com/office/drawing/2014/main" id="{D3946F94-A4CC-3C44-8CC6-B719AB23DC3E}"/>
+                <a16:creationId xmlns:a16="http://schemas.microsoft.com/office/drawing/2014/main" id="{3213F7AC-6298-35EB-D0CB-91C5012DBAA0}"/>
               </a:ext>
             </a:extLst>
           </p:cNvPr>
@@ -15641,7 +15523,7 @@
           <p:cNvPr id="6" name="TextBox 5">
             <a:extLst>
               <a:ext uri="{FF2B5EF4-FFF2-40B4-BE49-F238E27FC236}">
-                <a16:creationId xmlns:a16="http://schemas.microsoft.com/office/drawing/2014/main" id="{22A7AE90-4D9B-F4DC-87AE-778F7E2D5E5C}"/>
+                <a16:creationId xmlns:a16="http://schemas.microsoft.com/office/drawing/2014/main" id="{7115AAA5-4E24-3E88-00B6-105318ECC9BD}"/>
               </a:ext>
             </a:extLst>
           </p:cNvPr>
@@ -15681,7 +15563,7 @@
           <p:cNvPr id="7" name="Rectangle: Rounded Corners 6">
             <a:extLst>
               <a:ext uri="{FF2B5EF4-FFF2-40B4-BE49-F238E27FC236}">
-                <a16:creationId xmlns:a16="http://schemas.microsoft.com/office/drawing/2014/main" id="{467EDC4D-20AC-3F5F-4260-0620486C0B81}"/>
+                <a16:creationId xmlns:a16="http://schemas.microsoft.com/office/drawing/2014/main" id="{3F301EF2-0DAC-033E-487B-8CA3DE559A36}"/>
               </a:ext>
             </a:extLst>
           </p:cNvPr>
@@ -15741,7 +15623,7 @@
           <p:cNvPr id="8" name="TextBox 7">
             <a:extLst>
               <a:ext uri="{FF2B5EF4-FFF2-40B4-BE49-F238E27FC236}">
-                <a16:creationId xmlns:a16="http://schemas.microsoft.com/office/drawing/2014/main" id="{D88DF6BE-9BE0-8B3D-A1B0-01C1D129FB59}"/>
+                <a16:creationId xmlns:a16="http://schemas.microsoft.com/office/drawing/2014/main" id="{C8B2E152-AFD5-F842-A4C0-28A5D28BB251}"/>
               </a:ext>
             </a:extLst>
           </p:cNvPr>
@@ -15781,7 +15663,7 @@
           <p:cNvPr id="9" name="TextBox 8">
             <a:extLst>
               <a:ext uri="{FF2B5EF4-FFF2-40B4-BE49-F238E27FC236}">
-                <a16:creationId xmlns:a16="http://schemas.microsoft.com/office/drawing/2014/main" id="{4BFAF746-1AC0-1F6F-725B-7F0A0F508894}"/>
+                <a16:creationId xmlns:a16="http://schemas.microsoft.com/office/drawing/2014/main" id="{936D0199-37FB-3765-AAF2-5E05FCA95935}"/>
               </a:ext>
             </a:extLst>
           </p:cNvPr>
@@ -15821,7 +15703,7 @@
           <p:cNvPr id="10" name="Rectangle: Rounded Corners 9">
             <a:extLst>
               <a:ext uri="{FF2B5EF4-FFF2-40B4-BE49-F238E27FC236}">
-                <a16:creationId xmlns:a16="http://schemas.microsoft.com/office/drawing/2014/main" id="{E36B8132-85BC-3C59-4F6C-75277302C1F4}"/>
+                <a16:creationId xmlns:a16="http://schemas.microsoft.com/office/drawing/2014/main" id="{384AC63A-ED9F-4E61-5F17-124375798BF2}"/>
               </a:ext>
             </a:extLst>
           </p:cNvPr>
@@ -15881,7 +15763,7 @@
           <p:cNvPr id="11" name="TextBox 10">
             <a:extLst>
               <a:ext uri="{FF2B5EF4-FFF2-40B4-BE49-F238E27FC236}">
-                <a16:creationId xmlns:a16="http://schemas.microsoft.com/office/drawing/2014/main" id="{4743B06B-C296-66BD-40D5-CA050143B346}"/>
+                <a16:creationId xmlns:a16="http://schemas.microsoft.com/office/drawing/2014/main" id="{1C115339-2077-4B2A-167C-BC686EB61804}"/>
               </a:ext>
             </a:extLst>
           </p:cNvPr>
@@ -15921,7 +15803,7 @@
           <p:cNvPr id="12" name="TextBox 11">
             <a:extLst>
               <a:ext uri="{FF2B5EF4-FFF2-40B4-BE49-F238E27FC236}">
-                <a16:creationId xmlns:a16="http://schemas.microsoft.com/office/drawing/2014/main" id="{38994F4C-E982-FA0C-90B7-EE4F3BE466D7}"/>
+                <a16:creationId xmlns:a16="http://schemas.microsoft.com/office/drawing/2014/main" id="{C66DAD02-93EF-5CC7-5CF6-70BE7BE51CFA}"/>
               </a:ext>
             </a:extLst>
           </p:cNvPr>
@@ -15961,7 +15843,7 @@
           <p:cNvPr id="13" name="Rectangle: Rounded Corners 12">
             <a:extLst>
               <a:ext uri="{FF2B5EF4-FFF2-40B4-BE49-F238E27FC236}">
-                <a16:creationId xmlns:a16="http://schemas.microsoft.com/office/drawing/2014/main" id="{787A6AAB-AA72-9B30-4756-712E7A3F36D5}"/>
+                <a16:creationId xmlns:a16="http://schemas.microsoft.com/office/drawing/2014/main" id="{FE7E784A-9584-13FB-CC1D-DCC66E24EDF3}"/>
               </a:ext>
             </a:extLst>
           </p:cNvPr>
@@ -16021,7 +15903,7 @@
           <p:cNvPr id="14" name="TextBox 13">
             <a:extLst>
               <a:ext uri="{FF2B5EF4-FFF2-40B4-BE49-F238E27FC236}">
-                <a16:creationId xmlns:a16="http://schemas.microsoft.com/office/drawing/2014/main" id="{4B7790E6-69B2-AD28-07DC-2068B20EF309}"/>
+                <a16:creationId xmlns:a16="http://schemas.microsoft.com/office/drawing/2014/main" id="{C25AACFA-800A-B988-0345-AEAEDAAFC263}"/>
               </a:ext>
             </a:extLst>
           </p:cNvPr>
@@ -16061,7 +15943,7 @@
           <p:cNvPr id="15" name="TextBox 14">
             <a:extLst>
               <a:ext uri="{FF2B5EF4-FFF2-40B4-BE49-F238E27FC236}">
-                <a16:creationId xmlns:a16="http://schemas.microsoft.com/office/drawing/2014/main" id="{46285DE3-1E3A-5BF3-D033-50E3F90146AF}"/>
+                <a16:creationId xmlns:a16="http://schemas.microsoft.com/office/drawing/2014/main" id="{FDD5EB42-48B7-2F2A-57A6-88164999C2E3}"/>
               </a:ext>
             </a:extLst>
           </p:cNvPr>
@@ -16101,7 +15983,7 @@
           <p:cNvPr id="16" name="Rectangle: Rounded Corners 15">
             <a:extLst>
               <a:ext uri="{FF2B5EF4-FFF2-40B4-BE49-F238E27FC236}">
-                <a16:creationId xmlns:a16="http://schemas.microsoft.com/office/drawing/2014/main" id="{0B8DCAA0-5453-EF11-84FE-A6B8423B7A5C}"/>
+                <a16:creationId xmlns:a16="http://schemas.microsoft.com/office/drawing/2014/main" id="{7D36FAA0-CDED-F5EA-9D5E-FC5AB78D42B4}"/>
               </a:ext>
             </a:extLst>
           </p:cNvPr>
@@ -16161,7 +16043,7 @@
           <p:cNvPr id="17" name="TextBox 16">
             <a:extLst>
               <a:ext uri="{FF2B5EF4-FFF2-40B4-BE49-F238E27FC236}">
-                <a16:creationId xmlns:a16="http://schemas.microsoft.com/office/drawing/2014/main" id="{C4838F59-3429-9C90-CACA-9DBDD47210E3}"/>
+                <a16:creationId xmlns:a16="http://schemas.microsoft.com/office/drawing/2014/main" id="{21521833-5F85-9C6B-D229-3F0EAD56ACE8}"/>
               </a:ext>
             </a:extLst>
           </p:cNvPr>
@@ -16201,7 +16083,7 @@
           <p:cNvPr id="18" name="TextBox 17">
             <a:extLst>
               <a:ext uri="{FF2B5EF4-FFF2-40B4-BE49-F238E27FC236}">
-                <a16:creationId xmlns:a16="http://schemas.microsoft.com/office/drawing/2014/main" id="{7F88DE5A-DFD2-496A-8E45-9ACE46525C55}"/>
+                <a16:creationId xmlns:a16="http://schemas.microsoft.com/office/drawing/2014/main" id="{08F4D525-D223-2A6F-DBD7-32BACFF486FE}"/>
               </a:ext>
             </a:extLst>
           </p:cNvPr>
@@ -16241,7 +16123,7 @@
           <p:cNvPr id="19" name="TextBox 18">
             <a:extLst>
               <a:ext uri="{FF2B5EF4-FFF2-40B4-BE49-F238E27FC236}">
-                <a16:creationId xmlns:a16="http://schemas.microsoft.com/office/drawing/2014/main" id="{1BCAB785-7216-716C-F10E-D4DCC5BA795B}"/>
+                <a16:creationId xmlns:a16="http://schemas.microsoft.com/office/drawing/2014/main" id="{53A7B887-F1B0-3484-23C1-8CBA3976A654}"/>
               </a:ext>
             </a:extLst>
           </p:cNvPr>
@@ -16282,7 +16164,7 @@
           <p:cNvPr id="20" name="TextBox 19">
             <a:extLst>
               <a:ext uri="{FF2B5EF4-FFF2-40B4-BE49-F238E27FC236}">
-                <a16:creationId xmlns:a16="http://schemas.microsoft.com/office/drawing/2014/main" id="{D8D75823-CE6A-BBC5-A094-12DB3146A158}"/>
+                <a16:creationId xmlns:a16="http://schemas.microsoft.com/office/drawing/2014/main" id="{92A611E9-26E0-1ED0-18EE-0A70892A224C}"/>
               </a:ext>
             </a:extLst>
           </p:cNvPr>
@@ -16322,7 +16204,7 @@
           <p:cNvPr id="21" name="TextBox 20">
             <a:extLst>
               <a:ext uri="{FF2B5EF4-FFF2-40B4-BE49-F238E27FC236}">
-                <a16:creationId xmlns:a16="http://schemas.microsoft.com/office/drawing/2014/main" id="{7DFCCAFD-BDA4-C5FC-1947-BE98D62C5B30}"/>
+                <a16:creationId xmlns:a16="http://schemas.microsoft.com/office/drawing/2014/main" id="{D24AE2B5-1384-57BD-1B2E-3A7560EB00F2}"/>
               </a:ext>
             </a:extLst>
           </p:cNvPr>
@@ -16361,7 +16243,7 @@
     </p:spTree>
     <p:extLst>
       <p:ext uri="{BB962C8B-B14F-4D97-AF65-F5344CB8AC3E}">
-        <p14:creationId xmlns:p14="http://schemas.microsoft.com/office/powerpoint/2010/main" val="3849144097"/>
+        <p14:creationId xmlns:p14="http://schemas.microsoft.com/office/powerpoint/2010/main" val="1173582889"/>
       </p:ext>
     </p:extLst>
   </p:cSld>
